--- a/out/Project_543_Uncertainty_Visualization.pptx
+++ b/out/Project_543_Uncertainty_Visualization.pptx
@@ -3099,6 +3099,14 @@
 <file path=ppt/slides/slide1.xml><?xml version="1.0" encoding="utf-8"?>
 <p:sld xmlns:a="http://schemas.openxmlformats.org/drawingml/2006/main" xmlns:p="http://schemas.openxmlformats.org/presentationml/2006/main" xmlns:r="http://schemas.openxmlformats.org/officeDocument/2006/relationships">
   <p:cSld>
+    <p:bg>
+      <p:bgPr>
+        <a:solidFill>
+          <a:srgbClr val="F7F8FA"/>
+        </a:solidFill>
+        <a:effectLst/>
+      </p:bgPr>
+    </p:bg>
     <p:spTree>
       <p:nvGrpSpPr>
         <p:cNvPr id="1" name=""/>
@@ -3108,24 +3116,123 @@
       <p:grpSpPr/>
       <p:sp>
         <p:nvSpPr>
-          <p:cNvPr id="2" name="Title 1"/>
-          <p:cNvSpPr>
-            <a:spLocks noGrp="1"/>
-          </p:cNvSpPr>
-          <p:nvPr>
-            <p:ph type="ctrTitle"/>
-          </p:nvPr>
-        </p:nvSpPr>
-        <p:spPr/>
-        <p:txBody>
-          <a:bodyPr/>
-          <a:lstStyle/>
-          <a:p>
+          <p:cNvPr id="2" name="Rectangle 1"/>
+          <p:cNvSpPr/>
+          <p:nvPr/>
+        </p:nvSpPr>
+        <p:spPr>
+          <a:xfrm>
+            <a:off x="0" y="0"/>
+            <a:ext cx="12191695" cy="2926080"/>
+          </a:xfrm>
+          <a:prstGeom prst="rect">
+            <a:avLst/>
+          </a:prstGeom>
+          <a:solidFill>
+            <a:srgbClr val="0B1F3B"/>
+          </a:solidFill>
+          <a:ln>
+            <a:noFill/>
+          </a:ln>
+        </p:spPr>
+        <p:style>
+          <a:lnRef idx="1">
+            <a:schemeClr val="accent1"/>
+          </a:lnRef>
+          <a:fillRef idx="3">
+            <a:schemeClr val="accent1"/>
+          </a:fillRef>
+          <a:effectRef idx="2">
+            <a:schemeClr val="accent1"/>
+          </a:effectRef>
+          <a:fontRef idx="minor">
+            <a:schemeClr val="lt1"/>
+          </a:fontRef>
+        </p:style>
+        <p:txBody>
+          <a:bodyPr rtlCol="0" anchor="ctr"/>
+          <a:lstStyle/>
+          <a:p>
+            <a:pPr algn="ctr"/>
+          </a:p>
+        </p:txBody>
+      </p:sp>
+      <p:sp>
+        <p:nvSpPr>
+          <p:cNvPr id="3" name="Rectangle 2"/>
+          <p:cNvSpPr/>
+          <p:nvPr/>
+        </p:nvSpPr>
+        <p:spPr>
+          <a:xfrm>
+            <a:off x="0" y="2852928"/>
+            <a:ext cx="12191695" cy="73152"/>
+          </a:xfrm>
+          <a:prstGeom prst="rect">
+            <a:avLst/>
+          </a:prstGeom>
+          <a:solidFill>
+            <a:srgbClr val="1AA6B7"/>
+          </a:solidFill>
+          <a:ln>
+            <a:noFill/>
+          </a:ln>
+        </p:spPr>
+        <p:style>
+          <a:lnRef idx="1">
+            <a:schemeClr val="accent1"/>
+          </a:lnRef>
+          <a:fillRef idx="3">
+            <a:schemeClr val="accent1"/>
+          </a:fillRef>
+          <a:effectRef idx="2">
+            <a:schemeClr val="accent1"/>
+          </a:effectRef>
+          <a:fontRef idx="minor">
+            <a:schemeClr val="lt1"/>
+          </a:fontRef>
+        </p:style>
+        <p:txBody>
+          <a:bodyPr rtlCol="0" anchor="ctr"/>
+          <a:lstStyle/>
+          <a:p>
+            <a:pPr algn="ctr"/>
+          </a:p>
+        </p:txBody>
+      </p:sp>
+      <p:sp>
+        <p:nvSpPr>
+          <p:cNvPr id="4" name="TextBox 3"/>
+          <p:cNvSpPr txBox="1"/>
+          <p:nvPr/>
+        </p:nvSpPr>
+        <p:spPr>
+          <a:xfrm>
+            <a:off x="685800" y="914400"/>
+            <a:ext cx="10820095" cy="1280160"/>
+          </a:xfrm>
+          <a:prstGeom prst="rect">
+            <a:avLst/>
+          </a:prstGeom>
+          <a:noFill/>
+        </p:spPr>
+        <p:txBody>
+          <a:bodyPr wrap="none">
+            <a:spAutoFit/>
+          </a:bodyPr>
+          <a:lstStyle/>
+          <a:p>
+            <a:pPr>
+              <a:defRPr sz="3600" b="1">
+                <a:solidFill>
+                  <a:srgbClr val="FFFFFF"/>
+                </a:solidFill>
+              </a:defRPr>
+            </a:pPr>
             <a:r>
               <a:t>Project #543</a:t>
             </a:r>
-          </a:p>
-          <a:p>
+            <a:br/>
             <a:r>
               <a:t>Visualizing Spatio-Temporal Uncertainty in High-Density Data</a:t>
             </a:r>
@@ -3134,21 +3241,32 @@
       </p:sp>
       <p:sp>
         <p:nvSpPr>
-          <p:cNvPr id="3" name="Subtitle 2"/>
-          <p:cNvSpPr>
-            <a:spLocks noGrp="1"/>
-          </p:cNvSpPr>
-          <p:nvPr>
-            <p:ph type="subTitle" idx="1"/>
-          </p:nvPr>
-        </p:nvSpPr>
-        <p:spPr/>
-        <p:txBody>
-          <a:bodyPr/>
+          <p:cNvPr id="5" name="TextBox 4"/>
+          <p:cNvSpPr txBox="1"/>
+          <p:nvPr/>
+        </p:nvSpPr>
+        <p:spPr>
+          <a:xfrm>
+            <a:off x="685800" y="3337560"/>
+            <a:ext cx="10820095" cy="1005840"/>
+          </a:xfrm>
+          <a:prstGeom prst="rect">
+            <a:avLst/>
+          </a:prstGeom>
+          <a:noFill/>
+        </p:spPr>
+        <p:txBody>
+          <a:bodyPr wrap="none">
+            <a:spAutoFit/>
+          </a:bodyPr>
           <a:lstStyle/>
           <a:p>
             <a:pPr>
-              <a:defRPr sz="2000"/>
+              <a:defRPr sz="1800">
+                <a:solidFill>
+                  <a:srgbClr val="111827"/>
+                </a:solidFill>
+              </a:defRPr>
             </a:pPr>
             <a:r>
               <a:t>Mustafa Bozyel</a:t>
@@ -3156,7 +3274,11 @@
           </a:p>
           <a:p>
             <a:pPr>
-              <a:defRPr sz="2000"/>
+              <a:defRPr sz="1800">
+                <a:solidFill>
+                  <a:srgbClr val="111827"/>
+                </a:solidFill>
+              </a:defRPr>
             </a:pPr>
             <a:r>
               <a:t>Senih Kırmaç</a:t>
@@ -3164,10 +3286,94 @@
           </a:p>
           <a:p>
             <a:pPr>
-              <a:defRPr sz="2000"/>
+              <a:defRPr sz="1800">
+                <a:solidFill>
+                  <a:srgbClr val="111827"/>
+                </a:solidFill>
+              </a:defRPr>
             </a:pPr>
             <a:r>
               <a:t>Ömer Mert Özel</a:t>
+            </a:r>
+          </a:p>
+        </p:txBody>
+      </p:sp>
+      <p:sp>
+        <p:nvSpPr>
+          <p:cNvPr id="6" name="Rounded Rectangle 5"/>
+          <p:cNvSpPr/>
+          <p:nvPr/>
+        </p:nvSpPr>
+        <p:spPr>
+          <a:xfrm>
+            <a:off x="685800" y="5989320"/>
+            <a:ext cx="2834640" cy="411480"/>
+          </a:xfrm>
+          <a:prstGeom prst="roundRect">
+            <a:avLst/>
+          </a:prstGeom>
+          <a:solidFill>
+            <a:srgbClr val="FFFFFF"/>
+          </a:solidFill>
+          <a:ln>
+            <a:solidFill>
+              <a:srgbClr val="E5E7EB"/>
+            </a:solidFill>
+          </a:ln>
+        </p:spPr>
+        <p:style>
+          <a:lnRef idx="1">
+            <a:schemeClr val="accent1"/>
+          </a:lnRef>
+          <a:fillRef idx="3">
+            <a:schemeClr val="accent1"/>
+          </a:fillRef>
+          <a:effectRef idx="2">
+            <a:schemeClr val="accent1"/>
+          </a:effectRef>
+          <a:fontRef idx="minor">
+            <a:schemeClr val="lt1"/>
+          </a:fontRef>
+        </p:style>
+        <p:txBody>
+          <a:bodyPr rtlCol="0" anchor="ctr"/>
+          <a:lstStyle/>
+          <a:p>
+            <a:pPr algn="ctr"/>
+          </a:p>
+        </p:txBody>
+      </p:sp>
+      <p:sp>
+        <p:nvSpPr>
+          <p:cNvPr id="7" name="TextBox 6"/>
+          <p:cNvSpPr txBox="1"/>
+          <p:nvPr/>
+        </p:nvSpPr>
+        <p:spPr>
+          <a:xfrm>
+            <a:off x="868680" y="6053328"/>
+            <a:ext cx="2560320" cy="320040"/>
+          </a:xfrm>
+          <a:prstGeom prst="rect">
+            <a:avLst/>
+          </a:prstGeom>
+          <a:noFill/>
+        </p:spPr>
+        <p:txBody>
+          <a:bodyPr wrap="none">
+            <a:spAutoFit/>
+          </a:bodyPr>
+          <a:lstStyle/>
+          <a:p>
+            <a:pPr>
+              <a:defRPr sz="1200" b="1">
+                <a:solidFill>
+                  <a:srgbClr val="0B1F3B"/>
+                </a:solidFill>
+              </a:defRPr>
+            </a:pPr>
+            <a:r>
+              <a:t>Project #543</a:t>
             </a:r>
           </a:p>
         </p:txBody>
@@ -3183,6 +3389,14 @@
 <file path=ppt/slides/slide10.xml><?xml version="1.0" encoding="utf-8"?>
 <p:sld xmlns:a="http://schemas.openxmlformats.org/drawingml/2006/main" xmlns:p="http://schemas.openxmlformats.org/presentationml/2006/main" xmlns:r="http://schemas.openxmlformats.org/officeDocument/2006/relationships">
   <p:cSld>
+    <p:bg>
+      <p:bgPr>
+        <a:solidFill>
+          <a:srgbClr val="F7F8FA"/>
+        </a:solidFill>
+        <a:effectLst/>
+      </p:bgPr>
+    </p:bg>
     <p:spTree>
       <p:nvGrpSpPr>
         <p:cNvPr id="1" name=""/>
@@ -3192,19 +3406,119 @@
       <p:grpSpPr/>
       <p:sp>
         <p:nvSpPr>
-          <p:cNvPr id="2" name="Title 1"/>
-          <p:cNvSpPr>
-            <a:spLocks noGrp="1"/>
-          </p:cNvSpPr>
-          <p:nvPr>
-            <p:ph type="title"/>
-          </p:nvPr>
-        </p:nvSpPr>
-        <p:spPr/>
-        <p:txBody>
-          <a:bodyPr/>
-          <a:lstStyle/>
-          <a:p>
+          <p:cNvPr id="2" name="Rectangle 1"/>
+          <p:cNvSpPr/>
+          <p:nvPr/>
+        </p:nvSpPr>
+        <p:spPr>
+          <a:xfrm>
+            <a:off x="0" y="0"/>
+            <a:ext cx="12191695" cy="658368"/>
+          </a:xfrm>
+          <a:prstGeom prst="rect">
+            <a:avLst/>
+          </a:prstGeom>
+          <a:solidFill>
+            <a:srgbClr val="0B1F3B"/>
+          </a:solidFill>
+          <a:ln>
+            <a:noFill/>
+          </a:ln>
+        </p:spPr>
+        <p:style>
+          <a:lnRef idx="1">
+            <a:schemeClr val="accent1"/>
+          </a:lnRef>
+          <a:fillRef idx="3">
+            <a:schemeClr val="accent1"/>
+          </a:fillRef>
+          <a:effectRef idx="2">
+            <a:schemeClr val="accent1"/>
+          </a:effectRef>
+          <a:fontRef idx="minor">
+            <a:schemeClr val="lt1"/>
+          </a:fontRef>
+        </p:style>
+        <p:txBody>
+          <a:bodyPr rtlCol="0" anchor="ctr"/>
+          <a:lstStyle/>
+          <a:p>
+            <a:pPr algn="ctr"/>
+          </a:p>
+        </p:txBody>
+      </p:sp>
+      <p:sp>
+        <p:nvSpPr>
+          <p:cNvPr id="3" name="Rectangle 2"/>
+          <p:cNvSpPr/>
+          <p:nvPr/>
+        </p:nvSpPr>
+        <p:spPr>
+          <a:xfrm>
+            <a:off x="0" y="603504"/>
+            <a:ext cx="12191695" cy="54864"/>
+          </a:xfrm>
+          <a:prstGeom prst="rect">
+            <a:avLst/>
+          </a:prstGeom>
+          <a:solidFill>
+            <a:srgbClr val="1AA6B7"/>
+          </a:solidFill>
+          <a:ln>
+            <a:noFill/>
+          </a:ln>
+        </p:spPr>
+        <p:style>
+          <a:lnRef idx="1">
+            <a:schemeClr val="accent1"/>
+          </a:lnRef>
+          <a:fillRef idx="3">
+            <a:schemeClr val="accent1"/>
+          </a:fillRef>
+          <a:effectRef idx="2">
+            <a:schemeClr val="accent1"/>
+          </a:effectRef>
+          <a:fontRef idx="minor">
+            <a:schemeClr val="lt1"/>
+          </a:fontRef>
+        </p:style>
+        <p:txBody>
+          <a:bodyPr rtlCol="0" anchor="ctr"/>
+          <a:lstStyle/>
+          <a:p>
+            <a:pPr algn="ctr"/>
+          </a:p>
+        </p:txBody>
+      </p:sp>
+      <p:sp>
+        <p:nvSpPr>
+          <p:cNvPr id="4" name="TextBox 3"/>
+          <p:cNvSpPr txBox="1"/>
+          <p:nvPr/>
+        </p:nvSpPr>
+        <p:spPr>
+          <a:xfrm>
+            <a:off x="685800" y="128016"/>
+            <a:ext cx="10820095" cy="457200"/>
+          </a:xfrm>
+          <a:prstGeom prst="rect">
+            <a:avLst/>
+          </a:prstGeom>
+          <a:noFill/>
+        </p:spPr>
+        <p:txBody>
+          <a:bodyPr wrap="none">
+            <a:spAutoFit/>
+          </a:bodyPr>
+          <a:lstStyle/>
+          <a:p>
+            <a:pPr>
+              <a:defRPr sz="2200" b="1">
+                <a:solidFill>
+                  <a:srgbClr val="FFFFFF"/>
+                </a:solidFill>
+              </a:defRPr>
+            </a:pPr>
             <a:r>
               <a:t>Methodology — GNSS Fix Visualization (Leaflet + D3)</a:t>
             </a:r>
@@ -3213,144 +3527,376 @@
       </p:sp>
       <p:sp>
         <p:nvSpPr>
-          <p:cNvPr id="3" name="Content Placeholder 2"/>
-          <p:cNvSpPr>
-            <a:spLocks noGrp="1"/>
-          </p:cNvSpPr>
-          <p:nvPr>
-            <p:ph idx="1"/>
-          </p:nvPr>
-        </p:nvSpPr>
-        <p:spPr/>
-        <p:txBody>
-          <a:bodyPr wrap="square"/>
+          <p:cNvPr id="5" name="TextBox 4"/>
+          <p:cNvSpPr txBox="1"/>
+          <p:nvPr/>
+        </p:nvSpPr>
+        <p:spPr>
+          <a:xfrm>
+            <a:off x="685800" y="420624"/>
+            <a:ext cx="10820095" cy="274320"/>
+          </a:xfrm>
+          <a:prstGeom prst="rect">
+            <a:avLst/>
+          </a:prstGeom>
+          <a:noFill/>
+        </p:spPr>
+        <p:txBody>
+          <a:bodyPr wrap="none">
+            <a:spAutoFit/>
+          </a:bodyPr>
+          <a:lstStyle/>
+          <a:p>
+            <a:pPr>
+              <a:defRPr sz="1200">
+                <a:solidFill>
+                  <a:srgbClr val="1AA6B7"/>
+                </a:solidFill>
+              </a:defRPr>
+            </a:pPr>
+            <a:r>
+              <a:t>Implementation</a:t>
+            </a:r>
+          </a:p>
+        </p:txBody>
+      </p:sp>
+      <p:sp>
+        <p:nvSpPr>
+          <p:cNvPr id="6" name="Rounded Rectangle 5"/>
+          <p:cNvSpPr/>
+          <p:nvPr/>
+        </p:nvSpPr>
+        <p:spPr>
+          <a:xfrm>
+            <a:off x="685800" y="978408"/>
+            <a:ext cx="10820095" cy="5376672"/>
+          </a:xfrm>
+          <a:prstGeom prst="roundRect">
+            <a:avLst/>
+          </a:prstGeom>
+          <a:solidFill>
+            <a:srgbClr val="FFFFFF"/>
+          </a:solidFill>
+          <a:ln>
+            <a:solidFill>
+              <a:srgbClr val="E5E7EB"/>
+            </a:solidFill>
+          </a:ln>
+        </p:spPr>
+        <p:style>
+          <a:lnRef idx="1">
+            <a:schemeClr val="accent1"/>
+          </a:lnRef>
+          <a:fillRef idx="3">
+            <a:schemeClr val="accent1"/>
+          </a:fillRef>
+          <a:effectRef idx="2">
+            <a:schemeClr val="accent1"/>
+          </a:effectRef>
+          <a:fontRef idx="minor">
+            <a:schemeClr val="lt1"/>
+          </a:fontRef>
+        </p:style>
+        <p:txBody>
+          <a:bodyPr rtlCol="0" anchor="ctr"/>
+          <a:lstStyle/>
+          <a:p>
+            <a:pPr algn="ctr"/>
+          </a:p>
+        </p:txBody>
+      </p:sp>
+      <p:sp>
+        <p:nvSpPr>
+          <p:cNvPr id="7" name="TextBox 6"/>
+          <p:cNvSpPr txBox="1"/>
+          <p:nvPr/>
+        </p:nvSpPr>
+        <p:spPr>
+          <a:xfrm>
+            <a:off x="1005840" y="1207008"/>
+            <a:ext cx="10180015" cy="4919472"/>
+          </a:xfrm>
+          <a:prstGeom prst="rect">
+            <a:avLst/>
+          </a:prstGeom>
+          <a:noFill/>
+        </p:spPr>
+        <p:txBody>
+          <a:bodyPr wrap="square">
+            <a:spAutoFit/>
+          </a:bodyPr>
           <a:lstStyle/>
           <a:p>
             <a:pPr>
               <a:spcAft>
-                <a:spcPts val="200"/>
+                <a:spcPts val="600"/>
               </a:spcAft>
-              <a:defRPr sz="2000">
-                <a:solidFill>
-                  <a:srgbClr val="111111"/>
-                </a:solidFill>
-              </a:defRPr>
-            </a:pPr>
-            <a:r>
-              <a:rPr sz="2000" i="0"/>
+              <a:defRPr sz="1900">
+                <a:solidFill>
+                  <a:srgbClr val="111827"/>
+                </a:solidFill>
+              </a:defRPr>
+            </a:pPr>
+            <a:r>
+              <a:rPr sz="1900" i="0">
+                <a:solidFill>
+                  <a:srgbClr val="111827"/>
+                </a:solidFill>
+              </a:rPr>
               <a:t>Ingest Android GNSS Logger data; keep only “Fix,” rows → *_FixOnly.txt (CSV-like).</a:t>
             </a:r>
           </a:p>
           <a:p>
             <a:pPr>
               <a:spcAft>
-                <a:spcPts val="200"/>
+                <a:spcPts val="600"/>
               </a:spcAft>
-              <a:defRPr sz="2000">
-                <a:solidFill>
-                  <a:srgbClr val="111111"/>
-                </a:solidFill>
-              </a:defRPr>
-            </a:pPr>
-            <a:r>
-              <a:rPr sz="2000" i="0"/>
+              <a:defRPr sz="1900">
+                <a:solidFill>
+                  <a:srgbClr val="111827"/>
+                </a:solidFill>
+              </a:defRPr>
+            </a:pPr>
+            <a:r>
+              <a:rPr sz="1900" i="0">
+                <a:solidFill>
+                  <a:srgbClr val="111827"/>
+                </a:solidFill>
+              </a:rPr>
               <a:t>Optionally load OSM GPX reference exported as *_latlon_by_time.txt (TSV: ISO_TIME, LAT, LON).</a:t>
             </a:r>
           </a:p>
           <a:p>
             <a:pPr>
               <a:spcAft>
-                <a:spcPts val="200"/>
+                <a:spcPts val="600"/>
               </a:spcAft>
-              <a:defRPr sz="2000">
-                <a:solidFill>
-                  <a:srgbClr val="111111"/>
-                </a:solidFill>
-              </a:defRPr>
-            </a:pPr>
-            <a:r>
-              <a:rPr sz="2000" i="0"/>
+              <a:defRPr sz="1900">
+                <a:solidFill>
+                  <a:srgbClr val="111827"/>
+                </a:solidFill>
+              </a:defRPr>
+            </a:pPr>
+            <a:r>
+              <a:rPr sz="1900" i="0">
+                <a:solidFill>
+                  <a:srgbClr val="111827"/>
+                </a:solidFill>
+              </a:rPr>
               <a:t>Parse Fix fields (lat/lon/alt/speed/accuracy/bearing/UnixTimeMillis/VerticalAccuracyMeters) in a web app via fetch().</a:t>
             </a:r>
           </a:p>
           <a:p>
             <a:pPr>
               <a:spcAft>
-                <a:spcPts val="200"/>
+                <a:spcPts val="600"/>
               </a:spcAft>
-              <a:defRPr sz="2000">
-                <a:solidFill>
-                  <a:srgbClr val="111111"/>
-                </a:solidFill>
-              </a:defRPr>
-            </a:pPr>
-            <a:r>
-              <a:rPr sz="2000" i="0"/>
+              <a:defRPr sz="1900">
+                <a:solidFill>
+                  <a:srgbClr val="111827"/>
+                </a:solidFill>
+              </a:defRPr>
+            </a:pPr>
+            <a:r>
+              <a:rPr sz="1900" i="0">
+                <a:solidFill>
+                  <a:srgbClr val="111827"/>
+                </a:solidFill>
+              </a:rPr>
               <a:t>Compute derived metrics: Haversine distance-from-first, Δlat/Δlon, and Δalt.</a:t>
             </a:r>
           </a:p>
           <a:p>
             <a:pPr>
               <a:spcAft>
-                <a:spcPts val="200"/>
+                <a:spcPts val="600"/>
               </a:spcAft>
-              <a:defRPr sz="2000">
-                <a:solidFill>
-                  <a:srgbClr val="111111"/>
-                </a:solidFill>
-              </a:defRPr>
-            </a:pPr>
-            <a:r>
-              <a:rPr sz="2000" i="0"/>
+              <a:defRPr sz="1900">
+                <a:solidFill>
+                  <a:srgbClr val="111827"/>
+                </a:solidFill>
+              </a:defRPr>
+            </a:pPr>
+            <a:r>
+              <a:rPr sz="1900" i="0">
+                <a:solidFill>
+                  <a:srgbClr val="111827"/>
+                </a:solidFill>
+              </a:rPr>
               <a:t>Render multiple views: point map (color=distance, size=accuracy), heatmaps (grid/soft density; 30 m stationary threshold; hover window i±7), and uncertainty rings (radius=AccuracyMeters).</a:t>
             </a:r>
           </a:p>
           <a:p>
             <a:pPr>
               <a:spcAft>
-                <a:spcPts val="200"/>
+                <a:spcPts val="600"/>
               </a:spcAft>
-              <a:defRPr sz="2000">
-                <a:solidFill>
-                  <a:srgbClr val="111111"/>
-                </a:solidFill>
-              </a:defRPr>
-            </a:pPr>
-            <a:r>
-              <a:rPr sz="2000" i="0"/>
+              <a:defRPr sz="1900">
+                <a:solidFill>
+                  <a:srgbClr val="111827"/>
+                </a:solidFill>
+              </a:defRPr>
+            </a:pPr>
+            <a:r>
+              <a:rPr sz="1900" i="0">
+                <a:solidFill>
+                  <a:srgbClr val="111827"/>
+                </a:solidFill>
+              </a:rPr>
               <a:t>Compare mode: align GNSS vs OSM reference; compute nearest-neighbor deviation and signed cross-track deviation; show on map + D3 chart.</a:t>
             </a:r>
           </a:p>
           <a:p>
             <a:pPr>
               <a:spcAft>
-                <a:spcPts val="200"/>
+                <a:spcPts val="600"/>
               </a:spcAft>
-              <a:defRPr sz="2000">
-                <a:solidFill>
-                  <a:srgbClr val="111111"/>
-                </a:solidFill>
-              </a:defRPr>
-            </a:pPr>
-            <a:r>
-              <a:rPr sz="2000" i="0"/>
+              <a:defRPr sz="1900">
+                <a:solidFill>
+                  <a:srgbClr val="111827"/>
+                </a:solidFill>
+              </a:defRPr>
+            </a:pPr>
+            <a:r>
+              <a:rPr sz="1900" i="0">
+                <a:solidFill>
+                  <a:srgbClr val="111827"/>
+                </a:solidFill>
+              </a:rPr>
               <a:t>Tools/Tech: Leaflet, D3.js, JavaScript (fetch), and Python preprocessing utilities as needed.</a:t>
             </a:r>
           </a:p>
           <a:p>
             <a:pPr>
               <a:spcAft>
-                <a:spcPts val="200"/>
+                <a:spcPts val="600"/>
               </a:spcAft>
-              <a:defRPr sz="2000">
-                <a:solidFill>
-                  <a:srgbClr val="111111"/>
-                </a:solidFill>
-              </a:defRPr>
-            </a:pPr>
-            <a:r>
-              <a:rPr sz="2000" i="0"/>
+              <a:defRPr sz="1900">
+                <a:solidFill>
+                  <a:srgbClr val="111827"/>
+                </a:solidFill>
+              </a:defRPr>
+            </a:pPr>
+            <a:r>
+              <a:rPr sz="1900" i="0">
+                <a:solidFill>
+                  <a:srgbClr val="111827"/>
+                </a:solidFill>
+              </a:rPr>
               <a:t>Outputs: interactive map, linked chart (Lon vs Alt / Lon vs deviation), and summary stats panel.</a:t>
+            </a:r>
+          </a:p>
+        </p:txBody>
+      </p:sp>
+      <p:sp>
+        <p:nvSpPr>
+          <p:cNvPr id="8" name="Rectangle 7"/>
+          <p:cNvSpPr/>
+          <p:nvPr/>
+        </p:nvSpPr>
+        <p:spPr>
+          <a:xfrm>
+            <a:off x="0" y="6537960"/>
+            <a:ext cx="12191695" cy="18288"/>
+          </a:xfrm>
+          <a:prstGeom prst="rect">
+            <a:avLst/>
+          </a:prstGeom>
+          <a:solidFill>
+            <a:srgbClr val="E5E7EB"/>
+          </a:solidFill>
+          <a:ln>
+            <a:noFill/>
+          </a:ln>
+        </p:spPr>
+        <p:style>
+          <a:lnRef idx="1">
+            <a:schemeClr val="accent1"/>
+          </a:lnRef>
+          <a:fillRef idx="3">
+            <a:schemeClr val="accent1"/>
+          </a:fillRef>
+          <a:effectRef idx="2">
+            <a:schemeClr val="accent1"/>
+          </a:effectRef>
+          <a:fontRef idx="minor">
+            <a:schemeClr val="lt1"/>
+          </a:fontRef>
+        </p:style>
+        <p:txBody>
+          <a:bodyPr rtlCol="0" anchor="ctr"/>
+          <a:lstStyle/>
+          <a:p>
+            <a:pPr algn="ctr"/>
+          </a:p>
+        </p:txBody>
+      </p:sp>
+      <p:sp>
+        <p:nvSpPr>
+          <p:cNvPr id="9" name="TextBox 8"/>
+          <p:cNvSpPr txBox="1"/>
+          <p:nvPr/>
+        </p:nvSpPr>
+        <p:spPr>
+          <a:xfrm>
+            <a:off x="685800" y="6583680"/>
+            <a:ext cx="7315200" cy="228600"/>
+          </a:xfrm>
+          <a:prstGeom prst="rect">
+            <a:avLst/>
+          </a:prstGeom>
+          <a:noFill/>
+        </p:spPr>
+        <p:txBody>
+          <a:bodyPr wrap="none">
+            <a:spAutoFit/>
+          </a:bodyPr>
+          <a:lstStyle/>
+          <a:p>
+            <a:pPr>
+              <a:defRPr sz="1000">
+                <a:solidFill>
+                  <a:srgbClr val="6B7280"/>
+                </a:solidFill>
+              </a:defRPr>
+            </a:pPr>
+            <a:r>
+              <a:t>Project #543 — Visualizing Spatio-Temporal Uncertainty</a:t>
+            </a:r>
+          </a:p>
+        </p:txBody>
+      </p:sp>
+      <p:sp>
+        <p:nvSpPr>
+          <p:cNvPr id="10" name="TextBox 9"/>
+          <p:cNvSpPr txBox="1"/>
+          <p:nvPr/>
+        </p:nvSpPr>
+        <p:spPr>
+          <a:xfrm>
+            <a:off x="9494215" y="6583680"/>
+            <a:ext cx="2011680" cy="228600"/>
+          </a:xfrm>
+          <a:prstGeom prst="rect">
+            <a:avLst/>
+          </a:prstGeom>
+          <a:noFill/>
+        </p:spPr>
+        <p:txBody>
+          <a:bodyPr wrap="none">
+            <a:spAutoFit/>
+          </a:bodyPr>
+          <a:lstStyle/>
+          <a:p>
+            <a:pPr algn="r">
+              <a:defRPr sz="1000">
+                <a:solidFill>
+                  <a:srgbClr val="6B7280"/>
+                </a:solidFill>
+              </a:defRPr>
+            </a:pPr>
+            <a:r>
+              <a:t>10/19</a:t>
             </a:r>
           </a:p>
         </p:txBody>
@@ -3366,6 +3912,14 @@
 <file path=ppt/slides/slide11.xml><?xml version="1.0" encoding="utf-8"?>
 <p:sld xmlns:a="http://schemas.openxmlformats.org/drawingml/2006/main" xmlns:p="http://schemas.openxmlformats.org/presentationml/2006/main" xmlns:r="http://schemas.openxmlformats.org/officeDocument/2006/relationships">
   <p:cSld>
+    <p:bg>
+      <p:bgPr>
+        <a:solidFill>
+          <a:srgbClr val="F7F8FA"/>
+        </a:solidFill>
+        <a:effectLst/>
+      </p:bgPr>
+    </p:bg>
     <p:spTree>
       <p:nvGrpSpPr>
         <p:cNvPr id="1" name=""/>
@@ -3375,19 +3929,119 @@
       <p:grpSpPr/>
       <p:sp>
         <p:nvSpPr>
-          <p:cNvPr id="2" name="Title 1"/>
-          <p:cNvSpPr>
-            <a:spLocks noGrp="1"/>
-          </p:cNvSpPr>
-          <p:nvPr>
-            <p:ph type="title"/>
-          </p:nvPr>
-        </p:nvSpPr>
-        <p:spPr/>
-        <p:txBody>
-          <a:bodyPr/>
-          <a:lstStyle/>
-          <a:p>
+          <p:cNvPr id="2" name="Rectangle 1"/>
+          <p:cNvSpPr/>
+          <p:nvPr/>
+        </p:nvSpPr>
+        <p:spPr>
+          <a:xfrm>
+            <a:off x="0" y="0"/>
+            <a:ext cx="12191695" cy="658368"/>
+          </a:xfrm>
+          <a:prstGeom prst="rect">
+            <a:avLst/>
+          </a:prstGeom>
+          <a:solidFill>
+            <a:srgbClr val="0B1F3B"/>
+          </a:solidFill>
+          <a:ln>
+            <a:noFill/>
+          </a:ln>
+        </p:spPr>
+        <p:style>
+          <a:lnRef idx="1">
+            <a:schemeClr val="accent1"/>
+          </a:lnRef>
+          <a:fillRef idx="3">
+            <a:schemeClr val="accent1"/>
+          </a:fillRef>
+          <a:effectRef idx="2">
+            <a:schemeClr val="accent1"/>
+          </a:effectRef>
+          <a:fontRef idx="minor">
+            <a:schemeClr val="lt1"/>
+          </a:fontRef>
+        </p:style>
+        <p:txBody>
+          <a:bodyPr rtlCol="0" anchor="ctr"/>
+          <a:lstStyle/>
+          <a:p>
+            <a:pPr algn="ctr"/>
+          </a:p>
+        </p:txBody>
+      </p:sp>
+      <p:sp>
+        <p:nvSpPr>
+          <p:cNvPr id="3" name="Rectangle 2"/>
+          <p:cNvSpPr/>
+          <p:nvPr/>
+        </p:nvSpPr>
+        <p:spPr>
+          <a:xfrm>
+            <a:off x="0" y="603504"/>
+            <a:ext cx="12191695" cy="54864"/>
+          </a:xfrm>
+          <a:prstGeom prst="rect">
+            <a:avLst/>
+          </a:prstGeom>
+          <a:solidFill>
+            <a:srgbClr val="1AA6B7"/>
+          </a:solidFill>
+          <a:ln>
+            <a:noFill/>
+          </a:ln>
+        </p:spPr>
+        <p:style>
+          <a:lnRef idx="1">
+            <a:schemeClr val="accent1"/>
+          </a:lnRef>
+          <a:fillRef idx="3">
+            <a:schemeClr val="accent1"/>
+          </a:fillRef>
+          <a:effectRef idx="2">
+            <a:schemeClr val="accent1"/>
+          </a:effectRef>
+          <a:fontRef idx="minor">
+            <a:schemeClr val="lt1"/>
+          </a:fontRef>
+        </p:style>
+        <p:txBody>
+          <a:bodyPr rtlCol="0" anchor="ctr"/>
+          <a:lstStyle/>
+          <a:p>
+            <a:pPr algn="ctr"/>
+          </a:p>
+        </p:txBody>
+      </p:sp>
+      <p:sp>
+        <p:nvSpPr>
+          <p:cNvPr id="4" name="TextBox 3"/>
+          <p:cNvSpPr txBox="1"/>
+          <p:nvPr/>
+        </p:nvSpPr>
+        <p:spPr>
+          <a:xfrm>
+            <a:off x="685800" y="128016"/>
+            <a:ext cx="10820095" cy="457200"/>
+          </a:xfrm>
+          <a:prstGeom prst="rect">
+            <a:avLst/>
+          </a:prstGeom>
+          <a:noFill/>
+        </p:spPr>
+        <p:txBody>
+          <a:bodyPr wrap="none">
+            <a:spAutoFit/>
+          </a:bodyPr>
+          <a:lstStyle/>
+          <a:p>
+            <a:pPr>
+              <a:defRPr sz="2200" b="1">
+                <a:solidFill>
+                  <a:srgbClr val="FFFFFF"/>
+                </a:solidFill>
+              </a:defRPr>
+            </a:pPr>
             <a:r>
               <a:t>Validation &amp; Testing — GNSS Fix Visualization (Leaflet + D3)</a:t>
             </a:r>
@@ -3396,128 +4050,356 @@
       </p:sp>
       <p:sp>
         <p:nvSpPr>
-          <p:cNvPr id="3" name="Content Placeholder 2"/>
-          <p:cNvSpPr>
-            <a:spLocks noGrp="1"/>
-          </p:cNvSpPr>
-          <p:nvPr>
-            <p:ph idx="1"/>
-          </p:nvPr>
-        </p:nvSpPr>
-        <p:spPr/>
-        <p:txBody>
-          <a:bodyPr wrap="square"/>
+          <p:cNvPr id="5" name="TextBox 4"/>
+          <p:cNvSpPr txBox="1"/>
+          <p:nvPr/>
+        </p:nvSpPr>
+        <p:spPr>
+          <a:xfrm>
+            <a:off x="685800" y="420624"/>
+            <a:ext cx="10820095" cy="274320"/>
+          </a:xfrm>
+          <a:prstGeom prst="rect">
+            <a:avLst/>
+          </a:prstGeom>
+          <a:noFill/>
+        </p:spPr>
+        <p:txBody>
+          <a:bodyPr wrap="none">
+            <a:spAutoFit/>
+          </a:bodyPr>
+          <a:lstStyle/>
+          <a:p>
+            <a:pPr>
+              <a:defRPr sz="1200">
+                <a:solidFill>
+                  <a:srgbClr val="1AA6B7"/>
+                </a:solidFill>
+              </a:defRPr>
+            </a:pPr>
+            <a:r>
+              <a:t>Quality</a:t>
+            </a:r>
+          </a:p>
+        </p:txBody>
+      </p:sp>
+      <p:sp>
+        <p:nvSpPr>
+          <p:cNvPr id="6" name="Rounded Rectangle 5"/>
+          <p:cNvSpPr/>
+          <p:nvPr/>
+        </p:nvSpPr>
+        <p:spPr>
+          <a:xfrm>
+            <a:off x="685800" y="978408"/>
+            <a:ext cx="10820095" cy="5376672"/>
+          </a:xfrm>
+          <a:prstGeom prst="roundRect">
+            <a:avLst/>
+          </a:prstGeom>
+          <a:solidFill>
+            <a:srgbClr val="FFFFFF"/>
+          </a:solidFill>
+          <a:ln>
+            <a:solidFill>
+              <a:srgbClr val="E5E7EB"/>
+            </a:solidFill>
+          </a:ln>
+        </p:spPr>
+        <p:style>
+          <a:lnRef idx="1">
+            <a:schemeClr val="accent1"/>
+          </a:lnRef>
+          <a:fillRef idx="3">
+            <a:schemeClr val="accent1"/>
+          </a:fillRef>
+          <a:effectRef idx="2">
+            <a:schemeClr val="accent1"/>
+          </a:effectRef>
+          <a:fontRef idx="minor">
+            <a:schemeClr val="lt1"/>
+          </a:fontRef>
+        </p:style>
+        <p:txBody>
+          <a:bodyPr rtlCol="0" anchor="ctr"/>
+          <a:lstStyle/>
+          <a:p>
+            <a:pPr algn="ctr"/>
+          </a:p>
+        </p:txBody>
+      </p:sp>
+      <p:sp>
+        <p:nvSpPr>
+          <p:cNvPr id="7" name="TextBox 6"/>
+          <p:cNvSpPr txBox="1"/>
+          <p:nvPr/>
+        </p:nvSpPr>
+        <p:spPr>
+          <a:xfrm>
+            <a:off x="1005840" y="1207008"/>
+            <a:ext cx="10180015" cy="4919472"/>
+          </a:xfrm>
+          <a:prstGeom prst="rect">
+            <a:avLst/>
+          </a:prstGeom>
+          <a:noFill/>
+        </p:spPr>
+        <p:txBody>
+          <a:bodyPr wrap="square">
+            <a:spAutoFit/>
+          </a:bodyPr>
           <a:lstStyle/>
           <a:p>
             <a:pPr>
               <a:spcAft>
-                <a:spcPts val="200"/>
+                <a:spcPts val="600"/>
               </a:spcAft>
-              <a:defRPr sz="2000">
-                <a:solidFill>
-                  <a:srgbClr val="111111"/>
-                </a:solidFill>
-              </a:defRPr>
-            </a:pPr>
-            <a:r>
-              <a:rPr sz="2000" i="0"/>
+              <a:defRPr sz="1900">
+                <a:solidFill>
+                  <a:srgbClr val="111827"/>
+                </a:solidFill>
+              </a:defRPr>
+            </a:pPr>
+            <a:r>
+              <a:rPr sz="1900" i="0">
+                <a:solidFill>
+                  <a:srgbClr val="111827"/>
+                </a:solidFill>
+              </a:rPr>
               <a:t>Test data / scenarios: stationary and walking traces; with/without OSM reference track; varying fix density and accuracy.</a:t>
             </a:r>
           </a:p>
           <a:p>
             <a:pPr>
               <a:spcAft>
-                <a:spcPts val="200"/>
+                <a:spcPts val="600"/>
               </a:spcAft>
-              <a:defRPr sz="2000">
-                <a:solidFill>
-                  <a:srgbClr val="111111"/>
-                </a:solidFill>
-              </a:defRPr>
-            </a:pPr>
-            <a:r>
-              <a:rPr sz="2000" i="0"/>
+              <a:defRPr sz="1900">
+                <a:solidFill>
+                  <a:srgbClr val="111827"/>
+                </a:solidFill>
+              </a:defRPr>
+            </a:pPr>
+            <a:r>
+              <a:rPr sz="1900" i="0">
+                <a:solidFill>
+                  <a:srgbClr val="111827"/>
+                </a:solidFill>
+              </a:rPr>
               <a:t>Input validation: accept only well-formed Fix lines (len ≥ 13); skip non-finite lat/lon/alt; treat missing fields as null.</a:t>
             </a:r>
           </a:p>
           <a:p>
             <a:pPr>
               <a:spcAft>
-                <a:spcPts val="200"/>
+                <a:spcPts val="600"/>
               </a:spcAft>
-              <a:defRPr sz="2000">
-                <a:solidFill>
-                  <a:srgbClr val="111111"/>
-                </a:solidFill>
-              </a:defRPr>
-            </a:pPr>
-            <a:r>
-              <a:rPr sz="2000" i="0"/>
+              <a:defRPr sz="1900">
+                <a:solidFill>
+                  <a:srgbClr val="111827"/>
+                </a:solidFill>
+              </a:defRPr>
+            </a:pPr>
+            <a:r>
+              <a:rPr sz="1900" i="0">
+                <a:solidFill>
+                  <a:srgbClr val="111827"/>
+                </a:solidFill>
+              </a:rPr>
               <a:t>Loading checks: relative URLs (./data/...) for GitHub Pages or local HTTP server; manual upload fallback verified.</a:t>
             </a:r>
           </a:p>
           <a:p>
             <a:pPr>
               <a:spcAft>
-                <a:spcPts val="200"/>
+                <a:spcPts val="600"/>
               </a:spcAft>
-              <a:defRPr sz="2000">
-                <a:solidFill>
-                  <a:srgbClr val="111111"/>
-                </a:solidFill>
-              </a:defRPr>
-            </a:pPr>
-            <a:r>
-              <a:rPr sz="2000" i="0"/>
+              <a:defRPr sz="1900">
+                <a:solidFill>
+                  <a:srgbClr val="111827"/>
+                </a:solidFill>
+              </a:defRPr>
+            </a:pPr>
+            <a:r>
+              <a:rPr sz="1900" i="0">
+                <a:solidFill>
+                  <a:srgbClr val="111827"/>
+                </a:solidFill>
+              </a:rPr>
               <a:t>Metric sanity: Haversine distance ranges and monotonic distance-from-first checks; validate Δlat/Δlon/Δalt against raw fields.</a:t>
             </a:r>
           </a:p>
           <a:p>
             <a:pPr>
               <a:spcAft>
-                <a:spcPts val="200"/>
+                <a:spcPts val="600"/>
               </a:spcAft>
-              <a:defRPr sz="2000">
-                <a:solidFill>
-                  <a:srgbClr val="111111"/>
-                </a:solidFill>
-              </a:defRPr>
-            </a:pPr>
-            <a:r>
-              <a:rPr sz="2000" i="0"/>
+              <a:defRPr sz="1900">
+                <a:solidFill>
+                  <a:srgbClr val="111827"/>
+                </a:solidFill>
+              </a:defRPr>
+            </a:pPr>
+            <a:r>
+              <a:rPr sz="1900" i="0">
+                <a:solidFill>
+                  <a:srgbClr val="111827"/>
+                </a:solidFill>
+              </a:rPr>
               <a:t>Visualization testing: Original / Heatmap (mono &amp; BGR) / Uncertainty modes render without errors; 30 m moving threshold enforced; hover i±7 preview stable.</a:t>
             </a:r>
           </a:p>
           <a:p>
             <a:pPr>
               <a:spcAft>
-                <a:spcPts val="200"/>
+                <a:spcPts val="600"/>
               </a:spcAft>
-              <a:defRPr sz="2000">
-                <a:solidFill>
-                  <a:srgbClr val="111111"/>
-                </a:solidFill>
-              </a:defRPr>
-            </a:pPr>
-            <a:r>
-              <a:rPr sz="2000" i="0"/>
+              <a:defRPr sz="1900">
+                <a:solidFill>
+                  <a:srgbClr val="111827"/>
+                </a:solidFill>
+              </a:defRPr>
+            </a:pPr>
+            <a:r>
+              <a:rPr sz="1900" i="0">
+                <a:solidFill>
+                  <a:srgbClr val="111827"/>
+                </a:solidFill>
+              </a:rPr>
               <a:t>Compare-mode validation: nearest-neighbor and signed cross-track deviation consistent across hover and chart; chart clipping ±3 m applied correctly.</a:t>
             </a:r>
           </a:p>
           <a:p>
             <a:pPr>
               <a:spcAft>
-                <a:spcPts val="200"/>
+                <a:spcPts val="600"/>
               </a:spcAft>
-              <a:defRPr sz="2000">
-                <a:solidFill>
-                  <a:srgbClr val="111111"/>
-                </a:solidFill>
-              </a:defRPr>
-            </a:pPr>
-            <a:r>
-              <a:rPr sz="2000" i="0"/>
+              <a:defRPr sz="1900">
+                <a:solidFill>
+                  <a:srgbClr val="111827"/>
+                </a:solidFill>
+              </a:defRPr>
+            </a:pPr>
+            <a:r>
+              <a:rPr sz="1900" i="0">
+                <a:solidFill>
+                  <a:srgbClr val="111827"/>
+                </a:solidFill>
+              </a:rPr>
               <a:t>Acceptance criteria: no runtime errors; consistent stats panel ranges; map selection fields match chart values for the same fix index.</a:t>
+            </a:r>
+          </a:p>
+        </p:txBody>
+      </p:sp>
+      <p:sp>
+        <p:nvSpPr>
+          <p:cNvPr id="8" name="Rectangle 7"/>
+          <p:cNvSpPr/>
+          <p:nvPr/>
+        </p:nvSpPr>
+        <p:spPr>
+          <a:xfrm>
+            <a:off x="0" y="6537960"/>
+            <a:ext cx="12191695" cy="18288"/>
+          </a:xfrm>
+          <a:prstGeom prst="rect">
+            <a:avLst/>
+          </a:prstGeom>
+          <a:solidFill>
+            <a:srgbClr val="E5E7EB"/>
+          </a:solidFill>
+          <a:ln>
+            <a:noFill/>
+          </a:ln>
+        </p:spPr>
+        <p:style>
+          <a:lnRef idx="1">
+            <a:schemeClr val="accent1"/>
+          </a:lnRef>
+          <a:fillRef idx="3">
+            <a:schemeClr val="accent1"/>
+          </a:fillRef>
+          <a:effectRef idx="2">
+            <a:schemeClr val="accent1"/>
+          </a:effectRef>
+          <a:fontRef idx="minor">
+            <a:schemeClr val="lt1"/>
+          </a:fontRef>
+        </p:style>
+        <p:txBody>
+          <a:bodyPr rtlCol="0" anchor="ctr"/>
+          <a:lstStyle/>
+          <a:p>
+            <a:pPr algn="ctr"/>
+          </a:p>
+        </p:txBody>
+      </p:sp>
+      <p:sp>
+        <p:nvSpPr>
+          <p:cNvPr id="9" name="TextBox 8"/>
+          <p:cNvSpPr txBox="1"/>
+          <p:nvPr/>
+        </p:nvSpPr>
+        <p:spPr>
+          <a:xfrm>
+            <a:off x="685800" y="6583680"/>
+            <a:ext cx="7315200" cy="228600"/>
+          </a:xfrm>
+          <a:prstGeom prst="rect">
+            <a:avLst/>
+          </a:prstGeom>
+          <a:noFill/>
+        </p:spPr>
+        <p:txBody>
+          <a:bodyPr wrap="none">
+            <a:spAutoFit/>
+          </a:bodyPr>
+          <a:lstStyle/>
+          <a:p>
+            <a:pPr>
+              <a:defRPr sz="1000">
+                <a:solidFill>
+                  <a:srgbClr val="6B7280"/>
+                </a:solidFill>
+              </a:defRPr>
+            </a:pPr>
+            <a:r>
+              <a:t>Project #543 — Visualizing Spatio-Temporal Uncertainty</a:t>
+            </a:r>
+          </a:p>
+        </p:txBody>
+      </p:sp>
+      <p:sp>
+        <p:nvSpPr>
+          <p:cNvPr id="10" name="TextBox 9"/>
+          <p:cNvSpPr txBox="1"/>
+          <p:nvPr/>
+        </p:nvSpPr>
+        <p:spPr>
+          <a:xfrm>
+            <a:off x="9494215" y="6583680"/>
+            <a:ext cx="2011680" cy="228600"/>
+          </a:xfrm>
+          <a:prstGeom prst="rect">
+            <a:avLst/>
+          </a:prstGeom>
+          <a:noFill/>
+        </p:spPr>
+        <p:txBody>
+          <a:bodyPr wrap="none">
+            <a:spAutoFit/>
+          </a:bodyPr>
+          <a:lstStyle/>
+          <a:p>
+            <a:pPr algn="r">
+              <a:defRPr sz="1000">
+                <a:solidFill>
+                  <a:srgbClr val="6B7280"/>
+                </a:solidFill>
+              </a:defRPr>
+            </a:pPr>
+            <a:r>
+              <a:t>11/19</a:t>
             </a:r>
           </a:p>
         </p:txBody>
@@ -3533,6 +4415,14 @@
 <file path=ppt/slides/slide12.xml><?xml version="1.0" encoding="utf-8"?>
 <p:sld xmlns:a="http://schemas.openxmlformats.org/drawingml/2006/main" xmlns:p="http://schemas.openxmlformats.org/presentationml/2006/main" xmlns:r="http://schemas.openxmlformats.org/officeDocument/2006/relationships">
   <p:cSld>
+    <p:bg>
+      <p:bgPr>
+        <a:solidFill>
+          <a:srgbClr val="F7F8FA"/>
+        </a:solidFill>
+        <a:effectLst/>
+      </p:bgPr>
+    </p:bg>
     <p:spTree>
       <p:nvGrpSpPr>
         <p:cNvPr id="1" name=""/>
@@ -3542,28 +4432,208 @@
       <p:grpSpPr/>
       <p:sp>
         <p:nvSpPr>
-          <p:cNvPr id="2" name="Title 1"/>
-          <p:cNvSpPr>
-            <a:spLocks noGrp="1"/>
-          </p:cNvSpPr>
-          <p:nvPr>
-            <p:ph type="title"/>
-          </p:nvPr>
-        </p:nvSpPr>
-        <p:spPr/>
-        <p:txBody>
-          <a:bodyPr/>
-          <a:lstStyle/>
-          <a:p>
+          <p:cNvPr id="2" name="Rectangle 1"/>
+          <p:cNvSpPr/>
+          <p:nvPr/>
+        </p:nvSpPr>
+        <p:spPr>
+          <a:xfrm>
+            <a:off x="0" y="0"/>
+            <a:ext cx="12191695" cy="658368"/>
+          </a:xfrm>
+          <a:prstGeom prst="rect">
+            <a:avLst/>
+          </a:prstGeom>
+          <a:solidFill>
+            <a:srgbClr val="0B1F3B"/>
+          </a:solidFill>
+          <a:ln>
+            <a:noFill/>
+          </a:ln>
+        </p:spPr>
+        <p:style>
+          <a:lnRef idx="1">
+            <a:schemeClr val="accent1"/>
+          </a:lnRef>
+          <a:fillRef idx="3">
+            <a:schemeClr val="accent1"/>
+          </a:fillRef>
+          <a:effectRef idx="2">
+            <a:schemeClr val="accent1"/>
+          </a:effectRef>
+          <a:fontRef idx="minor">
+            <a:schemeClr val="lt1"/>
+          </a:fontRef>
+        </p:style>
+        <p:txBody>
+          <a:bodyPr rtlCol="0" anchor="ctr"/>
+          <a:lstStyle/>
+          <a:p>
+            <a:pPr algn="ctr"/>
+          </a:p>
+        </p:txBody>
+      </p:sp>
+      <p:sp>
+        <p:nvSpPr>
+          <p:cNvPr id="3" name="Rectangle 2"/>
+          <p:cNvSpPr/>
+          <p:nvPr/>
+        </p:nvSpPr>
+        <p:spPr>
+          <a:xfrm>
+            <a:off x="0" y="603504"/>
+            <a:ext cx="12191695" cy="54864"/>
+          </a:xfrm>
+          <a:prstGeom prst="rect">
+            <a:avLst/>
+          </a:prstGeom>
+          <a:solidFill>
+            <a:srgbClr val="1AA6B7"/>
+          </a:solidFill>
+          <a:ln>
+            <a:noFill/>
+          </a:ln>
+        </p:spPr>
+        <p:style>
+          <a:lnRef idx="1">
+            <a:schemeClr val="accent1"/>
+          </a:lnRef>
+          <a:fillRef idx="3">
+            <a:schemeClr val="accent1"/>
+          </a:fillRef>
+          <a:effectRef idx="2">
+            <a:schemeClr val="accent1"/>
+          </a:effectRef>
+          <a:fontRef idx="minor">
+            <a:schemeClr val="lt1"/>
+          </a:fontRef>
+        </p:style>
+        <p:txBody>
+          <a:bodyPr rtlCol="0" anchor="ctr"/>
+          <a:lstStyle/>
+          <a:p>
+            <a:pPr algn="ctr"/>
+          </a:p>
+        </p:txBody>
+      </p:sp>
+      <p:sp>
+        <p:nvSpPr>
+          <p:cNvPr id="4" name="TextBox 3"/>
+          <p:cNvSpPr txBox="1"/>
+          <p:nvPr/>
+        </p:nvSpPr>
+        <p:spPr>
+          <a:xfrm>
+            <a:off x="685800" y="128016"/>
+            <a:ext cx="10820095" cy="457200"/>
+          </a:xfrm>
+          <a:prstGeom prst="rect">
+            <a:avLst/>
+          </a:prstGeom>
+          <a:noFill/>
+        </p:spPr>
+        <p:txBody>
+          <a:bodyPr wrap="none">
+            <a:spAutoFit/>
+          </a:bodyPr>
+          <a:lstStyle/>
+          <a:p>
+            <a:pPr>
+              <a:defRPr sz="2200" b="1">
+                <a:solidFill>
+                  <a:srgbClr val="FFFFFF"/>
+                </a:solidFill>
+              </a:defRPr>
+            </a:pPr>
             <a:r>
               <a:t>Demo — Reference vs Raw GNSS Comparison</a:t>
             </a:r>
+          </a:p>
+        </p:txBody>
+      </p:sp>
+      <p:sp>
+        <p:nvSpPr>
+          <p:cNvPr id="5" name="TextBox 4"/>
+          <p:cNvSpPr txBox="1"/>
+          <p:nvPr/>
+        </p:nvSpPr>
+        <p:spPr>
+          <a:xfrm>
+            <a:off x="685800" y="420624"/>
+            <a:ext cx="10820095" cy="274320"/>
+          </a:xfrm>
+          <a:prstGeom prst="rect">
+            <a:avLst/>
+          </a:prstGeom>
+          <a:noFill/>
+        </p:spPr>
+        <p:txBody>
+          <a:bodyPr wrap="none">
+            <a:spAutoFit/>
+          </a:bodyPr>
+          <a:lstStyle/>
+          <a:p>
+            <a:pPr>
+              <a:defRPr sz="1200">
+                <a:solidFill>
+                  <a:srgbClr val="1AA6B7"/>
+                </a:solidFill>
+              </a:defRPr>
+            </a:pPr>
+            <a:r>
+              <a:t>Demo</a:t>
+            </a:r>
+          </a:p>
+        </p:txBody>
+      </p:sp>
+      <p:sp>
+        <p:nvSpPr>
+          <p:cNvPr id="6" name="Rounded Rectangle 5"/>
+          <p:cNvSpPr/>
+          <p:nvPr/>
+        </p:nvSpPr>
+        <p:spPr>
+          <a:xfrm>
+            <a:off x="685800" y="978408"/>
+            <a:ext cx="10820095" cy="5056632"/>
+          </a:xfrm>
+          <a:prstGeom prst="roundRect">
+            <a:avLst/>
+          </a:prstGeom>
+          <a:solidFill>
+            <a:srgbClr val="FFFFFF"/>
+          </a:solidFill>
+          <a:ln>
+            <a:solidFill>
+              <a:srgbClr val="E5E7EB"/>
+            </a:solidFill>
+          </a:ln>
+        </p:spPr>
+        <p:style>
+          <a:lnRef idx="1">
+            <a:schemeClr val="accent1"/>
+          </a:lnRef>
+          <a:fillRef idx="3">
+            <a:schemeClr val="accent1"/>
+          </a:fillRef>
+          <a:effectRef idx="2">
+            <a:schemeClr val="accent1"/>
+          </a:effectRef>
+          <a:fontRef idx="minor">
+            <a:schemeClr val="lt1"/>
+          </a:fontRef>
+        </p:style>
+        <p:txBody>
+          <a:bodyPr rtlCol="0" anchor="ctr"/>
+          <a:lstStyle/>
+          <a:p>
+            <a:pPr algn="ctr"/>
           </a:p>
         </p:txBody>
       </p:sp>
       <p:pic>
         <p:nvPicPr>
-          <p:cNvPr id="3" name="Picture 2" descr="dashboard1.png"/>
+          <p:cNvPr id="7" name="Picture 6" descr="dashboard1.png"/>
           <p:cNvPicPr>
             <a:picLocks noChangeAspect="1"/>
           </p:cNvPicPr>
@@ -3577,8 +4647,8 @@
         </p:blipFill>
         <p:spPr>
           <a:xfrm>
-            <a:off x="685800" y="1417320"/>
-            <a:ext cx="10972800" cy="5120640"/>
+            <a:off x="758952" y="1051560"/>
+            <a:ext cx="10673791" cy="4910328"/>
           </a:xfrm>
           <a:prstGeom prst="rect">
             <a:avLst/>
@@ -3587,14 +4657,14 @@
       </p:pic>
       <p:sp>
         <p:nvSpPr>
-          <p:cNvPr id="4" name="TextBox 3"/>
+          <p:cNvPr id="8" name="TextBox 7"/>
           <p:cNvSpPr txBox="1"/>
           <p:nvPr/>
         </p:nvSpPr>
         <p:spPr>
           <a:xfrm>
-            <a:off x="685800" y="6583680"/>
-            <a:ext cx="10972800" cy="365760"/>
+            <a:off x="685800" y="6108192"/>
+            <a:ext cx="10820095" cy="384048"/>
           </a:xfrm>
           <a:prstGeom prst="rect">
             <a:avLst/>
@@ -3608,14 +4678,127 @@
           <a:lstStyle/>
           <a:p>
             <a:pPr algn="ctr">
-              <a:defRPr sz="1400">
-                <a:solidFill>
-                  <a:srgbClr val="444444"/>
+              <a:defRPr sz="1200">
+                <a:solidFill>
+                  <a:srgbClr val="6B7280"/>
                 </a:solidFill>
               </a:defRPr>
             </a:pPr>
             <a:r>
               <a:t>Comparison of reference track vs raw GNSS; chart shows distance deviation (meters).</a:t>
+            </a:r>
+          </a:p>
+        </p:txBody>
+      </p:sp>
+      <p:sp>
+        <p:nvSpPr>
+          <p:cNvPr id="9" name="Rectangle 8"/>
+          <p:cNvSpPr/>
+          <p:nvPr/>
+        </p:nvSpPr>
+        <p:spPr>
+          <a:xfrm>
+            <a:off x="0" y="6537960"/>
+            <a:ext cx="12191695" cy="18288"/>
+          </a:xfrm>
+          <a:prstGeom prst="rect">
+            <a:avLst/>
+          </a:prstGeom>
+          <a:solidFill>
+            <a:srgbClr val="E5E7EB"/>
+          </a:solidFill>
+          <a:ln>
+            <a:noFill/>
+          </a:ln>
+        </p:spPr>
+        <p:style>
+          <a:lnRef idx="1">
+            <a:schemeClr val="accent1"/>
+          </a:lnRef>
+          <a:fillRef idx="3">
+            <a:schemeClr val="accent1"/>
+          </a:fillRef>
+          <a:effectRef idx="2">
+            <a:schemeClr val="accent1"/>
+          </a:effectRef>
+          <a:fontRef idx="minor">
+            <a:schemeClr val="lt1"/>
+          </a:fontRef>
+        </p:style>
+        <p:txBody>
+          <a:bodyPr rtlCol="0" anchor="ctr"/>
+          <a:lstStyle/>
+          <a:p>
+            <a:pPr algn="ctr"/>
+          </a:p>
+        </p:txBody>
+      </p:sp>
+      <p:sp>
+        <p:nvSpPr>
+          <p:cNvPr id="10" name="TextBox 9"/>
+          <p:cNvSpPr txBox="1"/>
+          <p:nvPr/>
+        </p:nvSpPr>
+        <p:spPr>
+          <a:xfrm>
+            <a:off x="685800" y="6583680"/>
+            <a:ext cx="7315200" cy="228600"/>
+          </a:xfrm>
+          <a:prstGeom prst="rect">
+            <a:avLst/>
+          </a:prstGeom>
+          <a:noFill/>
+        </p:spPr>
+        <p:txBody>
+          <a:bodyPr wrap="none">
+            <a:spAutoFit/>
+          </a:bodyPr>
+          <a:lstStyle/>
+          <a:p>
+            <a:pPr>
+              <a:defRPr sz="1000">
+                <a:solidFill>
+                  <a:srgbClr val="6B7280"/>
+                </a:solidFill>
+              </a:defRPr>
+            </a:pPr>
+            <a:r>
+              <a:t>Project #543 — Visualizing Spatio-Temporal Uncertainty</a:t>
+            </a:r>
+          </a:p>
+        </p:txBody>
+      </p:sp>
+      <p:sp>
+        <p:nvSpPr>
+          <p:cNvPr id="11" name="TextBox 10"/>
+          <p:cNvSpPr txBox="1"/>
+          <p:nvPr/>
+        </p:nvSpPr>
+        <p:spPr>
+          <a:xfrm>
+            <a:off x="9494215" y="6583680"/>
+            <a:ext cx="2011680" cy="228600"/>
+          </a:xfrm>
+          <a:prstGeom prst="rect">
+            <a:avLst/>
+          </a:prstGeom>
+          <a:noFill/>
+        </p:spPr>
+        <p:txBody>
+          <a:bodyPr wrap="none">
+            <a:spAutoFit/>
+          </a:bodyPr>
+          <a:lstStyle/>
+          <a:p>
+            <a:pPr algn="r">
+              <a:defRPr sz="1000">
+                <a:solidFill>
+                  <a:srgbClr val="6B7280"/>
+                </a:solidFill>
+              </a:defRPr>
+            </a:pPr>
+            <a:r>
+              <a:t>12/19</a:t>
             </a:r>
           </a:p>
         </p:txBody>
@@ -3631,6 +4814,14 @@
 <file path=ppt/slides/slide13.xml><?xml version="1.0" encoding="utf-8"?>
 <p:sld xmlns:a="http://schemas.openxmlformats.org/drawingml/2006/main" xmlns:p="http://schemas.openxmlformats.org/presentationml/2006/main" xmlns:r="http://schemas.openxmlformats.org/officeDocument/2006/relationships">
   <p:cSld>
+    <p:bg>
+      <p:bgPr>
+        <a:solidFill>
+          <a:srgbClr val="F7F8FA"/>
+        </a:solidFill>
+        <a:effectLst/>
+      </p:bgPr>
+    </p:bg>
     <p:spTree>
       <p:nvGrpSpPr>
         <p:cNvPr id="1" name=""/>
@@ -3640,28 +4831,208 @@
       <p:grpSpPr/>
       <p:sp>
         <p:nvSpPr>
-          <p:cNvPr id="2" name="Title 1"/>
-          <p:cNvSpPr>
-            <a:spLocks noGrp="1"/>
-          </p:cNvSpPr>
-          <p:nvPr>
-            <p:ph type="title"/>
-          </p:nvPr>
-        </p:nvSpPr>
-        <p:spPr/>
-        <p:txBody>
-          <a:bodyPr/>
-          <a:lstStyle/>
-          <a:p>
+          <p:cNvPr id="2" name="Rectangle 1"/>
+          <p:cNvSpPr/>
+          <p:nvPr/>
+        </p:nvSpPr>
+        <p:spPr>
+          <a:xfrm>
+            <a:off x="0" y="0"/>
+            <a:ext cx="12191695" cy="658368"/>
+          </a:xfrm>
+          <a:prstGeom prst="rect">
+            <a:avLst/>
+          </a:prstGeom>
+          <a:solidFill>
+            <a:srgbClr val="0B1F3B"/>
+          </a:solidFill>
+          <a:ln>
+            <a:noFill/>
+          </a:ln>
+        </p:spPr>
+        <p:style>
+          <a:lnRef idx="1">
+            <a:schemeClr val="accent1"/>
+          </a:lnRef>
+          <a:fillRef idx="3">
+            <a:schemeClr val="accent1"/>
+          </a:fillRef>
+          <a:effectRef idx="2">
+            <a:schemeClr val="accent1"/>
+          </a:effectRef>
+          <a:fontRef idx="minor">
+            <a:schemeClr val="lt1"/>
+          </a:fontRef>
+        </p:style>
+        <p:txBody>
+          <a:bodyPr rtlCol="0" anchor="ctr"/>
+          <a:lstStyle/>
+          <a:p>
+            <a:pPr algn="ctr"/>
+          </a:p>
+        </p:txBody>
+      </p:sp>
+      <p:sp>
+        <p:nvSpPr>
+          <p:cNvPr id="3" name="Rectangle 2"/>
+          <p:cNvSpPr/>
+          <p:nvPr/>
+        </p:nvSpPr>
+        <p:spPr>
+          <a:xfrm>
+            <a:off x="0" y="603504"/>
+            <a:ext cx="12191695" cy="54864"/>
+          </a:xfrm>
+          <a:prstGeom prst="rect">
+            <a:avLst/>
+          </a:prstGeom>
+          <a:solidFill>
+            <a:srgbClr val="1AA6B7"/>
+          </a:solidFill>
+          <a:ln>
+            <a:noFill/>
+          </a:ln>
+        </p:spPr>
+        <p:style>
+          <a:lnRef idx="1">
+            <a:schemeClr val="accent1"/>
+          </a:lnRef>
+          <a:fillRef idx="3">
+            <a:schemeClr val="accent1"/>
+          </a:fillRef>
+          <a:effectRef idx="2">
+            <a:schemeClr val="accent1"/>
+          </a:effectRef>
+          <a:fontRef idx="minor">
+            <a:schemeClr val="lt1"/>
+          </a:fontRef>
+        </p:style>
+        <p:txBody>
+          <a:bodyPr rtlCol="0" anchor="ctr"/>
+          <a:lstStyle/>
+          <a:p>
+            <a:pPr algn="ctr"/>
+          </a:p>
+        </p:txBody>
+      </p:sp>
+      <p:sp>
+        <p:nvSpPr>
+          <p:cNvPr id="4" name="TextBox 3"/>
+          <p:cNvSpPr txBox="1"/>
+          <p:nvPr/>
+        </p:nvSpPr>
+        <p:spPr>
+          <a:xfrm>
+            <a:off x="685800" y="128016"/>
+            <a:ext cx="10820095" cy="457200"/>
+          </a:xfrm>
+          <a:prstGeom prst="rect">
+            <a:avLst/>
+          </a:prstGeom>
+          <a:noFill/>
+        </p:spPr>
+        <p:txBody>
+          <a:bodyPr wrap="none">
+            <a:spAutoFit/>
+          </a:bodyPr>
+          <a:lstStyle/>
+          <a:p>
+            <a:pPr>
+              <a:defRPr sz="2200" b="1">
+                <a:solidFill>
+                  <a:srgbClr val="FFFFFF"/>
+                </a:solidFill>
+              </a:defRPr>
+            </a:pPr>
             <a:r>
               <a:t>Demo — Deviations in Stationary Data</a:t>
             </a:r>
+          </a:p>
+        </p:txBody>
+      </p:sp>
+      <p:sp>
+        <p:nvSpPr>
+          <p:cNvPr id="5" name="TextBox 4"/>
+          <p:cNvSpPr txBox="1"/>
+          <p:nvPr/>
+        </p:nvSpPr>
+        <p:spPr>
+          <a:xfrm>
+            <a:off x="685800" y="420624"/>
+            <a:ext cx="10820095" cy="274320"/>
+          </a:xfrm>
+          <a:prstGeom prst="rect">
+            <a:avLst/>
+          </a:prstGeom>
+          <a:noFill/>
+        </p:spPr>
+        <p:txBody>
+          <a:bodyPr wrap="none">
+            <a:spAutoFit/>
+          </a:bodyPr>
+          <a:lstStyle/>
+          <a:p>
+            <a:pPr>
+              <a:defRPr sz="1200">
+                <a:solidFill>
+                  <a:srgbClr val="1AA6B7"/>
+                </a:solidFill>
+              </a:defRPr>
+            </a:pPr>
+            <a:r>
+              <a:t>Demo</a:t>
+            </a:r>
+          </a:p>
+        </p:txBody>
+      </p:sp>
+      <p:sp>
+        <p:nvSpPr>
+          <p:cNvPr id="6" name="Rounded Rectangle 5"/>
+          <p:cNvSpPr/>
+          <p:nvPr/>
+        </p:nvSpPr>
+        <p:spPr>
+          <a:xfrm>
+            <a:off x="685800" y="978408"/>
+            <a:ext cx="10820095" cy="5056632"/>
+          </a:xfrm>
+          <a:prstGeom prst="roundRect">
+            <a:avLst/>
+          </a:prstGeom>
+          <a:solidFill>
+            <a:srgbClr val="FFFFFF"/>
+          </a:solidFill>
+          <a:ln>
+            <a:solidFill>
+              <a:srgbClr val="E5E7EB"/>
+            </a:solidFill>
+          </a:ln>
+        </p:spPr>
+        <p:style>
+          <a:lnRef idx="1">
+            <a:schemeClr val="accent1"/>
+          </a:lnRef>
+          <a:fillRef idx="3">
+            <a:schemeClr val="accent1"/>
+          </a:fillRef>
+          <a:effectRef idx="2">
+            <a:schemeClr val="accent1"/>
+          </a:effectRef>
+          <a:fontRef idx="minor">
+            <a:schemeClr val="lt1"/>
+          </a:fontRef>
+        </p:style>
+        <p:txBody>
+          <a:bodyPr rtlCol="0" anchor="ctr"/>
+          <a:lstStyle/>
+          <a:p>
+            <a:pPr algn="ctr"/>
           </a:p>
         </p:txBody>
       </p:sp>
       <p:pic>
         <p:nvPicPr>
-          <p:cNvPr id="3" name="Picture 2" descr="dashboard2.png"/>
+          <p:cNvPr id="7" name="Picture 6" descr="dashboard2.png"/>
           <p:cNvPicPr>
             <a:picLocks noChangeAspect="1"/>
           </p:cNvPicPr>
@@ -3675,8 +5046,8 @@
         </p:blipFill>
         <p:spPr>
           <a:xfrm>
-            <a:off x="685800" y="1417320"/>
-            <a:ext cx="10972800" cy="5120640"/>
+            <a:off x="758952" y="1051560"/>
+            <a:ext cx="10673791" cy="4910328"/>
           </a:xfrm>
           <a:prstGeom prst="rect">
             <a:avLst/>
@@ -3685,14 +5056,14 @@
       </p:pic>
       <p:sp>
         <p:nvSpPr>
-          <p:cNvPr id="4" name="TextBox 3"/>
+          <p:cNvPr id="8" name="TextBox 7"/>
           <p:cNvSpPr txBox="1"/>
           <p:nvPr/>
         </p:nvSpPr>
         <p:spPr>
           <a:xfrm>
-            <a:off x="685800" y="6583680"/>
-            <a:ext cx="10972800" cy="365760"/>
+            <a:off x="685800" y="6108192"/>
+            <a:ext cx="10820095" cy="384048"/>
           </a:xfrm>
           <a:prstGeom prst="rect">
             <a:avLst/>
@@ -3706,14 +5077,127 @@
           <a:lstStyle/>
           <a:p>
             <a:pPr algn="ctr">
-              <a:defRPr sz="1400">
-                <a:solidFill>
-                  <a:srgbClr val="444444"/>
+              <a:defRPr sz="1200">
+                <a:solidFill>
+                  <a:srgbClr val="6B7280"/>
                 </a:solidFill>
               </a:defRPr>
             </a:pPr>
             <a:r>
               <a:t>Observed drift/deviation patterns while device is stable.</a:t>
+            </a:r>
+          </a:p>
+        </p:txBody>
+      </p:sp>
+      <p:sp>
+        <p:nvSpPr>
+          <p:cNvPr id="9" name="Rectangle 8"/>
+          <p:cNvSpPr/>
+          <p:nvPr/>
+        </p:nvSpPr>
+        <p:spPr>
+          <a:xfrm>
+            <a:off x="0" y="6537960"/>
+            <a:ext cx="12191695" cy="18288"/>
+          </a:xfrm>
+          <a:prstGeom prst="rect">
+            <a:avLst/>
+          </a:prstGeom>
+          <a:solidFill>
+            <a:srgbClr val="E5E7EB"/>
+          </a:solidFill>
+          <a:ln>
+            <a:noFill/>
+          </a:ln>
+        </p:spPr>
+        <p:style>
+          <a:lnRef idx="1">
+            <a:schemeClr val="accent1"/>
+          </a:lnRef>
+          <a:fillRef idx="3">
+            <a:schemeClr val="accent1"/>
+          </a:fillRef>
+          <a:effectRef idx="2">
+            <a:schemeClr val="accent1"/>
+          </a:effectRef>
+          <a:fontRef idx="minor">
+            <a:schemeClr val="lt1"/>
+          </a:fontRef>
+        </p:style>
+        <p:txBody>
+          <a:bodyPr rtlCol="0" anchor="ctr"/>
+          <a:lstStyle/>
+          <a:p>
+            <a:pPr algn="ctr"/>
+          </a:p>
+        </p:txBody>
+      </p:sp>
+      <p:sp>
+        <p:nvSpPr>
+          <p:cNvPr id="10" name="TextBox 9"/>
+          <p:cNvSpPr txBox="1"/>
+          <p:nvPr/>
+        </p:nvSpPr>
+        <p:spPr>
+          <a:xfrm>
+            <a:off x="685800" y="6583680"/>
+            <a:ext cx="7315200" cy="228600"/>
+          </a:xfrm>
+          <a:prstGeom prst="rect">
+            <a:avLst/>
+          </a:prstGeom>
+          <a:noFill/>
+        </p:spPr>
+        <p:txBody>
+          <a:bodyPr wrap="none">
+            <a:spAutoFit/>
+          </a:bodyPr>
+          <a:lstStyle/>
+          <a:p>
+            <a:pPr>
+              <a:defRPr sz="1000">
+                <a:solidFill>
+                  <a:srgbClr val="6B7280"/>
+                </a:solidFill>
+              </a:defRPr>
+            </a:pPr>
+            <a:r>
+              <a:t>Project #543 — Visualizing Spatio-Temporal Uncertainty</a:t>
+            </a:r>
+          </a:p>
+        </p:txBody>
+      </p:sp>
+      <p:sp>
+        <p:nvSpPr>
+          <p:cNvPr id="11" name="TextBox 10"/>
+          <p:cNvSpPr txBox="1"/>
+          <p:nvPr/>
+        </p:nvSpPr>
+        <p:spPr>
+          <a:xfrm>
+            <a:off x="9494215" y="6583680"/>
+            <a:ext cx="2011680" cy="228600"/>
+          </a:xfrm>
+          <a:prstGeom prst="rect">
+            <a:avLst/>
+          </a:prstGeom>
+          <a:noFill/>
+        </p:spPr>
+        <p:txBody>
+          <a:bodyPr wrap="none">
+            <a:spAutoFit/>
+          </a:bodyPr>
+          <a:lstStyle/>
+          <a:p>
+            <a:pPr algn="r">
+              <a:defRPr sz="1000">
+                <a:solidFill>
+                  <a:srgbClr val="6B7280"/>
+                </a:solidFill>
+              </a:defRPr>
+            </a:pPr>
+            <a:r>
+              <a:t>13/19</a:t>
             </a:r>
           </a:p>
         </p:txBody>
@@ -3729,6 +5213,14 @@
 <file path=ppt/slides/slide14.xml><?xml version="1.0" encoding="utf-8"?>
 <p:sld xmlns:a="http://schemas.openxmlformats.org/drawingml/2006/main" xmlns:p="http://schemas.openxmlformats.org/presentationml/2006/main" xmlns:r="http://schemas.openxmlformats.org/officeDocument/2006/relationships">
   <p:cSld>
+    <p:bg>
+      <p:bgPr>
+        <a:solidFill>
+          <a:srgbClr val="F7F8FA"/>
+        </a:solidFill>
+        <a:effectLst/>
+      </p:bgPr>
+    </p:bg>
     <p:spTree>
       <p:nvGrpSpPr>
         <p:cNvPr id="1" name=""/>
@@ -3738,28 +5230,208 @@
       <p:grpSpPr/>
       <p:sp>
         <p:nvSpPr>
-          <p:cNvPr id="2" name="Title 1"/>
-          <p:cNvSpPr>
-            <a:spLocks noGrp="1"/>
-          </p:cNvSpPr>
-          <p:nvPr>
-            <p:ph type="title"/>
-          </p:nvPr>
-        </p:nvSpPr>
-        <p:spPr/>
-        <p:txBody>
-          <a:bodyPr/>
-          <a:lstStyle/>
-          <a:p>
+          <p:cNvPr id="2" name="Rectangle 1"/>
+          <p:cNvSpPr/>
+          <p:nvPr/>
+        </p:nvSpPr>
+        <p:spPr>
+          <a:xfrm>
+            <a:off x="0" y="0"/>
+            <a:ext cx="12191695" cy="658368"/>
+          </a:xfrm>
+          <a:prstGeom prst="rect">
+            <a:avLst/>
+          </a:prstGeom>
+          <a:solidFill>
+            <a:srgbClr val="0B1F3B"/>
+          </a:solidFill>
+          <a:ln>
+            <a:noFill/>
+          </a:ln>
+        </p:spPr>
+        <p:style>
+          <a:lnRef idx="1">
+            <a:schemeClr val="accent1"/>
+          </a:lnRef>
+          <a:fillRef idx="3">
+            <a:schemeClr val="accent1"/>
+          </a:fillRef>
+          <a:effectRef idx="2">
+            <a:schemeClr val="accent1"/>
+          </a:effectRef>
+          <a:fontRef idx="minor">
+            <a:schemeClr val="lt1"/>
+          </a:fontRef>
+        </p:style>
+        <p:txBody>
+          <a:bodyPr rtlCol="0" anchor="ctr"/>
+          <a:lstStyle/>
+          <a:p>
+            <a:pPr algn="ctr"/>
+          </a:p>
+        </p:txBody>
+      </p:sp>
+      <p:sp>
+        <p:nvSpPr>
+          <p:cNvPr id="3" name="Rectangle 2"/>
+          <p:cNvSpPr/>
+          <p:nvPr/>
+        </p:nvSpPr>
+        <p:spPr>
+          <a:xfrm>
+            <a:off x="0" y="603504"/>
+            <a:ext cx="12191695" cy="54864"/>
+          </a:xfrm>
+          <a:prstGeom prst="rect">
+            <a:avLst/>
+          </a:prstGeom>
+          <a:solidFill>
+            <a:srgbClr val="1AA6B7"/>
+          </a:solidFill>
+          <a:ln>
+            <a:noFill/>
+          </a:ln>
+        </p:spPr>
+        <p:style>
+          <a:lnRef idx="1">
+            <a:schemeClr val="accent1"/>
+          </a:lnRef>
+          <a:fillRef idx="3">
+            <a:schemeClr val="accent1"/>
+          </a:fillRef>
+          <a:effectRef idx="2">
+            <a:schemeClr val="accent1"/>
+          </a:effectRef>
+          <a:fontRef idx="minor">
+            <a:schemeClr val="lt1"/>
+          </a:fontRef>
+        </p:style>
+        <p:txBody>
+          <a:bodyPr rtlCol="0" anchor="ctr"/>
+          <a:lstStyle/>
+          <a:p>
+            <a:pPr algn="ctr"/>
+          </a:p>
+        </p:txBody>
+      </p:sp>
+      <p:sp>
+        <p:nvSpPr>
+          <p:cNvPr id="4" name="TextBox 3"/>
+          <p:cNvSpPr txBox="1"/>
+          <p:nvPr/>
+        </p:nvSpPr>
+        <p:spPr>
+          <a:xfrm>
+            <a:off x="685800" y="128016"/>
+            <a:ext cx="10820095" cy="457200"/>
+          </a:xfrm>
+          <a:prstGeom prst="rect">
+            <a:avLst/>
+          </a:prstGeom>
+          <a:noFill/>
+        </p:spPr>
+        <p:txBody>
+          <a:bodyPr wrap="none">
+            <a:spAutoFit/>
+          </a:bodyPr>
+          <a:lstStyle/>
+          <a:p>
+            <a:pPr>
+              <a:defRPr sz="2200" b="1">
+                <a:solidFill>
+                  <a:srgbClr val="FFFFFF"/>
+                </a:solidFill>
+              </a:defRPr>
+            </a:pPr>
             <a:r>
               <a:t>Demo — Uncertainty in Stationary Data (Density / Heatmap)</a:t>
             </a:r>
+          </a:p>
+        </p:txBody>
+      </p:sp>
+      <p:sp>
+        <p:nvSpPr>
+          <p:cNvPr id="5" name="TextBox 4"/>
+          <p:cNvSpPr txBox="1"/>
+          <p:nvPr/>
+        </p:nvSpPr>
+        <p:spPr>
+          <a:xfrm>
+            <a:off x="685800" y="420624"/>
+            <a:ext cx="10820095" cy="274320"/>
+          </a:xfrm>
+          <a:prstGeom prst="rect">
+            <a:avLst/>
+          </a:prstGeom>
+          <a:noFill/>
+        </p:spPr>
+        <p:txBody>
+          <a:bodyPr wrap="none">
+            <a:spAutoFit/>
+          </a:bodyPr>
+          <a:lstStyle/>
+          <a:p>
+            <a:pPr>
+              <a:defRPr sz="1200">
+                <a:solidFill>
+                  <a:srgbClr val="1AA6B7"/>
+                </a:solidFill>
+              </a:defRPr>
+            </a:pPr>
+            <a:r>
+              <a:t>Demo</a:t>
+            </a:r>
+          </a:p>
+        </p:txBody>
+      </p:sp>
+      <p:sp>
+        <p:nvSpPr>
+          <p:cNvPr id="6" name="Rounded Rectangle 5"/>
+          <p:cNvSpPr/>
+          <p:nvPr/>
+        </p:nvSpPr>
+        <p:spPr>
+          <a:xfrm>
+            <a:off x="685800" y="978408"/>
+            <a:ext cx="10820095" cy="5056632"/>
+          </a:xfrm>
+          <a:prstGeom prst="roundRect">
+            <a:avLst/>
+          </a:prstGeom>
+          <a:solidFill>
+            <a:srgbClr val="FFFFFF"/>
+          </a:solidFill>
+          <a:ln>
+            <a:solidFill>
+              <a:srgbClr val="E5E7EB"/>
+            </a:solidFill>
+          </a:ln>
+        </p:spPr>
+        <p:style>
+          <a:lnRef idx="1">
+            <a:schemeClr val="accent1"/>
+          </a:lnRef>
+          <a:fillRef idx="3">
+            <a:schemeClr val="accent1"/>
+          </a:fillRef>
+          <a:effectRef idx="2">
+            <a:schemeClr val="accent1"/>
+          </a:effectRef>
+          <a:fontRef idx="minor">
+            <a:schemeClr val="lt1"/>
+          </a:fontRef>
+        </p:style>
+        <p:txBody>
+          <a:bodyPr rtlCol="0" anchor="ctr"/>
+          <a:lstStyle/>
+          <a:p>
+            <a:pPr algn="ctr"/>
           </a:p>
         </p:txBody>
       </p:sp>
       <p:pic>
         <p:nvPicPr>
-          <p:cNvPr id="3" name="Picture 2" descr="dashboard3.png"/>
+          <p:cNvPr id="7" name="Picture 6" descr="dashboard3.png"/>
           <p:cNvPicPr>
             <a:picLocks noChangeAspect="1"/>
           </p:cNvPicPr>
@@ -3773,8 +5445,8 @@
         </p:blipFill>
         <p:spPr>
           <a:xfrm>
-            <a:off x="685800" y="1417320"/>
-            <a:ext cx="10972800" cy="5120640"/>
+            <a:off x="758952" y="1051560"/>
+            <a:ext cx="10673791" cy="4910328"/>
           </a:xfrm>
           <a:prstGeom prst="rect">
             <a:avLst/>
@@ -3783,14 +5455,14 @@
       </p:pic>
       <p:sp>
         <p:nvSpPr>
-          <p:cNvPr id="4" name="TextBox 3"/>
+          <p:cNvPr id="8" name="TextBox 7"/>
           <p:cNvSpPr txBox="1"/>
           <p:nvPr/>
         </p:nvSpPr>
         <p:spPr>
           <a:xfrm>
-            <a:off x="685800" y="6583680"/>
-            <a:ext cx="10972800" cy="365760"/>
+            <a:off x="685800" y="6108192"/>
+            <a:ext cx="10820095" cy="384048"/>
           </a:xfrm>
           <a:prstGeom prst="rect">
             <a:avLst/>
@@ -3804,14 +5476,127 @@
           <a:lstStyle/>
           <a:p>
             <a:pPr algn="ctr">
-              <a:defRPr sz="1400">
-                <a:solidFill>
-                  <a:srgbClr val="444444"/>
+              <a:defRPr sz="1200">
+                <a:solidFill>
+                  <a:srgbClr val="6B7280"/>
                 </a:solidFill>
               </a:defRPr>
             </a:pPr>
             <a:r>
               <a:t>Density-based encoding for stationary uncertainty patterns.</a:t>
+            </a:r>
+          </a:p>
+        </p:txBody>
+      </p:sp>
+      <p:sp>
+        <p:nvSpPr>
+          <p:cNvPr id="9" name="Rectangle 8"/>
+          <p:cNvSpPr/>
+          <p:nvPr/>
+        </p:nvSpPr>
+        <p:spPr>
+          <a:xfrm>
+            <a:off x="0" y="6537960"/>
+            <a:ext cx="12191695" cy="18288"/>
+          </a:xfrm>
+          <a:prstGeom prst="rect">
+            <a:avLst/>
+          </a:prstGeom>
+          <a:solidFill>
+            <a:srgbClr val="E5E7EB"/>
+          </a:solidFill>
+          <a:ln>
+            <a:noFill/>
+          </a:ln>
+        </p:spPr>
+        <p:style>
+          <a:lnRef idx="1">
+            <a:schemeClr val="accent1"/>
+          </a:lnRef>
+          <a:fillRef idx="3">
+            <a:schemeClr val="accent1"/>
+          </a:fillRef>
+          <a:effectRef idx="2">
+            <a:schemeClr val="accent1"/>
+          </a:effectRef>
+          <a:fontRef idx="minor">
+            <a:schemeClr val="lt1"/>
+          </a:fontRef>
+        </p:style>
+        <p:txBody>
+          <a:bodyPr rtlCol="0" anchor="ctr"/>
+          <a:lstStyle/>
+          <a:p>
+            <a:pPr algn="ctr"/>
+          </a:p>
+        </p:txBody>
+      </p:sp>
+      <p:sp>
+        <p:nvSpPr>
+          <p:cNvPr id="10" name="TextBox 9"/>
+          <p:cNvSpPr txBox="1"/>
+          <p:nvPr/>
+        </p:nvSpPr>
+        <p:spPr>
+          <a:xfrm>
+            <a:off x="685800" y="6583680"/>
+            <a:ext cx="7315200" cy="228600"/>
+          </a:xfrm>
+          <a:prstGeom prst="rect">
+            <a:avLst/>
+          </a:prstGeom>
+          <a:noFill/>
+        </p:spPr>
+        <p:txBody>
+          <a:bodyPr wrap="none">
+            <a:spAutoFit/>
+          </a:bodyPr>
+          <a:lstStyle/>
+          <a:p>
+            <a:pPr>
+              <a:defRPr sz="1000">
+                <a:solidFill>
+                  <a:srgbClr val="6B7280"/>
+                </a:solidFill>
+              </a:defRPr>
+            </a:pPr>
+            <a:r>
+              <a:t>Project #543 — Visualizing Spatio-Temporal Uncertainty</a:t>
+            </a:r>
+          </a:p>
+        </p:txBody>
+      </p:sp>
+      <p:sp>
+        <p:nvSpPr>
+          <p:cNvPr id="11" name="TextBox 10"/>
+          <p:cNvSpPr txBox="1"/>
+          <p:nvPr/>
+        </p:nvSpPr>
+        <p:spPr>
+          <a:xfrm>
+            <a:off x="9494215" y="6583680"/>
+            <a:ext cx="2011680" cy="228600"/>
+          </a:xfrm>
+          <a:prstGeom prst="rect">
+            <a:avLst/>
+          </a:prstGeom>
+          <a:noFill/>
+        </p:spPr>
+        <p:txBody>
+          <a:bodyPr wrap="none">
+            <a:spAutoFit/>
+          </a:bodyPr>
+          <a:lstStyle/>
+          <a:p>
+            <a:pPr algn="r">
+              <a:defRPr sz="1000">
+                <a:solidFill>
+                  <a:srgbClr val="6B7280"/>
+                </a:solidFill>
+              </a:defRPr>
+            </a:pPr>
+            <a:r>
+              <a:t>14/19</a:t>
             </a:r>
           </a:p>
         </p:txBody>
@@ -3827,6 +5612,14 @@
 <file path=ppt/slides/slide15.xml><?xml version="1.0" encoding="utf-8"?>
 <p:sld xmlns:a="http://schemas.openxmlformats.org/drawingml/2006/main" xmlns:p="http://schemas.openxmlformats.org/presentationml/2006/main" xmlns:r="http://schemas.openxmlformats.org/officeDocument/2006/relationships">
   <p:cSld>
+    <p:bg>
+      <p:bgPr>
+        <a:solidFill>
+          <a:srgbClr val="F7F8FA"/>
+        </a:solidFill>
+        <a:effectLst/>
+      </p:bgPr>
+    </p:bg>
     <p:spTree>
       <p:nvGrpSpPr>
         <p:cNvPr id="1" name=""/>
@@ -3836,28 +5629,208 @@
       <p:grpSpPr/>
       <p:sp>
         <p:nvSpPr>
-          <p:cNvPr id="2" name="Title 1"/>
-          <p:cNvSpPr>
-            <a:spLocks noGrp="1"/>
-          </p:cNvSpPr>
-          <p:nvPr>
-            <p:ph type="title"/>
-          </p:nvPr>
-        </p:nvSpPr>
-        <p:spPr/>
-        <p:txBody>
-          <a:bodyPr/>
-          <a:lstStyle/>
-          <a:p>
+          <p:cNvPr id="2" name="Rectangle 1"/>
+          <p:cNvSpPr/>
+          <p:nvPr/>
+        </p:nvSpPr>
+        <p:spPr>
+          <a:xfrm>
+            <a:off x="0" y="0"/>
+            <a:ext cx="12191695" cy="658368"/>
+          </a:xfrm>
+          <a:prstGeom prst="rect">
+            <a:avLst/>
+          </a:prstGeom>
+          <a:solidFill>
+            <a:srgbClr val="0B1F3B"/>
+          </a:solidFill>
+          <a:ln>
+            <a:noFill/>
+          </a:ln>
+        </p:spPr>
+        <p:style>
+          <a:lnRef idx="1">
+            <a:schemeClr val="accent1"/>
+          </a:lnRef>
+          <a:fillRef idx="3">
+            <a:schemeClr val="accent1"/>
+          </a:fillRef>
+          <a:effectRef idx="2">
+            <a:schemeClr val="accent1"/>
+          </a:effectRef>
+          <a:fontRef idx="minor">
+            <a:schemeClr val="lt1"/>
+          </a:fontRef>
+        </p:style>
+        <p:txBody>
+          <a:bodyPr rtlCol="0" anchor="ctr"/>
+          <a:lstStyle/>
+          <a:p>
+            <a:pPr algn="ctr"/>
+          </a:p>
+        </p:txBody>
+      </p:sp>
+      <p:sp>
+        <p:nvSpPr>
+          <p:cNvPr id="3" name="Rectangle 2"/>
+          <p:cNvSpPr/>
+          <p:nvPr/>
+        </p:nvSpPr>
+        <p:spPr>
+          <a:xfrm>
+            <a:off x="0" y="603504"/>
+            <a:ext cx="12191695" cy="54864"/>
+          </a:xfrm>
+          <a:prstGeom prst="rect">
+            <a:avLst/>
+          </a:prstGeom>
+          <a:solidFill>
+            <a:srgbClr val="1AA6B7"/>
+          </a:solidFill>
+          <a:ln>
+            <a:noFill/>
+          </a:ln>
+        </p:spPr>
+        <p:style>
+          <a:lnRef idx="1">
+            <a:schemeClr val="accent1"/>
+          </a:lnRef>
+          <a:fillRef idx="3">
+            <a:schemeClr val="accent1"/>
+          </a:fillRef>
+          <a:effectRef idx="2">
+            <a:schemeClr val="accent1"/>
+          </a:effectRef>
+          <a:fontRef idx="minor">
+            <a:schemeClr val="lt1"/>
+          </a:fontRef>
+        </p:style>
+        <p:txBody>
+          <a:bodyPr rtlCol="0" anchor="ctr"/>
+          <a:lstStyle/>
+          <a:p>
+            <a:pPr algn="ctr"/>
+          </a:p>
+        </p:txBody>
+      </p:sp>
+      <p:sp>
+        <p:nvSpPr>
+          <p:cNvPr id="4" name="TextBox 3"/>
+          <p:cNvSpPr txBox="1"/>
+          <p:nvPr/>
+        </p:nvSpPr>
+        <p:spPr>
+          <a:xfrm>
+            <a:off x="685800" y="128016"/>
+            <a:ext cx="10820095" cy="457200"/>
+          </a:xfrm>
+          <a:prstGeom prst="rect">
+            <a:avLst/>
+          </a:prstGeom>
+          <a:noFill/>
+        </p:spPr>
+        <p:txBody>
+          <a:bodyPr wrap="none">
+            <a:spAutoFit/>
+          </a:bodyPr>
+          <a:lstStyle/>
+          <a:p>
+            <a:pPr>
+              <a:defRPr sz="2200" b="1">
+                <a:solidFill>
+                  <a:srgbClr val="FFFFFF"/>
+                </a:solidFill>
+              </a:defRPr>
+            </a:pPr>
             <a:r>
               <a:t>Demo — Uncertainty in Stationary Data (Heatmap)</a:t>
             </a:r>
+          </a:p>
+        </p:txBody>
+      </p:sp>
+      <p:sp>
+        <p:nvSpPr>
+          <p:cNvPr id="5" name="TextBox 4"/>
+          <p:cNvSpPr txBox="1"/>
+          <p:nvPr/>
+        </p:nvSpPr>
+        <p:spPr>
+          <a:xfrm>
+            <a:off x="685800" y="420624"/>
+            <a:ext cx="10820095" cy="274320"/>
+          </a:xfrm>
+          <a:prstGeom prst="rect">
+            <a:avLst/>
+          </a:prstGeom>
+          <a:noFill/>
+        </p:spPr>
+        <p:txBody>
+          <a:bodyPr wrap="none">
+            <a:spAutoFit/>
+          </a:bodyPr>
+          <a:lstStyle/>
+          <a:p>
+            <a:pPr>
+              <a:defRPr sz="1200">
+                <a:solidFill>
+                  <a:srgbClr val="1AA6B7"/>
+                </a:solidFill>
+              </a:defRPr>
+            </a:pPr>
+            <a:r>
+              <a:t>Demo</a:t>
+            </a:r>
+          </a:p>
+        </p:txBody>
+      </p:sp>
+      <p:sp>
+        <p:nvSpPr>
+          <p:cNvPr id="6" name="Rounded Rectangle 5"/>
+          <p:cNvSpPr/>
+          <p:nvPr/>
+        </p:nvSpPr>
+        <p:spPr>
+          <a:xfrm>
+            <a:off x="685800" y="978408"/>
+            <a:ext cx="10820095" cy="5056632"/>
+          </a:xfrm>
+          <a:prstGeom prst="roundRect">
+            <a:avLst/>
+          </a:prstGeom>
+          <a:solidFill>
+            <a:srgbClr val="FFFFFF"/>
+          </a:solidFill>
+          <a:ln>
+            <a:solidFill>
+              <a:srgbClr val="E5E7EB"/>
+            </a:solidFill>
+          </a:ln>
+        </p:spPr>
+        <p:style>
+          <a:lnRef idx="1">
+            <a:schemeClr val="accent1"/>
+          </a:lnRef>
+          <a:fillRef idx="3">
+            <a:schemeClr val="accent1"/>
+          </a:fillRef>
+          <a:effectRef idx="2">
+            <a:schemeClr val="accent1"/>
+          </a:effectRef>
+          <a:fontRef idx="minor">
+            <a:schemeClr val="lt1"/>
+          </a:fontRef>
+        </p:style>
+        <p:txBody>
+          <a:bodyPr rtlCol="0" anchor="ctr"/>
+          <a:lstStyle/>
+          <a:p>
+            <a:pPr algn="ctr"/>
           </a:p>
         </p:txBody>
       </p:sp>
       <p:pic>
         <p:nvPicPr>
-          <p:cNvPr id="3" name="Picture 2" descr="dashboard4.png"/>
+          <p:cNvPr id="7" name="Picture 6" descr="dashboard4.png"/>
           <p:cNvPicPr>
             <a:picLocks noChangeAspect="1"/>
           </p:cNvPicPr>
@@ -3871,8 +5844,8 @@
         </p:blipFill>
         <p:spPr>
           <a:xfrm>
-            <a:off x="685800" y="1417320"/>
-            <a:ext cx="10972800" cy="5120640"/>
+            <a:off x="758952" y="1051560"/>
+            <a:ext cx="10673791" cy="4910328"/>
           </a:xfrm>
           <a:prstGeom prst="rect">
             <a:avLst/>
@@ -3881,14 +5854,14 @@
       </p:pic>
       <p:sp>
         <p:nvSpPr>
-          <p:cNvPr id="4" name="TextBox 3"/>
+          <p:cNvPr id="8" name="TextBox 7"/>
           <p:cNvSpPr txBox="1"/>
           <p:nvPr/>
         </p:nvSpPr>
         <p:spPr>
           <a:xfrm>
-            <a:off x="685800" y="6583680"/>
-            <a:ext cx="10972800" cy="365760"/>
+            <a:off x="685800" y="6108192"/>
+            <a:ext cx="10820095" cy="384048"/>
           </a:xfrm>
           <a:prstGeom prst="rect">
             <a:avLst/>
@@ -3902,14 +5875,127 @@
           <a:lstStyle/>
           <a:p>
             <a:pPr algn="ctr">
-              <a:defRPr sz="1400">
-                <a:solidFill>
-                  <a:srgbClr val="444444"/>
+              <a:defRPr sz="1200">
+                <a:solidFill>
+                  <a:srgbClr val="6B7280"/>
                 </a:solidFill>
               </a:defRPr>
             </a:pPr>
             <a:r>
               <a:t>Heatmap encoding for stationary uncertainty patterns.</a:t>
+            </a:r>
+          </a:p>
+        </p:txBody>
+      </p:sp>
+      <p:sp>
+        <p:nvSpPr>
+          <p:cNvPr id="9" name="Rectangle 8"/>
+          <p:cNvSpPr/>
+          <p:nvPr/>
+        </p:nvSpPr>
+        <p:spPr>
+          <a:xfrm>
+            <a:off x="0" y="6537960"/>
+            <a:ext cx="12191695" cy="18288"/>
+          </a:xfrm>
+          <a:prstGeom prst="rect">
+            <a:avLst/>
+          </a:prstGeom>
+          <a:solidFill>
+            <a:srgbClr val="E5E7EB"/>
+          </a:solidFill>
+          <a:ln>
+            <a:noFill/>
+          </a:ln>
+        </p:spPr>
+        <p:style>
+          <a:lnRef idx="1">
+            <a:schemeClr val="accent1"/>
+          </a:lnRef>
+          <a:fillRef idx="3">
+            <a:schemeClr val="accent1"/>
+          </a:fillRef>
+          <a:effectRef idx="2">
+            <a:schemeClr val="accent1"/>
+          </a:effectRef>
+          <a:fontRef idx="minor">
+            <a:schemeClr val="lt1"/>
+          </a:fontRef>
+        </p:style>
+        <p:txBody>
+          <a:bodyPr rtlCol="0" anchor="ctr"/>
+          <a:lstStyle/>
+          <a:p>
+            <a:pPr algn="ctr"/>
+          </a:p>
+        </p:txBody>
+      </p:sp>
+      <p:sp>
+        <p:nvSpPr>
+          <p:cNvPr id="10" name="TextBox 9"/>
+          <p:cNvSpPr txBox="1"/>
+          <p:nvPr/>
+        </p:nvSpPr>
+        <p:spPr>
+          <a:xfrm>
+            <a:off x="685800" y="6583680"/>
+            <a:ext cx="7315200" cy="228600"/>
+          </a:xfrm>
+          <a:prstGeom prst="rect">
+            <a:avLst/>
+          </a:prstGeom>
+          <a:noFill/>
+        </p:spPr>
+        <p:txBody>
+          <a:bodyPr wrap="none">
+            <a:spAutoFit/>
+          </a:bodyPr>
+          <a:lstStyle/>
+          <a:p>
+            <a:pPr>
+              <a:defRPr sz="1000">
+                <a:solidFill>
+                  <a:srgbClr val="6B7280"/>
+                </a:solidFill>
+              </a:defRPr>
+            </a:pPr>
+            <a:r>
+              <a:t>Project #543 — Visualizing Spatio-Temporal Uncertainty</a:t>
+            </a:r>
+          </a:p>
+        </p:txBody>
+      </p:sp>
+      <p:sp>
+        <p:nvSpPr>
+          <p:cNvPr id="11" name="TextBox 10"/>
+          <p:cNvSpPr txBox="1"/>
+          <p:nvPr/>
+        </p:nvSpPr>
+        <p:spPr>
+          <a:xfrm>
+            <a:off x="9494215" y="6583680"/>
+            <a:ext cx="2011680" cy="228600"/>
+          </a:xfrm>
+          <a:prstGeom prst="rect">
+            <a:avLst/>
+          </a:prstGeom>
+          <a:noFill/>
+        </p:spPr>
+        <p:txBody>
+          <a:bodyPr wrap="none">
+            <a:spAutoFit/>
+          </a:bodyPr>
+          <a:lstStyle/>
+          <a:p>
+            <a:pPr algn="r">
+              <a:defRPr sz="1000">
+                <a:solidFill>
+                  <a:srgbClr val="6B7280"/>
+                </a:solidFill>
+              </a:defRPr>
+            </a:pPr>
+            <a:r>
+              <a:t>15/19</a:t>
             </a:r>
           </a:p>
         </p:txBody>
@@ -3925,6 +6011,14 @@
 <file path=ppt/slides/slide16.xml><?xml version="1.0" encoding="utf-8"?>
 <p:sld xmlns:a="http://schemas.openxmlformats.org/drawingml/2006/main" xmlns:p="http://schemas.openxmlformats.org/presentationml/2006/main" xmlns:r="http://schemas.openxmlformats.org/officeDocument/2006/relationships">
   <p:cSld>
+    <p:bg>
+      <p:bgPr>
+        <a:solidFill>
+          <a:srgbClr val="F7F8FA"/>
+        </a:solidFill>
+        <a:effectLst/>
+      </p:bgPr>
+    </p:bg>
     <p:spTree>
       <p:nvGrpSpPr>
         <p:cNvPr id="1" name=""/>
@@ -3934,28 +6028,208 @@
       <p:grpSpPr/>
       <p:sp>
         <p:nvSpPr>
-          <p:cNvPr id="2" name="Title 1"/>
-          <p:cNvSpPr>
-            <a:spLocks noGrp="1"/>
-          </p:cNvSpPr>
-          <p:nvPr>
-            <p:ph type="title"/>
-          </p:nvPr>
-        </p:nvSpPr>
-        <p:spPr/>
-        <p:txBody>
-          <a:bodyPr/>
-          <a:lstStyle/>
-          <a:p>
+          <p:cNvPr id="2" name="Rectangle 1"/>
+          <p:cNvSpPr/>
+          <p:nvPr/>
+        </p:nvSpPr>
+        <p:spPr>
+          <a:xfrm>
+            <a:off x="0" y="0"/>
+            <a:ext cx="12191695" cy="658368"/>
+          </a:xfrm>
+          <a:prstGeom prst="rect">
+            <a:avLst/>
+          </a:prstGeom>
+          <a:solidFill>
+            <a:srgbClr val="0B1F3B"/>
+          </a:solidFill>
+          <a:ln>
+            <a:noFill/>
+          </a:ln>
+        </p:spPr>
+        <p:style>
+          <a:lnRef idx="1">
+            <a:schemeClr val="accent1"/>
+          </a:lnRef>
+          <a:fillRef idx="3">
+            <a:schemeClr val="accent1"/>
+          </a:fillRef>
+          <a:effectRef idx="2">
+            <a:schemeClr val="accent1"/>
+          </a:effectRef>
+          <a:fontRef idx="minor">
+            <a:schemeClr val="lt1"/>
+          </a:fontRef>
+        </p:style>
+        <p:txBody>
+          <a:bodyPr rtlCol="0" anchor="ctr"/>
+          <a:lstStyle/>
+          <a:p>
+            <a:pPr algn="ctr"/>
+          </a:p>
+        </p:txBody>
+      </p:sp>
+      <p:sp>
+        <p:nvSpPr>
+          <p:cNvPr id="3" name="Rectangle 2"/>
+          <p:cNvSpPr/>
+          <p:nvPr/>
+        </p:nvSpPr>
+        <p:spPr>
+          <a:xfrm>
+            <a:off x="0" y="603504"/>
+            <a:ext cx="12191695" cy="54864"/>
+          </a:xfrm>
+          <a:prstGeom prst="rect">
+            <a:avLst/>
+          </a:prstGeom>
+          <a:solidFill>
+            <a:srgbClr val="1AA6B7"/>
+          </a:solidFill>
+          <a:ln>
+            <a:noFill/>
+          </a:ln>
+        </p:spPr>
+        <p:style>
+          <a:lnRef idx="1">
+            <a:schemeClr val="accent1"/>
+          </a:lnRef>
+          <a:fillRef idx="3">
+            <a:schemeClr val="accent1"/>
+          </a:fillRef>
+          <a:effectRef idx="2">
+            <a:schemeClr val="accent1"/>
+          </a:effectRef>
+          <a:fontRef idx="minor">
+            <a:schemeClr val="lt1"/>
+          </a:fontRef>
+        </p:style>
+        <p:txBody>
+          <a:bodyPr rtlCol="0" anchor="ctr"/>
+          <a:lstStyle/>
+          <a:p>
+            <a:pPr algn="ctr"/>
+          </a:p>
+        </p:txBody>
+      </p:sp>
+      <p:sp>
+        <p:nvSpPr>
+          <p:cNvPr id="4" name="TextBox 3"/>
+          <p:cNvSpPr txBox="1"/>
+          <p:nvPr/>
+        </p:nvSpPr>
+        <p:spPr>
+          <a:xfrm>
+            <a:off x="685800" y="128016"/>
+            <a:ext cx="10820095" cy="457200"/>
+          </a:xfrm>
+          <a:prstGeom prst="rect">
+            <a:avLst/>
+          </a:prstGeom>
+          <a:noFill/>
+        </p:spPr>
+        <p:txBody>
+          <a:bodyPr wrap="none">
+            <a:spAutoFit/>
+          </a:bodyPr>
+          <a:lstStyle/>
+          <a:p>
+            <a:pPr>
+              <a:defRPr sz="2200" b="1">
+                <a:solidFill>
+                  <a:srgbClr val="FFFFFF"/>
+                </a:solidFill>
+              </a:defRPr>
+            </a:pPr>
             <a:r>
               <a:t>Demo — Walking Data</a:t>
             </a:r>
+          </a:p>
+        </p:txBody>
+      </p:sp>
+      <p:sp>
+        <p:nvSpPr>
+          <p:cNvPr id="5" name="TextBox 4"/>
+          <p:cNvSpPr txBox="1"/>
+          <p:nvPr/>
+        </p:nvSpPr>
+        <p:spPr>
+          <a:xfrm>
+            <a:off x="685800" y="420624"/>
+            <a:ext cx="10820095" cy="274320"/>
+          </a:xfrm>
+          <a:prstGeom prst="rect">
+            <a:avLst/>
+          </a:prstGeom>
+          <a:noFill/>
+        </p:spPr>
+        <p:txBody>
+          <a:bodyPr wrap="none">
+            <a:spAutoFit/>
+          </a:bodyPr>
+          <a:lstStyle/>
+          <a:p>
+            <a:pPr>
+              <a:defRPr sz="1200">
+                <a:solidFill>
+                  <a:srgbClr val="1AA6B7"/>
+                </a:solidFill>
+              </a:defRPr>
+            </a:pPr>
+            <a:r>
+              <a:t>Demo</a:t>
+            </a:r>
+          </a:p>
+        </p:txBody>
+      </p:sp>
+      <p:sp>
+        <p:nvSpPr>
+          <p:cNvPr id="6" name="Rounded Rectangle 5"/>
+          <p:cNvSpPr/>
+          <p:nvPr/>
+        </p:nvSpPr>
+        <p:spPr>
+          <a:xfrm>
+            <a:off x="685800" y="978408"/>
+            <a:ext cx="10820095" cy="5056632"/>
+          </a:xfrm>
+          <a:prstGeom prst="roundRect">
+            <a:avLst/>
+          </a:prstGeom>
+          <a:solidFill>
+            <a:srgbClr val="FFFFFF"/>
+          </a:solidFill>
+          <a:ln>
+            <a:solidFill>
+              <a:srgbClr val="E5E7EB"/>
+            </a:solidFill>
+          </a:ln>
+        </p:spPr>
+        <p:style>
+          <a:lnRef idx="1">
+            <a:schemeClr val="accent1"/>
+          </a:lnRef>
+          <a:fillRef idx="3">
+            <a:schemeClr val="accent1"/>
+          </a:fillRef>
+          <a:effectRef idx="2">
+            <a:schemeClr val="accent1"/>
+          </a:effectRef>
+          <a:fontRef idx="minor">
+            <a:schemeClr val="lt1"/>
+          </a:fontRef>
+        </p:style>
+        <p:txBody>
+          <a:bodyPr rtlCol="0" anchor="ctr"/>
+          <a:lstStyle/>
+          <a:p>
+            <a:pPr algn="ctr"/>
           </a:p>
         </p:txBody>
       </p:sp>
       <p:pic>
         <p:nvPicPr>
-          <p:cNvPr id="3" name="Picture 2" descr="dashboard5.png"/>
+          <p:cNvPr id="7" name="Picture 6" descr="dashboard5.png"/>
           <p:cNvPicPr>
             <a:picLocks noChangeAspect="1"/>
           </p:cNvPicPr>
@@ -3969,8 +6243,8 @@
         </p:blipFill>
         <p:spPr>
           <a:xfrm>
-            <a:off x="685800" y="1417320"/>
-            <a:ext cx="10972800" cy="5120640"/>
+            <a:off x="758952" y="1051560"/>
+            <a:ext cx="10673791" cy="4910328"/>
           </a:xfrm>
           <a:prstGeom prst="rect">
             <a:avLst/>
@@ -3979,14 +6253,14 @@
       </p:pic>
       <p:sp>
         <p:nvSpPr>
-          <p:cNvPr id="4" name="TextBox 3"/>
+          <p:cNvPr id="8" name="TextBox 7"/>
           <p:cNvSpPr txBox="1"/>
           <p:nvPr/>
         </p:nvSpPr>
         <p:spPr>
           <a:xfrm>
-            <a:off x="685800" y="6583680"/>
-            <a:ext cx="10972800" cy="365760"/>
+            <a:off x="685800" y="6108192"/>
+            <a:ext cx="10820095" cy="384048"/>
           </a:xfrm>
           <a:prstGeom prst="rect">
             <a:avLst/>
@@ -4000,14 +6274,127 @@
           <a:lstStyle/>
           <a:p>
             <a:pPr algn="ctr">
-              <a:defRPr sz="1400">
-                <a:solidFill>
-                  <a:srgbClr val="444444"/>
+              <a:defRPr sz="1200">
+                <a:solidFill>
+                  <a:srgbClr val="6B7280"/>
                 </a:solidFill>
               </a:defRPr>
             </a:pPr>
             <a:r>
               <a:t>Behavior of density/heatmap uncertainty views on walking traces.</a:t>
+            </a:r>
+          </a:p>
+        </p:txBody>
+      </p:sp>
+      <p:sp>
+        <p:nvSpPr>
+          <p:cNvPr id="9" name="Rectangle 8"/>
+          <p:cNvSpPr/>
+          <p:nvPr/>
+        </p:nvSpPr>
+        <p:spPr>
+          <a:xfrm>
+            <a:off x="0" y="6537960"/>
+            <a:ext cx="12191695" cy="18288"/>
+          </a:xfrm>
+          <a:prstGeom prst="rect">
+            <a:avLst/>
+          </a:prstGeom>
+          <a:solidFill>
+            <a:srgbClr val="E5E7EB"/>
+          </a:solidFill>
+          <a:ln>
+            <a:noFill/>
+          </a:ln>
+        </p:spPr>
+        <p:style>
+          <a:lnRef idx="1">
+            <a:schemeClr val="accent1"/>
+          </a:lnRef>
+          <a:fillRef idx="3">
+            <a:schemeClr val="accent1"/>
+          </a:fillRef>
+          <a:effectRef idx="2">
+            <a:schemeClr val="accent1"/>
+          </a:effectRef>
+          <a:fontRef idx="minor">
+            <a:schemeClr val="lt1"/>
+          </a:fontRef>
+        </p:style>
+        <p:txBody>
+          <a:bodyPr rtlCol="0" anchor="ctr"/>
+          <a:lstStyle/>
+          <a:p>
+            <a:pPr algn="ctr"/>
+          </a:p>
+        </p:txBody>
+      </p:sp>
+      <p:sp>
+        <p:nvSpPr>
+          <p:cNvPr id="10" name="TextBox 9"/>
+          <p:cNvSpPr txBox="1"/>
+          <p:nvPr/>
+        </p:nvSpPr>
+        <p:spPr>
+          <a:xfrm>
+            <a:off x="685800" y="6583680"/>
+            <a:ext cx="7315200" cy="228600"/>
+          </a:xfrm>
+          <a:prstGeom prst="rect">
+            <a:avLst/>
+          </a:prstGeom>
+          <a:noFill/>
+        </p:spPr>
+        <p:txBody>
+          <a:bodyPr wrap="none">
+            <a:spAutoFit/>
+          </a:bodyPr>
+          <a:lstStyle/>
+          <a:p>
+            <a:pPr>
+              <a:defRPr sz="1000">
+                <a:solidFill>
+                  <a:srgbClr val="6B7280"/>
+                </a:solidFill>
+              </a:defRPr>
+            </a:pPr>
+            <a:r>
+              <a:t>Project #543 — Visualizing Spatio-Temporal Uncertainty</a:t>
+            </a:r>
+          </a:p>
+        </p:txBody>
+      </p:sp>
+      <p:sp>
+        <p:nvSpPr>
+          <p:cNvPr id="11" name="TextBox 10"/>
+          <p:cNvSpPr txBox="1"/>
+          <p:nvPr/>
+        </p:nvSpPr>
+        <p:spPr>
+          <a:xfrm>
+            <a:off x="9494215" y="6583680"/>
+            <a:ext cx="2011680" cy="228600"/>
+          </a:xfrm>
+          <a:prstGeom prst="rect">
+            <a:avLst/>
+          </a:prstGeom>
+          <a:noFill/>
+        </p:spPr>
+        <p:txBody>
+          <a:bodyPr wrap="none">
+            <a:spAutoFit/>
+          </a:bodyPr>
+          <a:lstStyle/>
+          <a:p>
+            <a:pPr algn="r">
+              <a:defRPr sz="1000">
+                <a:solidFill>
+                  <a:srgbClr val="6B7280"/>
+                </a:solidFill>
+              </a:defRPr>
+            </a:pPr>
+            <a:r>
+              <a:t>16/19</a:t>
             </a:r>
           </a:p>
         </p:txBody>
@@ -4023,6 +6410,14 @@
 <file path=ppt/slides/slide17.xml><?xml version="1.0" encoding="utf-8"?>
 <p:sld xmlns:a="http://schemas.openxmlformats.org/drawingml/2006/main" xmlns:p="http://schemas.openxmlformats.org/presentationml/2006/main" xmlns:r="http://schemas.openxmlformats.org/officeDocument/2006/relationships">
   <p:cSld>
+    <p:bg>
+      <p:bgPr>
+        <a:solidFill>
+          <a:srgbClr val="F7F8FA"/>
+        </a:solidFill>
+        <a:effectLst/>
+      </p:bgPr>
+    </p:bg>
     <p:spTree>
       <p:nvGrpSpPr>
         <p:cNvPr id="1" name=""/>
@@ -4032,19 +6427,119 @@
       <p:grpSpPr/>
       <p:sp>
         <p:nvSpPr>
-          <p:cNvPr id="2" name="Title 1"/>
-          <p:cNvSpPr>
-            <a:spLocks noGrp="1"/>
-          </p:cNvSpPr>
-          <p:nvPr>
-            <p:ph type="title"/>
-          </p:nvPr>
-        </p:nvSpPr>
-        <p:spPr/>
-        <p:txBody>
-          <a:bodyPr/>
-          <a:lstStyle/>
-          <a:p>
+          <p:cNvPr id="2" name="Rectangle 1"/>
+          <p:cNvSpPr/>
+          <p:nvPr/>
+        </p:nvSpPr>
+        <p:spPr>
+          <a:xfrm>
+            <a:off x="0" y="0"/>
+            <a:ext cx="12191695" cy="658368"/>
+          </a:xfrm>
+          <a:prstGeom prst="rect">
+            <a:avLst/>
+          </a:prstGeom>
+          <a:solidFill>
+            <a:srgbClr val="0B1F3B"/>
+          </a:solidFill>
+          <a:ln>
+            <a:noFill/>
+          </a:ln>
+        </p:spPr>
+        <p:style>
+          <a:lnRef idx="1">
+            <a:schemeClr val="accent1"/>
+          </a:lnRef>
+          <a:fillRef idx="3">
+            <a:schemeClr val="accent1"/>
+          </a:fillRef>
+          <a:effectRef idx="2">
+            <a:schemeClr val="accent1"/>
+          </a:effectRef>
+          <a:fontRef idx="minor">
+            <a:schemeClr val="lt1"/>
+          </a:fontRef>
+        </p:style>
+        <p:txBody>
+          <a:bodyPr rtlCol="0" anchor="ctr"/>
+          <a:lstStyle/>
+          <a:p>
+            <a:pPr algn="ctr"/>
+          </a:p>
+        </p:txBody>
+      </p:sp>
+      <p:sp>
+        <p:nvSpPr>
+          <p:cNvPr id="3" name="Rectangle 2"/>
+          <p:cNvSpPr/>
+          <p:nvPr/>
+        </p:nvSpPr>
+        <p:spPr>
+          <a:xfrm>
+            <a:off x="0" y="603504"/>
+            <a:ext cx="12191695" cy="54864"/>
+          </a:xfrm>
+          <a:prstGeom prst="rect">
+            <a:avLst/>
+          </a:prstGeom>
+          <a:solidFill>
+            <a:srgbClr val="1AA6B7"/>
+          </a:solidFill>
+          <a:ln>
+            <a:noFill/>
+          </a:ln>
+        </p:spPr>
+        <p:style>
+          <a:lnRef idx="1">
+            <a:schemeClr val="accent1"/>
+          </a:lnRef>
+          <a:fillRef idx="3">
+            <a:schemeClr val="accent1"/>
+          </a:fillRef>
+          <a:effectRef idx="2">
+            <a:schemeClr val="accent1"/>
+          </a:effectRef>
+          <a:fontRef idx="minor">
+            <a:schemeClr val="lt1"/>
+          </a:fontRef>
+        </p:style>
+        <p:txBody>
+          <a:bodyPr rtlCol="0" anchor="ctr"/>
+          <a:lstStyle/>
+          <a:p>
+            <a:pPr algn="ctr"/>
+          </a:p>
+        </p:txBody>
+      </p:sp>
+      <p:sp>
+        <p:nvSpPr>
+          <p:cNvPr id="4" name="TextBox 3"/>
+          <p:cNvSpPr txBox="1"/>
+          <p:nvPr/>
+        </p:nvSpPr>
+        <p:spPr>
+          <a:xfrm>
+            <a:off x="685800" y="128016"/>
+            <a:ext cx="10820095" cy="457200"/>
+          </a:xfrm>
+          <a:prstGeom prst="rect">
+            <a:avLst/>
+          </a:prstGeom>
+          <a:noFill/>
+        </p:spPr>
+        <p:txBody>
+          <a:bodyPr wrap="none">
+            <a:spAutoFit/>
+          </a:bodyPr>
+          <a:lstStyle/>
+          <a:p>
+            <a:pPr>
+              <a:defRPr sz="2200" b="1">
+                <a:solidFill>
+                  <a:srgbClr val="FFFFFF"/>
+                </a:solidFill>
+              </a:defRPr>
+            </a:pPr>
             <a:r>
               <a:t>Conclusion</a:t>
             </a:r>
@@ -4053,96 +6548,316 @@
       </p:sp>
       <p:sp>
         <p:nvSpPr>
-          <p:cNvPr id="3" name="Content Placeholder 2"/>
-          <p:cNvSpPr>
-            <a:spLocks noGrp="1"/>
-          </p:cNvSpPr>
-          <p:nvPr>
-            <p:ph idx="1"/>
-          </p:nvPr>
-        </p:nvSpPr>
-        <p:spPr/>
-        <p:txBody>
-          <a:bodyPr wrap="square"/>
+          <p:cNvPr id="5" name="TextBox 4"/>
+          <p:cNvSpPr txBox="1"/>
+          <p:nvPr/>
+        </p:nvSpPr>
+        <p:spPr>
+          <a:xfrm>
+            <a:off x="685800" y="420624"/>
+            <a:ext cx="10820095" cy="274320"/>
+          </a:xfrm>
+          <a:prstGeom prst="rect">
+            <a:avLst/>
+          </a:prstGeom>
+          <a:noFill/>
+        </p:spPr>
+        <p:txBody>
+          <a:bodyPr wrap="none">
+            <a:spAutoFit/>
+          </a:bodyPr>
+          <a:lstStyle/>
+          <a:p>
+            <a:pPr>
+              <a:defRPr sz="1200">
+                <a:solidFill>
+                  <a:srgbClr val="1AA6B7"/>
+                </a:solidFill>
+              </a:defRPr>
+            </a:pPr>
+            <a:r>
+              <a:t>Wrap-up</a:t>
+            </a:r>
+          </a:p>
+        </p:txBody>
+      </p:sp>
+      <p:sp>
+        <p:nvSpPr>
+          <p:cNvPr id="6" name="Rounded Rectangle 5"/>
+          <p:cNvSpPr/>
+          <p:nvPr/>
+        </p:nvSpPr>
+        <p:spPr>
+          <a:xfrm>
+            <a:off x="685800" y="978408"/>
+            <a:ext cx="10820095" cy="5376672"/>
+          </a:xfrm>
+          <a:prstGeom prst="roundRect">
+            <a:avLst/>
+          </a:prstGeom>
+          <a:solidFill>
+            <a:srgbClr val="FFFFFF"/>
+          </a:solidFill>
+          <a:ln>
+            <a:solidFill>
+              <a:srgbClr val="E5E7EB"/>
+            </a:solidFill>
+          </a:ln>
+        </p:spPr>
+        <p:style>
+          <a:lnRef idx="1">
+            <a:schemeClr val="accent1"/>
+          </a:lnRef>
+          <a:fillRef idx="3">
+            <a:schemeClr val="accent1"/>
+          </a:fillRef>
+          <a:effectRef idx="2">
+            <a:schemeClr val="accent1"/>
+          </a:effectRef>
+          <a:fontRef idx="minor">
+            <a:schemeClr val="lt1"/>
+          </a:fontRef>
+        </p:style>
+        <p:txBody>
+          <a:bodyPr rtlCol="0" anchor="ctr"/>
+          <a:lstStyle/>
+          <a:p>
+            <a:pPr algn="ctr"/>
+          </a:p>
+        </p:txBody>
+      </p:sp>
+      <p:sp>
+        <p:nvSpPr>
+          <p:cNvPr id="7" name="TextBox 6"/>
+          <p:cNvSpPr txBox="1"/>
+          <p:nvPr/>
+        </p:nvSpPr>
+        <p:spPr>
+          <a:xfrm>
+            <a:off x="1005840" y="1207008"/>
+            <a:ext cx="10180015" cy="4919472"/>
+          </a:xfrm>
+          <a:prstGeom prst="rect">
+            <a:avLst/>
+          </a:prstGeom>
+          <a:noFill/>
+        </p:spPr>
+        <p:txBody>
+          <a:bodyPr wrap="square">
+            <a:spAutoFit/>
+          </a:bodyPr>
           <a:lstStyle/>
           <a:p>
             <a:pPr>
               <a:spcAft>
-                <a:spcPts val="200"/>
+                <a:spcPts val="600"/>
               </a:spcAft>
-              <a:defRPr sz="2000">
-                <a:solidFill>
-                  <a:srgbClr val="111111"/>
-                </a:solidFill>
-              </a:defRPr>
-            </a:pPr>
-            <a:r>
-              <a:rPr sz="2000" i="0"/>
+              <a:defRPr sz="1900">
+                <a:solidFill>
+                  <a:srgbClr val="111827"/>
+                </a:solidFill>
+              </a:defRPr>
+            </a:pPr>
+            <a:r>
+              <a:rPr sz="1900" i="0">
+                <a:solidFill>
+                  <a:srgbClr val="111827"/>
+                </a:solidFill>
+              </a:rPr>
               <a:t>Built an interactive GNSS fix analysis tool (Leaflet map + D3 chart) for visual exploration.</a:t>
             </a:r>
           </a:p>
           <a:p>
             <a:pPr>
               <a:spcAft>
-                <a:spcPts val="200"/>
+                <a:spcPts val="600"/>
               </a:spcAft>
-              <a:defRPr sz="2000">
-                <a:solidFill>
-                  <a:srgbClr val="111111"/>
-                </a:solidFill>
-              </a:defRPr>
-            </a:pPr>
-            <a:r>
-              <a:rPr sz="2000" i="0"/>
+              <a:defRPr sz="1900">
+                <a:solidFill>
+                  <a:srgbClr val="111827"/>
+                </a:solidFill>
+              </a:defRPr>
+            </a:pPr>
+            <a:r>
+              <a:rPr sz="1900" i="0">
+                <a:solidFill>
+                  <a:srgbClr val="111827"/>
+                </a:solidFill>
+              </a:rPr>
               <a:t>Parsed and cleaned Android GNSS Logger Fix records; computed derived metrics (distance-from-first, deltas).</a:t>
             </a:r>
           </a:p>
           <a:p>
             <a:pPr>
               <a:spcAft>
-                <a:spcPts val="200"/>
+                <a:spcPts val="600"/>
               </a:spcAft>
-              <a:defRPr sz="2000">
-                <a:solidFill>
-                  <a:srgbClr val="111111"/>
-                </a:solidFill>
-              </a:defRPr>
-            </a:pPr>
-            <a:r>
-              <a:rPr sz="2000" i="0"/>
+              <a:defRPr sz="1900">
+                <a:solidFill>
+                  <a:srgbClr val="111827"/>
+                </a:solidFill>
+              </a:defRPr>
+            </a:pPr>
+            <a:r>
+              <a:rPr sz="1900" i="0">
+                <a:solidFill>
+                  <a:srgbClr val="111827"/>
+                </a:solidFill>
+              </a:rPr>
               <a:t>Provided multiple perspectives: point view, density/heatmaps, and uncertainty rings.</a:t>
             </a:r>
           </a:p>
           <a:p>
             <a:pPr>
               <a:spcAft>
-                <a:spcPts val="200"/>
+                <a:spcPts val="600"/>
               </a:spcAft>
-              <a:defRPr sz="2000">
-                <a:solidFill>
-                  <a:srgbClr val="111111"/>
-                </a:solidFill>
-              </a:defRPr>
-            </a:pPr>
-            <a:r>
-              <a:rPr sz="2000" i="0"/>
+              <a:defRPr sz="1900">
+                <a:solidFill>
+                  <a:srgbClr val="111827"/>
+                </a:solidFill>
+              </a:defRPr>
+            </a:pPr>
+            <a:r>
+              <a:rPr sz="1900" i="0">
+                <a:solidFill>
+                  <a:srgbClr val="111827"/>
+                </a:solidFill>
+              </a:rPr>
               <a:t>Enabled reference-based evaluation using OSM track comparison (nearest-neighbor + cross-track deviation).</a:t>
             </a:r>
           </a:p>
           <a:p>
             <a:pPr>
               <a:spcAft>
-                <a:spcPts val="200"/>
+                <a:spcPts val="600"/>
               </a:spcAft>
-              <a:defRPr sz="2000">
-                <a:solidFill>
-                  <a:srgbClr val="111111"/>
-                </a:solidFill>
-              </a:defRPr>
-            </a:pPr>
-            <a:r>
-              <a:rPr sz="2000" i="0"/>
+              <a:defRPr sz="1900">
+                <a:solidFill>
+                  <a:srgbClr val="111827"/>
+                </a:solidFill>
+              </a:defRPr>
+            </a:pPr>
+            <a:r>
+              <a:rPr sz="1900" i="0">
+                <a:solidFill>
+                  <a:srgbClr val="111827"/>
+                </a:solidFill>
+              </a:rPr>
               <a:t>Improved interpretability of accuracy, drift, and route-level behavior through linked interactions (hover/click).</a:t>
+            </a:r>
+          </a:p>
+        </p:txBody>
+      </p:sp>
+      <p:sp>
+        <p:nvSpPr>
+          <p:cNvPr id="8" name="Rectangle 7"/>
+          <p:cNvSpPr/>
+          <p:nvPr/>
+        </p:nvSpPr>
+        <p:spPr>
+          <a:xfrm>
+            <a:off x="0" y="6537960"/>
+            <a:ext cx="12191695" cy="18288"/>
+          </a:xfrm>
+          <a:prstGeom prst="rect">
+            <a:avLst/>
+          </a:prstGeom>
+          <a:solidFill>
+            <a:srgbClr val="E5E7EB"/>
+          </a:solidFill>
+          <a:ln>
+            <a:noFill/>
+          </a:ln>
+        </p:spPr>
+        <p:style>
+          <a:lnRef idx="1">
+            <a:schemeClr val="accent1"/>
+          </a:lnRef>
+          <a:fillRef idx="3">
+            <a:schemeClr val="accent1"/>
+          </a:fillRef>
+          <a:effectRef idx="2">
+            <a:schemeClr val="accent1"/>
+          </a:effectRef>
+          <a:fontRef idx="minor">
+            <a:schemeClr val="lt1"/>
+          </a:fontRef>
+        </p:style>
+        <p:txBody>
+          <a:bodyPr rtlCol="0" anchor="ctr"/>
+          <a:lstStyle/>
+          <a:p>
+            <a:pPr algn="ctr"/>
+          </a:p>
+        </p:txBody>
+      </p:sp>
+      <p:sp>
+        <p:nvSpPr>
+          <p:cNvPr id="9" name="TextBox 8"/>
+          <p:cNvSpPr txBox="1"/>
+          <p:nvPr/>
+        </p:nvSpPr>
+        <p:spPr>
+          <a:xfrm>
+            <a:off x="685800" y="6583680"/>
+            <a:ext cx="7315200" cy="228600"/>
+          </a:xfrm>
+          <a:prstGeom prst="rect">
+            <a:avLst/>
+          </a:prstGeom>
+          <a:noFill/>
+        </p:spPr>
+        <p:txBody>
+          <a:bodyPr wrap="none">
+            <a:spAutoFit/>
+          </a:bodyPr>
+          <a:lstStyle/>
+          <a:p>
+            <a:pPr>
+              <a:defRPr sz="1000">
+                <a:solidFill>
+                  <a:srgbClr val="6B7280"/>
+                </a:solidFill>
+              </a:defRPr>
+            </a:pPr>
+            <a:r>
+              <a:t>Project #543 — Visualizing Spatio-Temporal Uncertainty</a:t>
+            </a:r>
+          </a:p>
+        </p:txBody>
+      </p:sp>
+      <p:sp>
+        <p:nvSpPr>
+          <p:cNvPr id="10" name="TextBox 9"/>
+          <p:cNvSpPr txBox="1"/>
+          <p:nvPr/>
+        </p:nvSpPr>
+        <p:spPr>
+          <a:xfrm>
+            <a:off x="9494215" y="6583680"/>
+            <a:ext cx="2011680" cy="228600"/>
+          </a:xfrm>
+          <a:prstGeom prst="rect">
+            <a:avLst/>
+          </a:prstGeom>
+          <a:noFill/>
+        </p:spPr>
+        <p:txBody>
+          <a:bodyPr wrap="none">
+            <a:spAutoFit/>
+          </a:bodyPr>
+          <a:lstStyle/>
+          <a:p>
+            <a:pPr algn="r">
+              <a:defRPr sz="1000">
+                <a:solidFill>
+                  <a:srgbClr val="6B7280"/>
+                </a:solidFill>
+              </a:defRPr>
+            </a:pPr>
+            <a:r>
+              <a:t>17/19</a:t>
             </a:r>
           </a:p>
         </p:txBody>
@@ -4158,6 +6873,14 @@
 <file path=ppt/slides/slide18.xml><?xml version="1.0" encoding="utf-8"?>
 <p:sld xmlns:a="http://schemas.openxmlformats.org/drawingml/2006/main" xmlns:p="http://schemas.openxmlformats.org/presentationml/2006/main" xmlns:r="http://schemas.openxmlformats.org/officeDocument/2006/relationships">
   <p:cSld>
+    <p:bg>
+      <p:bgPr>
+        <a:solidFill>
+          <a:srgbClr val="F7F8FA"/>
+        </a:solidFill>
+        <a:effectLst/>
+      </p:bgPr>
+    </p:bg>
     <p:spTree>
       <p:nvGrpSpPr>
         <p:cNvPr id="1" name=""/>
@@ -4167,19 +6890,119 @@
       <p:grpSpPr/>
       <p:sp>
         <p:nvSpPr>
-          <p:cNvPr id="2" name="Title 1"/>
-          <p:cNvSpPr>
-            <a:spLocks noGrp="1"/>
-          </p:cNvSpPr>
-          <p:nvPr>
-            <p:ph type="title"/>
-          </p:nvPr>
-        </p:nvSpPr>
-        <p:spPr/>
-        <p:txBody>
-          <a:bodyPr/>
-          <a:lstStyle/>
-          <a:p>
+          <p:cNvPr id="2" name="Rectangle 1"/>
+          <p:cNvSpPr/>
+          <p:nvPr/>
+        </p:nvSpPr>
+        <p:spPr>
+          <a:xfrm>
+            <a:off x="0" y="0"/>
+            <a:ext cx="12191695" cy="658368"/>
+          </a:xfrm>
+          <a:prstGeom prst="rect">
+            <a:avLst/>
+          </a:prstGeom>
+          <a:solidFill>
+            <a:srgbClr val="0B1F3B"/>
+          </a:solidFill>
+          <a:ln>
+            <a:noFill/>
+          </a:ln>
+        </p:spPr>
+        <p:style>
+          <a:lnRef idx="1">
+            <a:schemeClr val="accent1"/>
+          </a:lnRef>
+          <a:fillRef idx="3">
+            <a:schemeClr val="accent1"/>
+          </a:fillRef>
+          <a:effectRef idx="2">
+            <a:schemeClr val="accent1"/>
+          </a:effectRef>
+          <a:fontRef idx="minor">
+            <a:schemeClr val="lt1"/>
+          </a:fontRef>
+        </p:style>
+        <p:txBody>
+          <a:bodyPr rtlCol="0" anchor="ctr"/>
+          <a:lstStyle/>
+          <a:p>
+            <a:pPr algn="ctr"/>
+          </a:p>
+        </p:txBody>
+      </p:sp>
+      <p:sp>
+        <p:nvSpPr>
+          <p:cNvPr id="3" name="Rectangle 2"/>
+          <p:cNvSpPr/>
+          <p:nvPr/>
+        </p:nvSpPr>
+        <p:spPr>
+          <a:xfrm>
+            <a:off x="0" y="603504"/>
+            <a:ext cx="12191695" cy="54864"/>
+          </a:xfrm>
+          <a:prstGeom prst="rect">
+            <a:avLst/>
+          </a:prstGeom>
+          <a:solidFill>
+            <a:srgbClr val="1AA6B7"/>
+          </a:solidFill>
+          <a:ln>
+            <a:noFill/>
+          </a:ln>
+        </p:spPr>
+        <p:style>
+          <a:lnRef idx="1">
+            <a:schemeClr val="accent1"/>
+          </a:lnRef>
+          <a:fillRef idx="3">
+            <a:schemeClr val="accent1"/>
+          </a:fillRef>
+          <a:effectRef idx="2">
+            <a:schemeClr val="accent1"/>
+          </a:effectRef>
+          <a:fontRef idx="minor">
+            <a:schemeClr val="lt1"/>
+          </a:fontRef>
+        </p:style>
+        <p:txBody>
+          <a:bodyPr rtlCol="0" anchor="ctr"/>
+          <a:lstStyle/>
+          <a:p>
+            <a:pPr algn="ctr"/>
+          </a:p>
+        </p:txBody>
+      </p:sp>
+      <p:sp>
+        <p:nvSpPr>
+          <p:cNvPr id="4" name="TextBox 3"/>
+          <p:cNvSpPr txBox="1"/>
+          <p:nvPr/>
+        </p:nvSpPr>
+        <p:spPr>
+          <a:xfrm>
+            <a:off x="685800" y="128016"/>
+            <a:ext cx="10820095" cy="457200"/>
+          </a:xfrm>
+          <a:prstGeom prst="rect">
+            <a:avLst/>
+          </a:prstGeom>
+          <a:noFill/>
+        </p:spPr>
+        <p:txBody>
+          <a:bodyPr wrap="none">
+            <a:spAutoFit/>
+          </a:bodyPr>
+          <a:lstStyle/>
+          <a:p>
+            <a:pPr>
+              <a:defRPr sz="2200" b="1">
+                <a:solidFill>
+                  <a:srgbClr val="FFFFFF"/>
+                </a:solidFill>
+              </a:defRPr>
+            </a:pPr>
             <a:r>
               <a:t>Future Work</a:t>
             </a:r>
@@ -4188,96 +7011,316 @@
       </p:sp>
       <p:sp>
         <p:nvSpPr>
-          <p:cNvPr id="3" name="Content Placeholder 2"/>
-          <p:cNvSpPr>
-            <a:spLocks noGrp="1"/>
-          </p:cNvSpPr>
-          <p:nvPr>
-            <p:ph idx="1"/>
-          </p:nvPr>
-        </p:nvSpPr>
-        <p:spPr/>
-        <p:txBody>
-          <a:bodyPr wrap="square"/>
+          <p:cNvPr id="5" name="TextBox 4"/>
+          <p:cNvSpPr txBox="1"/>
+          <p:nvPr/>
+        </p:nvSpPr>
+        <p:spPr>
+          <a:xfrm>
+            <a:off x="685800" y="420624"/>
+            <a:ext cx="10820095" cy="274320"/>
+          </a:xfrm>
+          <a:prstGeom prst="rect">
+            <a:avLst/>
+          </a:prstGeom>
+          <a:noFill/>
+        </p:spPr>
+        <p:txBody>
+          <a:bodyPr wrap="none">
+            <a:spAutoFit/>
+          </a:bodyPr>
+          <a:lstStyle/>
+          <a:p>
+            <a:pPr>
+              <a:defRPr sz="1200">
+                <a:solidFill>
+                  <a:srgbClr val="1AA6B7"/>
+                </a:solidFill>
+              </a:defRPr>
+            </a:pPr>
+            <a:r>
+              <a:t>Wrap-up</a:t>
+            </a:r>
+          </a:p>
+        </p:txBody>
+      </p:sp>
+      <p:sp>
+        <p:nvSpPr>
+          <p:cNvPr id="6" name="Rounded Rectangle 5"/>
+          <p:cNvSpPr/>
+          <p:nvPr/>
+        </p:nvSpPr>
+        <p:spPr>
+          <a:xfrm>
+            <a:off x="685800" y="978408"/>
+            <a:ext cx="10820095" cy="5376672"/>
+          </a:xfrm>
+          <a:prstGeom prst="roundRect">
+            <a:avLst/>
+          </a:prstGeom>
+          <a:solidFill>
+            <a:srgbClr val="FFFFFF"/>
+          </a:solidFill>
+          <a:ln>
+            <a:solidFill>
+              <a:srgbClr val="E5E7EB"/>
+            </a:solidFill>
+          </a:ln>
+        </p:spPr>
+        <p:style>
+          <a:lnRef idx="1">
+            <a:schemeClr val="accent1"/>
+          </a:lnRef>
+          <a:fillRef idx="3">
+            <a:schemeClr val="accent1"/>
+          </a:fillRef>
+          <a:effectRef idx="2">
+            <a:schemeClr val="accent1"/>
+          </a:effectRef>
+          <a:fontRef idx="minor">
+            <a:schemeClr val="lt1"/>
+          </a:fontRef>
+        </p:style>
+        <p:txBody>
+          <a:bodyPr rtlCol="0" anchor="ctr"/>
+          <a:lstStyle/>
+          <a:p>
+            <a:pPr algn="ctr"/>
+          </a:p>
+        </p:txBody>
+      </p:sp>
+      <p:sp>
+        <p:nvSpPr>
+          <p:cNvPr id="7" name="TextBox 6"/>
+          <p:cNvSpPr txBox="1"/>
+          <p:nvPr/>
+        </p:nvSpPr>
+        <p:spPr>
+          <a:xfrm>
+            <a:off x="1005840" y="1207008"/>
+            <a:ext cx="10180015" cy="4919472"/>
+          </a:xfrm>
+          <a:prstGeom prst="rect">
+            <a:avLst/>
+          </a:prstGeom>
+          <a:noFill/>
+        </p:spPr>
+        <p:txBody>
+          <a:bodyPr wrap="square">
+            <a:spAutoFit/>
+          </a:bodyPr>
           <a:lstStyle/>
           <a:p>
             <a:pPr>
               <a:spcAft>
-                <a:spcPts val="200"/>
+                <a:spcPts val="600"/>
               </a:spcAft>
-              <a:defRPr sz="2000">
-                <a:solidFill>
-                  <a:srgbClr val="111111"/>
-                </a:solidFill>
-              </a:defRPr>
-            </a:pPr>
-            <a:r>
-              <a:rPr sz="2000" i="0"/>
+              <a:defRPr sz="1900">
+                <a:solidFill>
+                  <a:srgbClr val="111827"/>
+                </a:solidFill>
+              </a:defRPr>
+            </a:pPr>
+            <a:r>
+              <a:rPr sz="1900" i="0">
+                <a:solidFill>
+                  <a:srgbClr val="111827"/>
+                </a:solidFill>
+              </a:rPr>
               <a:t>Large-scale validation on dense, high-frequency, long-duration datasets (city-scale, many tracks).</a:t>
             </a:r>
           </a:p>
           <a:p>
             <a:pPr>
               <a:spcAft>
-                <a:spcPts val="200"/>
+                <a:spcPts val="600"/>
               </a:spcAft>
-              <a:defRPr sz="2000">
-                <a:solidFill>
-                  <a:srgbClr val="111111"/>
-                </a:solidFill>
-              </a:defRPr>
-            </a:pPr>
-            <a:r>
-              <a:rPr sz="2000" i="0"/>
+              <a:defRPr sz="1900">
+                <a:solidFill>
+                  <a:srgbClr val="111827"/>
+                </a:solidFill>
+              </a:defRPr>
+            </a:pPr>
+            <a:r>
+              <a:rPr sz="1900" i="0">
+                <a:solidFill>
+                  <a:srgbClr val="111827"/>
+                </a:solidFill>
+              </a:rPr>
               <a:t>Performance: mitigate browser memory pressure and UI lag (many markers / heavy heat computations).</a:t>
             </a:r>
           </a:p>
           <a:p>
             <a:pPr>
               <a:spcAft>
-                <a:spcPts val="200"/>
+                <a:spcPts val="600"/>
               </a:spcAft>
-              <a:defRPr sz="2000">
-                <a:solidFill>
-                  <a:srgbClr val="111111"/>
-                </a:solidFill>
-              </a:defRPr>
-            </a:pPr>
-            <a:r>
-              <a:rPr sz="2000" i="0"/>
+              <a:defRPr sz="1900">
+                <a:solidFill>
+                  <a:srgbClr val="111827"/>
+                </a:solidFill>
+              </a:defRPr>
+            </a:pPr>
+            <a:r>
+              <a:rPr sz="1900" i="0">
+                <a:solidFill>
+                  <a:srgbClr val="111827"/>
+                </a:solidFill>
+              </a:rPr>
               <a:t>Visualization scaling: address overplotting, zoom-dependent density bias, and detail loss (clustering/tiling).</a:t>
             </a:r>
           </a:p>
           <a:p>
             <a:pPr>
               <a:spcAft>
-                <a:spcPts val="200"/>
+                <a:spcPts val="600"/>
               </a:spcAft>
-              <a:defRPr sz="2000">
-                <a:solidFill>
-                  <a:srgbClr val="111111"/>
-                </a:solidFill>
-              </a:defRPr>
-            </a:pPr>
-            <a:r>
-              <a:rPr sz="2000" i="0"/>
+              <a:defRPr sz="1900">
+                <a:solidFill>
+                  <a:srgbClr val="111827"/>
+                </a:solidFill>
+              </a:defRPr>
+            </a:pPr>
+            <a:r>
+              <a:rPr sz="1900" i="0">
+                <a:solidFill>
+                  <a:srgbClr val="111827"/>
+                </a:solidFill>
+              </a:rPr>
               <a:t>Data quality: handle time misalignment, outliers/multipath effects, and missing accuracy fields robustly.</a:t>
             </a:r>
           </a:p>
           <a:p>
             <a:pPr>
               <a:spcAft>
-                <a:spcPts val="200"/>
+                <a:spcPts val="600"/>
               </a:spcAft>
-              <a:defRPr sz="2000">
-                <a:solidFill>
-                  <a:srgbClr val="111111"/>
-                </a:solidFill>
-              </a:defRPr>
-            </a:pPr>
-            <a:r>
-              <a:rPr sz="2000" i="0"/>
+              <a:defRPr sz="1900">
+                <a:solidFill>
+                  <a:srgbClr val="111827"/>
+                </a:solidFill>
+              </a:defRPr>
+            </a:pPr>
+            <a:r>
+              <a:rPr sz="1900" i="0">
+                <a:solidFill>
+                  <a:srgbClr val="111827"/>
+                </a:solidFill>
+              </a:rPr>
               <a:t>Next steps: spatial indexing (grid/k-d tree), vector tiling, incremental/streamed loading, and outlier filtering.</a:t>
+            </a:r>
+          </a:p>
+        </p:txBody>
+      </p:sp>
+      <p:sp>
+        <p:nvSpPr>
+          <p:cNvPr id="8" name="Rectangle 7"/>
+          <p:cNvSpPr/>
+          <p:nvPr/>
+        </p:nvSpPr>
+        <p:spPr>
+          <a:xfrm>
+            <a:off x="0" y="6537960"/>
+            <a:ext cx="12191695" cy="18288"/>
+          </a:xfrm>
+          <a:prstGeom prst="rect">
+            <a:avLst/>
+          </a:prstGeom>
+          <a:solidFill>
+            <a:srgbClr val="E5E7EB"/>
+          </a:solidFill>
+          <a:ln>
+            <a:noFill/>
+          </a:ln>
+        </p:spPr>
+        <p:style>
+          <a:lnRef idx="1">
+            <a:schemeClr val="accent1"/>
+          </a:lnRef>
+          <a:fillRef idx="3">
+            <a:schemeClr val="accent1"/>
+          </a:fillRef>
+          <a:effectRef idx="2">
+            <a:schemeClr val="accent1"/>
+          </a:effectRef>
+          <a:fontRef idx="minor">
+            <a:schemeClr val="lt1"/>
+          </a:fontRef>
+        </p:style>
+        <p:txBody>
+          <a:bodyPr rtlCol="0" anchor="ctr"/>
+          <a:lstStyle/>
+          <a:p>
+            <a:pPr algn="ctr"/>
+          </a:p>
+        </p:txBody>
+      </p:sp>
+      <p:sp>
+        <p:nvSpPr>
+          <p:cNvPr id="9" name="TextBox 8"/>
+          <p:cNvSpPr txBox="1"/>
+          <p:nvPr/>
+        </p:nvSpPr>
+        <p:spPr>
+          <a:xfrm>
+            <a:off x="685800" y="6583680"/>
+            <a:ext cx="7315200" cy="228600"/>
+          </a:xfrm>
+          <a:prstGeom prst="rect">
+            <a:avLst/>
+          </a:prstGeom>
+          <a:noFill/>
+        </p:spPr>
+        <p:txBody>
+          <a:bodyPr wrap="none">
+            <a:spAutoFit/>
+          </a:bodyPr>
+          <a:lstStyle/>
+          <a:p>
+            <a:pPr>
+              <a:defRPr sz="1000">
+                <a:solidFill>
+                  <a:srgbClr val="6B7280"/>
+                </a:solidFill>
+              </a:defRPr>
+            </a:pPr>
+            <a:r>
+              <a:t>Project #543 — Visualizing Spatio-Temporal Uncertainty</a:t>
+            </a:r>
+          </a:p>
+        </p:txBody>
+      </p:sp>
+      <p:sp>
+        <p:nvSpPr>
+          <p:cNvPr id="10" name="TextBox 9"/>
+          <p:cNvSpPr txBox="1"/>
+          <p:nvPr/>
+        </p:nvSpPr>
+        <p:spPr>
+          <a:xfrm>
+            <a:off x="9494215" y="6583680"/>
+            <a:ext cx="2011680" cy="228600"/>
+          </a:xfrm>
+          <a:prstGeom prst="rect">
+            <a:avLst/>
+          </a:prstGeom>
+          <a:noFill/>
+        </p:spPr>
+        <p:txBody>
+          <a:bodyPr wrap="none">
+            <a:spAutoFit/>
+          </a:bodyPr>
+          <a:lstStyle/>
+          <a:p>
+            <a:pPr algn="r">
+              <a:defRPr sz="1000">
+                <a:solidFill>
+                  <a:srgbClr val="6B7280"/>
+                </a:solidFill>
+              </a:defRPr>
+            </a:pPr>
+            <a:r>
+              <a:t>18/19</a:t>
             </a:r>
           </a:p>
         </p:txBody>
@@ -4293,6 +7336,14 @@
 <file path=ppt/slides/slide19.xml><?xml version="1.0" encoding="utf-8"?>
 <p:sld xmlns:a="http://schemas.openxmlformats.org/drawingml/2006/main" xmlns:p="http://schemas.openxmlformats.org/presentationml/2006/main" xmlns:r="http://schemas.openxmlformats.org/officeDocument/2006/relationships">
   <p:cSld>
+    <p:bg>
+      <p:bgPr>
+        <a:solidFill>
+          <a:srgbClr val="F7F8FA"/>
+        </a:solidFill>
+        <a:effectLst/>
+      </p:bgPr>
+    </p:bg>
     <p:spTree>
       <p:nvGrpSpPr>
         <p:cNvPr id="1" name=""/>
@@ -4302,14 +7353,100 @@
       <p:grpSpPr/>
       <p:sp>
         <p:nvSpPr>
-          <p:cNvPr id="2" name="TextBox 1"/>
+          <p:cNvPr id="2" name="Rectangle 1"/>
+          <p:cNvSpPr/>
+          <p:nvPr/>
+        </p:nvSpPr>
+        <p:spPr>
+          <a:xfrm>
+            <a:off x="0" y="0"/>
+            <a:ext cx="12191695" cy="658368"/>
+          </a:xfrm>
+          <a:prstGeom prst="rect">
+            <a:avLst/>
+          </a:prstGeom>
+          <a:solidFill>
+            <a:srgbClr val="0B1F3B"/>
+          </a:solidFill>
+          <a:ln>
+            <a:noFill/>
+          </a:ln>
+        </p:spPr>
+        <p:style>
+          <a:lnRef idx="1">
+            <a:schemeClr val="accent1"/>
+          </a:lnRef>
+          <a:fillRef idx="3">
+            <a:schemeClr val="accent1"/>
+          </a:fillRef>
+          <a:effectRef idx="2">
+            <a:schemeClr val="accent1"/>
+          </a:effectRef>
+          <a:fontRef idx="minor">
+            <a:schemeClr val="lt1"/>
+          </a:fontRef>
+        </p:style>
+        <p:txBody>
+          <a:bodyPr rtlCol="0" anchor="ctr"/>
+          <a:lstStyle/>
+          <a:p>
+            <a:pPr algn="ctr"/>
+          </a:p>
+        </p:txBody>
+      </p:sp>
+      <p:sp>
+        <p:nvSpPr>
+          <p:cNvPr id="3" name="Rectangle 2"/>
+          <p:cNvSpPr/>
+          <p:nvPr/>
+        </p:nvSpPr>
+        <p:spPr>
+          <a:xfrm>
+            <a:off x="0" y="603504"/>
+            <a:ext cx="12191695" cy="54864"/>
+          </a:xfrm>
+          <a:prstGeom prst="rect">
+            <a:avLst/>
+          </a:prstGeom>
+          <a:solidFill>
+            <a:srgbClr val="1AA6B7"/>
+          </a:solidFill>
+          <a:ln>
+            <a:noFill/>
+          </a:ln>
+        </p:spPr>
+        <p:style>
+          <a:lnRef idx="1">
+            <a:schemeClr val="accent1"/>
+          </a:lnRef>
+          <a:fillRef idx="3">
+            <a:schemeClr val="accent1"/>
+          </a:fillRef>
+          <a:effectRef idx="2">
+            <a:schemeClr val="accent1"/>
+          </a:effectRef>
+          <a:fontRef idx="minor">
+            <a:schemeClr val="lt1"/>
+          </a:fontRef>
+        </p:style>
+        <p:txBody>
+          <a:bodyPr rtlCol="0" anchor="ctr"/>
+          <a:lstStyle/>
+          <a:p>
+            <a:pPr algn="ctr"/>
+          </a:p>
+        </p:txBody>
+      </p:sp>
+      <p:sp>
+        <p:nvSpPr>
+          <p:cNvPr id="4" name="TextBox 3"/>
           <p:cNvSpPr txBox="1"/>
           <p:nvPr/>
         </p:nvSpPr>
         <p:spPr>
           <a:xfrm>
-            <a:off x="457200" y="2377440"/>
-            <a:ext cx="11247120" cy="1280160"/>
+            <a:off x="685800" y="128016"/>
+            <a:ext cx="10820095" cy="457200"/>
           </a:xfrm>
           <a:prstGeom prst="rect">
             <a:avLst/>
@@ -4322,11 +7459,198 @@
           </a:bodyPr>
           <a:lstStyle/>
           <a:p>
+            <a:pPr>
+              <a:defRPr sz="2200" b="1">
+                <a:solidFill>
+                  <a:srgbClr val="FFFFFF"/>
+                </a:solidFill>
+              </a:defRPr>
+            </a:pPr>
+            <a:r>
+              <a:t>Thank you</a:t>
+            </a:r>
+          </a:p>
+        </p:txBody>
+      </p:sp>
+      <p:sp>
+        <p:nvSpPr>
+          <p:cNvPr id="5" name="TextBox 4"/>
+          <p:cNvSpPr txBox="1"/>
+          <p:nvPr/>
+        </p:nvSpPr>
+        <p:spPr>
+          <a:xfrm>
+            <a:off x="685800" y="420624"/>
+            <a:ext cx="10820095" cy="274320"/>
+          </a:xfrm>
+          <a:prstGeom prst="rect">
+            <a:avLst/>
+          </a:prstGeom>
+          <a:noFill/>
+        </p:spPr>
+        <p:txBody>
+          <a:bodyPr wrap="none">
+            <a:spAutoFit/>
+          </a:bodyPr>
+          <a:lstStyle/>
+          <a:p>
+            <a:pPr>
+              <a:defRPr sz="1200">
+                <a:solidFill>
+                  <a:srgbClr val="1AA6B7"/>
+                </a:solidFill>
+              </a:defRPr>
+            </a:pPr>
+            <a:r>
+              <a:t>Q&amp;A</a:t>
+            </a:r>
+          </a:p>
+        </p:txBody>
+      </p:sp>
+      <p:sp>
+        <p:nvSpPr>
+          <p:cNvPr id="6" name="TextBox 5"/>
+          <p:cNvSpPr txBox="1"/>
+          <p:nvPr/>
+        </p:nvSpPr>
+        <p:spPr>
+          <a:xfrm>
+            <a:off x="685800" y="2423160"/>
+            <a:ext cx="10820095" cy="1097280"/>
+          </a:xfrm>
+          <a:prstGeom prst="rect">
+            <a:avLst/>
+          </a:prstGeom>
+          <a:noFill/>
+        </p:spPr>
+        <p:txBody>
+          <a:bodyPr wrap="none">
+            <a:spAutoFit/>
+          </a:bodyPr>
+          <a:lstStyle/>
+          <a:p>
             <a:pPr algn="ctr">
-              <a:defRPr sz="5400" b="1"/>
+              <a:defRPr sz="5200" b="1">
+                <a:solidFill>
+                  <a:srgbClr val="0B1F3B"/>
+                </a:solidFill>
+              </a:defRPr>
             </a:pPr>
             <a:r>
               <a:t>Thank you.</a:t>
+            </a:r>
+          </a:p>
+        </p:txBody>
+      </p:sp>
+      <p:sp>
+        <p:nvSpPr>
+          <p:cNvPr id="7" name="Rectangle 6"/>
+          <p:cNvSpPr/>
+          <p:nvPr/>
+        </p:nvSpPr>
+        <p:spPr>
+          <a:xfrm>
+            <a:off x="0" y="6537960"/>
+            <a:ext cx="12191695" cy="18288"/>
+          </a:xfrm>
+          <a:prstGeom prst="rect">
+            <a:avLst/>
+          </a:prstGeom>
+          <a:solidFill>
+            <a:srgbClr val="E5E7EB"/>
+          </a:solidFill>
+          <a:ln>
+            <a:noFill/>
+          </a:ln>
+        </p:spPr>
+        <p:style>
+          <a:lnRef idx="1">
+            <a:schemeClr val="accent1"/>
+          </a:lnRef>
+          <a:fillRef idx="3">
+            <a:schemeClr val="accent1"/>
+          </a:fillRef>
+          <a:effectRef idx="2">
+            <a:schemeClr val="accent1"/>
+          </a:effectRef>
+          <a:fontRef idx="minor">
+            <a:schemeClr val="lt1"/>
+          </a:fontRef>
+        </p:style>
+        <p:txBody>
+          <a:bodyPr rtlCol="0" anchor="ctr"/>
+          <a:lstStyle/>
+          <a:p>
+            <a:pPr algn="ctr"/>
+          </a:p>
+        </p:txBody>
+      </p:sp>
+      <p:sp>
+        <p:nvSpPr>
+          <p:cNvPr id="8" name="TextBox 7"/>
+          <p:cNvSpPr txBox="1"/>
+          <p:nvPr/>
+        </p:nvSpPr>
+        <p:spPr>
+          <a:xfrm>
+            <a:off x="685800" y="6583680"/>
+            <a:ext cx="7315200" cy="228600"/>
+          </a:xfrm>
+          <a:prstGeom prst="rect">
+            <a:avLst/>
+          </a:prstGeom>
+          <a:noFill/>
+        </p:spPr>
+        <p:txBody>
+          <a:bodyPr wrap="none">
+            <a:spAutoFit/>
+          </a:bodyPr>
+          <a:lstStyle/>
+          <a:p>
+            <a:pPr>
+              <a:defRPr sz="1000">
+                <a:solidFill>
+                  <a:srgbClr val="6B7280"/>
+                </a:solidFill>
+              </a:defRPr>
+            </a:pPr>
+            <a:r>
+              <a:t>Project #543 — Visualizing Spatio-Temporal Uncertainty</a:t>
+            </a:r>
+          </a:p>
+        </p:txBody>
+      </p:sp>
+      <p:sp>
+        <p:nvSpPr>
+          <p:cNvPr id="9" name="TextBox 8"/>
+          <p:cNvSpPr txBox="1"/>
+          <p:nvPr/>
+        </p:nvSpPr>
+        <p:spPr>
+          <a:xfrm>
+            <a:off x="9494215" y="6583680"/>
+            <a:ext cx="2011680" cy="228600"/>
+          </a:xfrm>
+          <a:prstGeom prst="rect">
+            <a:avLst/>
+          </a:prstGeom>
+          <a:noFill/>
+        </p:spPr>
+        <p:txBody>
+          <a:bodyPr wrap="none">
+            <a:spAutoFit/>
+          </a:bodyPr>
+          <a:lstStyle/>
+          <a:p>
+            <a:pPr algn="r">
+              <a:defRPr sz="1000">
+                <a:solidFill>
+                  <a:srgbClr val="6B7280"/>
+                </a:solidFill>
+              </a:defRPr>
+            </a:pPr>
+            <a:r>
+              <a:t>19/19</a:t>
             </a:r>
           </a:p>
         </p:txBody>
@@ -4342,6 +7666,14 @@
 <file path=ppt/slides/slide2.xml><?xml version="1.0" encoding="utf-8"?>
 <p:sld xmlns:a="http://schemas.openxmlformats.org/drawingml/2006/main" xmlns:p="http://schemas.openxmlformats.org/presentationml/2006/main" xmlns:r="http://schemas.openxmlformats.org/officeDocument/2006/relationships">
   <p:cSld>
+    <p:bg>
+      <p:bgPr>
+        <a:solidFill>
+          <a:srgbClr val="F7F8FA"/>
+        </a:solidFill>
+        <a:effectLst/>
+      </p:bgPr>
+    </p:bg>
     <p:spTree>
       <p:nvGrpSpPr>
         <p:cNvPr id="1" name=""/>
@@ -4351,19 +7683,119 @@
       <p:grpSpPr/>
       <p:sp>
         <p:nvSpPr>
-          <p:cNvPr id="2" name="Title 1"/>
-          <p:cNvSpPr>
-            <a:spLocks noGrp="1"/>
-          </p:cNvSpPr>
-          <p:nvPr>
-            <p:ph type="title"/>
-          </p:nvPr>
-        </p:nvSpPr>
-        <p:spPr/>
-        <p:txBody>
-          <a:bodyPr/>
-          <a:lstStyle/>
-          <a:p>
+          <p:cNvPr id="2" name="Rectangle 1"/>
+          <p:cNvSpPr/>
+          <p:nvPr/>
+        </p:nvSpPr>
+        <p:spPr>
+          <a:xfrm>
+            <a:off x="0" y="0"/>
+            <a:ext cx="12191695" cy="658368"/>
+          </a:xfrm>
+          <a:prstGeom prst="rect">
+            <a:avLst/>
+          </a:prstGeom>
+          <a:solidFill>
+            <a:srgbClr val="0B1F3B"/>
+          </a:solidFill>
+          <a:ln>
+            <a:noFill/>
+          </a:ln>
+        </p:spPr>
+        <p:style>
+          <a:lnRef idx="1">
+            <a:schemeClr val="accent1"/>
+          </a:lnRef>
+          <a:fillRef idx="3">
+            <a:schemeClr val="accent1"/>
+          </a:fillRef>
+          <a:effectRef idx="2">
+            <a:schemeClr val="accent1"/>
+          </a:effectRef>
+          <a:fontRef idx="minor">
+            <a:schemeClr val="lt1"/>
+          </a:fontRef>
+        </p:style>
+        <p:txBody>
+          <a:bodyPr rtlCol="0" anchor="ctr"/>
+          <a:lstStyle/>
+          <a:p>
+            <a:pPr algn="ctr"/>
+          </a:p>
+        </p:txBody>
+      </p:sp>
+      <p:sp>
+        <p:nvSpPr>
+          <p:cNvPr id="3" name="Rectangle 2"/>
+          <p:cNvSpPr/>
+          <p:nvPr/>
+        </p:nvSpPr>
+        <p:spPr>
+          <a:xfrm>
+            <a:off x="0" y="603504"/>
+            <a:ext cx="12191695" cy="54864"/>
+          </a:xfrm>
+          <a:prstGeom prst="rect">
+            <a:avLst/>
+          </a:prstGeom>
+          <a:solidFill>
+            <a:srgbClr val="1AA6B7"/>
+          </a:solidFill>
+          <a:ln>
+            <a:noFill/>
+          </a:ln>
+        </p:spPr>
+        <p:style>
+          <a:lnRef idx="1">
+            <a:schemeClr val="accent1"/>
+          </a:lnRef>
+          <a:fillRef idx="3">
+            <a:schemeClr val="accent1"/>
+          </a:fillRef>
+          <a:effectRef idx="2">
+            <a:schemeClr val="accent1"/>
+          </a:effectRef>
+          <a:fontRef idx="minor">
+            <a:schemeClr val="lt1"/>
+          </a:fontRef>
+        </p:style>
+        <p:txBody>
+          <a:bodyPr rtlCol="0" anchor="ctr"/>
+          <a:lstStyle/>
+          <a:p>
+            <a:pPr algn="ctr"/>
+          </a:p>
+        </p:txBody>
+      </p:sp>
+      <p:sp>
+        <p:nvSpPr>
+          <p:cNvPr id="4" name="TextBox 3"/>
+          <p:cNvSpPr txBox="1"/>
+          <p:nvPr/>
+        </p:nvSpPr>
+        <p:spPr>
+          <a:xfrm>
+            <a:off x="685800" y="128016"/>
+            <a:ext cx="10820095" cy="457200"/>
+          </a:xfrm>
+          <a:prstGeom prst="rect">
+            <a:avLst/>
+          </a:prstGeom>
+          <a:noFill/>
+        </p:spPr>
+        <p:txBody>
+          <a:bodyPr wrap="none">
+            <a:spAutoFit/>
+          </a:bodyPr>
+          <a:lstStyle/>
+          <a:p>
+            <a:pPr>
+              <a:defRPr sz="2200" b="1">
+                <a:solidFill>
+                  <a:srgbClr val="FFFFFF"/>
+                </a:solidFill>
+              </a:defRPr>
+            </a:pPr>
             <a:r>
               <a:t>Problem &amp; Motivation</a:t>
             </a:r>
@@ -4372,96 +7804,316 @@
       </p:sp>
       <p:sp>
         <p:nvSpPr>
-          <p:cNvPr id="3" name="Content Placeholder 2"/>
-          <p:cNvSpPr>
-            <a:spLocks noGrp="1"/>
-          </p:cNvSpPr>
-          <p:nvPr>
-            <p:ph idx="1"/>
-          </p:nvPr>
-        </p:nvSpPr>
-        <p:spPr/>
-        <p:txBody>
-          <a:bodyPr wrap="square"/>
+          <p:cNvPr id="5" name="TextBox 4"/>
+          <p:cNvSpPr txBox="1"/>
+          <p:nvPr/>
+        </p:nvSpPr>
+        <p:spPr>
+          <a:xfrm>
+            <a:off x="685800" y="420624"/>
+            <a:ext cx="10820095" cy="274320"/>
+          </a:xfrm>
+          <a:prstGeom prst="rect">
+            <a:avLst/>
+          </a:prstGeom>
+          <a:noFill/>
+        </p:spPr>
+        <p:txBody>
+          <a:bodyPr wrap="none">
+            <a:spAutoFit/>
+          </a:bodyPr>
+          <a:lstStyle/>
+          <a:p>
+            <a:pPr>
+              <a:defRPr sz="1200">
+                <a:solidFill>
+                  <a:srgbClr val="1AA6B7"/>
+                </a:solidFill>
+              </a:defRPr>
+            </a:pPr>
+            <a:r>
+              <a:t>Context + goal</a:t>
+            </a:r>
+          </a:p>
+        </p:txBody>
+      </p:sp>
+      <p:sp>
+        <p:nvSpPr>
+          <p:cNvPr id="6" name="Rounded Rectangle 5"/>
+          <p:cNvSpPr/>
+          <p:nvPr/>
+        </p:nvSpPr>
+        <p:spPr>
+          <a:xfrm>
+            <a:off x="685800" y="978408"/>
+            <a:ext cx="10820095" cy="5376672"/>
+          </a:xfrm>
+          <a:prstGeom prst="roundRect">
+            <a:avLst/>
+          </a:prstGeom>
+          <a:solidFill>
+            <a:srgbClr val="FFFFFF"/>
+          </a:solidFill>
+          <a:ln>
+            <a:solidFill>
+              <a:srgbClr val="E5E7EB"/>
+            </a:solidFill>
+          </a:ln>
+        </p:spPr>
+        <p:style>
+          <a:lnRef idx="1">
+            <a:schemeClr val="accent1"/>
+          </a:lnRef>
+          <a:fillRef idx="3">
+            <a:schemeClr val="accent1"/>
+          </a:fillRef>
+          <a:effectRef idx="2">
+            <a:schemeClr val="accent1"/>
+          </a:effectRef>
+          <a:fontRef idx="minor">
+            <a:schemeClr val="lt1"/>
+          </a:fontRef>
+        </p:style>
+        <p:txBody>
+          <a:bodyPr rtlCol="0" anchor="ctr"/>
+          <a:lstStyle/>
+          <a:p>
+            <a:pPr algn="ctr"/>
+          </a:p>
+        </p:txBody>
+      </p:sp>
+      <p:sp>
+        <p:nvSpPr>
+          <p:cNvPr id="7" name="TextBox 6"/>
+          <p:cNvSpPr txBox="1"/>
+          <p:nvPr/>
+        </p:nvSpPr>
+        <p:spPr>
+          <a:xfrm>
+            <a:off x="1005840" y="1207008"/>
+            <a:ext cx="10180015" cy="4919472"/>
+          </a:xfrm>
+          <a:prstGeom prst="rect">
+            <a:avLst/>
+          </a:prstGeom>
+          <a:noFill/>
+        </p:spPr>
+        <p:txBody>
+          <a:bodyPr wrap="square">
+            <a:spAutoFit/>
+          </a:bodyPr>
           <a:lstStyle/>
           <a:p>
             <a:pPr>
               <a:spcAft>
-                <a:spcPts val="200"/>
+                <a:spcPts val="600"/>
               </a:spcAft>
-              <a:defRPr sz="2000">
-                <a:solidFill>
-                  <a:srgbClr val="111111"/>
-                </a:solidFill>
-              </a:defRPr>
-            </a:pPr>
-            <a:r>
-              <a:rPr sz="2000" i="0"/>
+              <a:defRPr sz="1900">
+                <a:solidFill>
+                  <a:srgbClr val="111827"/>
+                </a:solidFill>
+              </a:defRPr>
+            </a:pPr>
+            <a:r>
+              <a:rPr sz="1900" i="0">
+                <a:solidFill>
+                  <a:srgbClr val="111827"/>
+                </a:solidFill>
+              </a:rPr>
               <a:t>Real-world spatio-temporal data is inherently uncertain (sensor noise, missingness, drift).</a:t>
             </a:r>
           </a:p>
           <a:p>
             <a:pPr>
               <a:spcAft>
-                <a:spcPts val="200"/>
+                <a:spcPts val="600"/>
               </a:spcAft>
-              <a:defRPr sz="2000">
-                <a:solidFill>
-                  <a:srgbClr val="111111"/>
-                </a:solidFill>
-              </a:defRPr>
-            </a:pPr>
-            <a:r>
-              <a:rPr sz="2000" i="0"/>
+              <a:defRPr sz="1900">
+                <a:solidFill>
+                  <a:srgbClr val="111827"/>
+                </a:solidFill>
+              </a:defRPr>
+            </a:pPr>
+            <a:r>
+              <a:rPr sz="1900" i="0">
+                <a:solidFill>
+                  <a:srgbClr val="111827"/>
+                </a:solidFill>
+              </a:rPr>
               <a:t>Standard dashboards often present values as deterministic, masking uncertainty.</a:t>
             </a:r>
           </a:p>
           <a:p>
             <a:pPr>
               <a:spcAft>
-                <a:spcPts val="200"/>
+                <a:spcPts val="600"/>
               </a:spcAft>
-              <a:defRPr sz="2000">
-                <a:solidFill>
-                  <a:srgbClr val="111111"/>
-                </a:solidFill>
-              </a:defRPr>
-            </a:pPr>
-            <a:r>
-              <a:rPr sz="2000" i="0"/>
+              <a:defRPr sz="1900">
+                <a:solidFill>
+                  <a:srgbClr val="111827"/>
+                </a:solidFill>
+              </a:defRPr>
+            </a:pPr>
+            <a:r>
+              <a:rPr sz="1900" i="0">
+                <a:solidFill>
+                  <a:srgbClr val="111827"/>
+                </a:solidFill>
+              </a:rPr>
               <a:t>Goal: visualize uncertainty to support safer, more informed decision-making.</a:t>
             </a:r>
           </a:p>
           <a:p>
             <a:pPr>
               <a:spcAft>
-                <a:spcPts val="200"/>
+                <a:spcPts val="600"/>
               </a:spcAft>
-              <a:defRPr sz="2000">
-                <a:solidFill>
-                  <a:srgbClr val="111111"/>
-                </a:solidFill>
-              </a:defRPr>
-            </a:pPr>
-            <a:r>
-              <a:rPr sz="2000" i="0"/>
+              <a:defRPr sz="1900">
+                <a:solidFill>
+                  <a:srgbClr val="111827"/>
+                </a:solidFill>
+              </a:defRPr>
+            </a:pPr>
+            <a:r>
+              <a:rPr sz="1900" i="0">
+                <a:solidFill>
+                  <a:srgbClr val="111827"/>
+                </a:solidFill>
+              </a:rPr>
               <a:t>Key challenge: communicate uncertainty in high-density data without visual overload.</a:t>
             </a:r>
           </a:p>
           <a:p>
             <a:pPr>
               <a:spcAft>
-                <a:spcPts val="200"/>
+                <a:spcPts val="600"/>
               </a:spcAft>
-              <a:defRPr sz="2000">
-                <a:solidFill>
-                  <a:srgbClr val="111111"/>
-                </a:solidFill>
-              </a:defRPr>
-            </a:pPr>
-            <a:r>
-              <a:rPr sz="2000" i="1"/>
+              <a:defRPr sz="1900">
+                <a:solidFill>
+                  <a:srgbClr val="111827"/>
+                </a:solidFill>
+              </a:defRPr>
+            </a:pPr>
+            <a:r>
+              <a:rPr sz="1900" i="1">
+                <a:solidFill>
+                  <a:srgbClr val="111827"/>
+                </a:solidFill>
+              </a:rPr>
               <a:t>*Example (to validate): on a city-scale GNSS trace, accuracy varies over time; a single line can hide drift, while uncertainty-aware encodings reveal low-confidence segments.*</a:t>
+            </a:r>
+          </a:p>
+        </p:txBody>
+      </p:sp>
+      <p:sp>
+        <p:nvSpPr>
+          <p:cNvPr id="8" name="Rectangle 7"/>
+          <p:cNvSpPr/>
+          <p:nvPr/>
+        </p:nvSpPr>
+        <p:spPr>
+          <a:xfrm>
+            <a:off x="0" y="6537960"/>
+            <a:ext cx="12191695" cy="18288"/>
+          </a:xfrm>
+          <a:prstGeom prst="rect">
+            <a:avLst/>
+          </a:prstGeom>
+          <a:solidFill>
+            <a:srgbClr val="E5E7EB"/>
+          </a:solidFill>
+          <a:ln>
+            <a:noFill/>
+          </a:ln>
+        </p:spPr>
+        <p:style>
+          <a:lnRef idx="1">
+            <a:schemeClr val="accent1"/>
+          </a:lnRef>
+          <a:fillRef idx="3">
+            <a:schemeClr val="accent1"/>
+          </a:fillRef>
+          <a:effectRef idx="2">
+            <a:schemeClr val="accent1"/>
+          </a:effectRef>
+          <a:fontRef idx="minor">
+            <a:schemeClr val="lt1"/>
+          </a:fontRef>
+        </p:style>
+        <p:txBody>
+          <a:bodyPr rtlCol="0" anchor="ctr"/>
+          <a:lstStyle/>
+          <a:p>
+            <a:pPr algn="ctr"/>
+          </a:p>
+        </p:txBody>
+      </p:sp>
+      <p:sp>
+        <p:nvSpPr>
+          <p:cNvPr id="9" name="TextBox 8"/>
+          <p:cNvSpPr txBox="1"/>
+          <p:nvPr/>
+        </p:nvSpPr>
+        <p:spPr>
+          <a:xfrm>
+            <a:off x="685800" y="6583680"/>
+            <a:ext cx="7315200" cy="228600"/>
+          </a:xfrm>
+          <a:prstGeom prst="rect">
+            <a:avLst/>
+          </a:prstGeom>
+          <a:noFill/>
+        </p:spPr>
+        <p:txBody>
+          <a:bodyPr wrap="none">
+            <a:spAutoFit/>
+          </a:bodyPr>
+          <a:lstStyle/>
+          <a:p>
+            <a:pPr>
+              <a:defRPr sz="1000">
+                <a:solidFill>
+                  <a:srgbClr val="6B7280"/>
+                </a:solidFill>
+              </a:defRPr>
+            </a:pPr>
+            <a:r>
+              <a:t>Project #543 — Visualizing Spatio-Temporal Uncertainty</a:t>
+            </a:r>
+          </a:p>
+        </p:txBody>
+      </p:sp>
+      <p:sp>
+        <p:nvSpPr>
+          <p:cNvPr id="10" name="TextBox 9"/>
+          <p:cNvSpPr txBox="1"/>
+          <p:nvPr/>
+        </p:nvSpPr>
+        <p:spPr>
+          <a:xfrm>
+            <a:off x="9494215" y="6583680"/>
+            <a:ext cx="2011680" cy="228600"/>
+          </a:xfrm>
+          <a:prstGeom prst="rect">
+            <a:avLst/>
+          </a:prstGeom>
+          <a:noFill/>
+        </p:spPr>
+        <p:txBody>
+          <a:bodyPr wrap="none">
+            <a:spAutoFit/>
+          </a:bodyPr>
+          <a:lstStyle/>
+          <a:p>
+            <a:pPr algn="r">
+              <a:defRPr sz="1000">
+                <a:solidFill>
+                  <a:srgbClr val="6B7280"/>
+                </a:solidFill>
+              </a:defRPr>
+            </a:pPr>
+            <a:r>
+              <a:t>2/19</a:t>
             </a:r>
           </a:p>
         </p:txBody>
@@ -4477,6 +8129,14 @@
 <file path=ppt/slides/slide3.xml><?xml version="1.0" encoding="utf-8"?>
 <p:sld xmlns:a="http://schemas.openxmlformats.org/drawingml/2006/main" xmlns:p="http://schemas.openxmlformats.org/presentationml/2006/main" xmlns:r="http://schemas.openxmlformats.org/officeDocument/2006/relationships">
   <p:cSld>
+    <p:bg>
+      <p:bgPr>
+        <a:solidFill>
+          <a:srgbClr val="F7F8FA"/>
+        </a:solidFill>
+        <a:effectLst/>
+      </p:bgPr>
+    </p:bg>
     <p:spTree>
       <p:nvGrpSpPr>
         <p:cNvPr id="1" name=""/>
@@ -4486,19 +8146,119 @@
       <p:grpSpPr/>
       <p:sp>
         <p:nvSpPr>
-          <p:cNvPr id="2" name="Title 1"/>
-          <p:cNvSpPr>
-            <a:spLocks noGrp="1"/>
-          </p:cNvSpPr>
-          <p:nvPr>
-            <p:ph type="title"/>
-          </p:nvPr>
-        </p:nvSpPr>
-        <p:spPr/>
-        <p:txBody>
-          <a:bodyPr/>
-          <a:lstStyle/>
-          <a:p>
+          <p:cNvPr id="2" name="Rectangle 1"/>
+          <p:cNvSpPr/>
+          <p:nvPr/>
+        </p:nvSpPr>
+        <p:spPr>
+          <a:xfrm>
+            <a:off x="0" y="0"/>
+            <a:ext cx="12191695" cy="658368"/>
+          </a:xfrm>
+          <a:prstGeom prst="rect">
+            <a:avLst/>
+          </a:prstGeom>
+          <a:solidFill>
+            <a:srgbClr val="0B1F3B"/>
+          </a:solidFill>
+          <a:ln>
+            <a:noFill/>
+          </a:ln>
+        </p:spPr>
+        <p:style>
+          <a:lnRef idx="1">
+            <a:schemeClr val="accent1"/>
+          </a:lnRef>
+          <a:fillRef idx="3">
+            <a:schemeClr val="accent1"/>
+          </a:fillRef>
+          <a:effectRef idx="2">
+            <a:schemeClr val="accent1"/>
+          </a:effectRef>
+          <a:fontRef idx="minor">
+            <a:schemeClr val="lt1"/>
+          </a:fontRef>
+        </p:style>
+        <p:txBody>
+          <a:bodyPr rtlCol="0" anchor="ctr"/>
+          <a:lstStyle/>
+          <a:p>
+            <a:pPr algn="ctr"/>
+          </a:p>
+        </p:txBody>
+      </p:sp>
+      <p:sp>
+        <p:nvSpPr>
+          <p:cNvPr id="3" name="Rectangle 2"/>
+          <p:cNvSpPr/>
+          <p:nvPr/>
+        </p:nvSpPr>
+        <p:spPr>
+          <a:xfrm>
+            <a:off x="0" y="603504"/>
+            <a:ext cx="12191695" cy="54864"/>
+          </a:xfrm>
+          <a:prstGeom prst="rect">
+            <a:avLst/>
+          </a:prstGeom>
+          <a:solidFill>
+            <a:srgbClr val="1AA6B7"/>
+          </a:solidFill>
+          <a:ln>
+            <a:noFill/>
+          </a:ln>
+        </p:spPr>
+        <p:style>
+          <a:lnRef idx="1">
+            <a:schemeClr val="accent1"/>
+          </a:lnRef>
+          <a:fillRef idx="3">
+            <a:schemeClr val="accent1"/>
+          </a:fillRef>
+          <a:effectRef idx="2">
+            <a:schemeClr val="accent1"/>
+          </a:effectRef>
+          <a:fontRef idx="minor">
+            <a:schemeClr val="lt1"/>
+          </a:fontRef>
+        </p:style>
+        <p:txBody>
+          <a:bodyPr rtlCol="0" anchor="ctr"/>
+          <a:lstStyle/>
+          <a:p>
+            <a:pPr algn="ctr"/>
+          </a:p>
+        </p:txBody>
+      </p:sp>
+      <p:sp>
+        <p:nvSpPr>
+          <p:cNvPr id="4" name="TextBox 3"/>
+          <p:cNvSpPr txBox="1"/>
+          <p:nvPr/>
+        </p:nvSpPr>
+        <p:spPr>
+          <a:xfrm>
+            <a:off x="685800" y="128016"/>
+            <a:ext cx="10820095" cy="457200"/>
+          </a:xfrm>
+          <a:prstGeom prst="rect">
+            <a:avLst/>
+          </a:prstGeom>
+          <a:noFill/>
+        </p:spPr>
+        <p:txBody>
+          <a:bodyPr wrap="none">
+            <a:spAutoFit/>
+          </a:bodyPr>
+          <a:lstStyle/>
+          <a:p>
+            <a:pPr>
+              <a:defRPr sz="2200" b="1">
+                <a:solidFill>
+                  <a:srgbClr val="FFFFFF"/>
+                </a:solidFill>
+              </a:defRPr>
+            </a:pPr>
             <a:r>
               <a:t>Related Works — Uncertainty Visualization Design Space</a:t>
             </a:r>
@@ -4507,80 +8267,296 @@
       </p:sp>
       <p:sp>
         <p:nvSpPr>
-          <p:cNvPr id="3" name="Content Placeholder 2"/>
-          <p:cNvSpPr>
-            <a:spLocks noGrp="1"/>
-          </p:cNvSpPr>
-          <p:nvPr>
-            <p:ph idx="1"/>
-          </p:nvPr>
-        </p:nvSpPr>
-        <p:spPr/>
-        <p:txBody>
-          <a:bodyPr wrap="square"/>
+          <p:cNvPr id="5" name="TextBox 4"/>
+          <p:cNvSpPr txBox="1"/>
+          <p:nvPr/>
+        </p:nvSpPr>
+        <p:spPr>
+          <a:xfrm>
+            <a:off x="685800" y="420624"/>
+            <a:ext cx="10820095" cy="274320"/>
+          </a:xfrm>
+          <a:prstGeom prst="rect">
+            <a:avLst/>
+          </a:prstGeom>
+          <a:noFill/>
+        </p:spPr>
+        <p:txBody>
+          <a:bodyPr wrap="none">
+            <a:spAutoFit/>
+          </a:bodyPr>
+          <a:lstStyle/>
+          <a:p>
+            <a:pPr>
+              <a:defRPr sz="1200">
+                <a:solidFill>
+                  <a:srgbClr val="1AA6B7"/>
+                </a:solidFill>
+              </a:defRPr>
+            </a:pPr>
+            <a:r>
+              <a:t>Literature</a:t>
+            </a:r>
+          </a:p>
+        </p:txBody>
+      </p:sp>
+      <p:sp>
+        <p:nvSpPr>
+          <p:cNvPr id="6" name="Rounded Rectangle 5"/>
+          <p:cNvSpPr/>
+          <p:nvPr/>
+        </p:nvSpPr>
+        <p:spPr>
+          <a:xfrm>
+            <a:off x="685800" y="978408"/>
+            <a:ext cx="10820095" cy="5376672"/>
+          </a:xfrm>
+          <a:prstGeom prst="roundRect">
+            <a:avLst/>
+          </a:prstGeom>
+          <a:solidFill>
+            <a:srgbClr val="FFFFFF"/>
+          </a:solidFill>
+          <a:ln>
+            <a:solidFill>
+              <a:srgbClr val="E5E7EB"/>
+            </a:solidFill>
+          </a:ln>
+        </p:spPr>
+        <p:style>
+          <a:lnRef idx="1">
+            <a:schemeClr val="accent1"/>
+          </a:lnRef>
+          <a:fillRef idx="3">
+            <a:schemeClr val="accent1"/>
+          </a:fillRef>
+          <a:effectRef idx="2">
+            <a:schemeClr val="accent1"/>
+          </a:effectRef>
+          <a:fontRef idx="minor">
+            <a:schemeClr val="lt1"/>
+          </a:fontRef>
+        </p:style>
+        <p:txBody>
+          <a:bodyPr rtlCol="0" anchor="ctr"/>
+          <a:lstStyle/>
+          <a:p>
+            <a:pPr algn="ctr"/>
+          </a:p>
+        </p:txBody>
+      </p:sp>
+      <p:sp>
+        <p:nvSpPr>
+          <p:cNvPr id="7" name="TextBox 6"/>
+          <p:cNvSpPr txBox="1"/>
+          <p:nvPr/>
+        </p:nvSpPr>
+        <p:spPr>
+          <a:xfrm>
+            <a:off x="1005840" y="1207008"/>
+            <a:ext cx="10180015" cy="4919472"/>
+          </a:xfrm>
+          <a:prstGeom prst="rect">
+            <a:avLst/>
+          </a:prstGeom>
+          <a:noFill/>
+        </p:spPr>
+        <p:txBody>
+          <a:bodyPr wrap="square">
+            <a:spAutoFit/>
+          </a:bodyPr>
           <a:lstStyle/>
           <a:p>
             <a:pPr>
               <a:spcAft>
-                <a:spcPts val="200"/>
+                <a:spcPts val="600"/>
               </a:spcAft>
-              <a:defRPr sz="2000">
-                <a:solidFill>
-                  <a:srgbClr val="111111"/>
-                </a:solidFill>
-              </a:defRPr>
-            </a:pPr>
-            <a:r>
-              <a:rPr sz="2000" i="0"/>
+              <a:defRPr sz="1900">
+                <a:solidFill>
+                  <a:srgbClr val="111827"/>
+                </a:solidFill>
+              </a:defRPr>
+            </a:pPr>
+            <a:r>
+              <a:rPr sz="1900" i="0">
+                <a:solidFill>
+                  <a:srgbClr val="111827"/>
+                </a:solidFill>
+              </a:rPr>
               <a:t>Padilla, Kay, and Hullman (2022): design space of uncertainty visualization techniques.</a:t>
             </a:r>
           </a:p>
           <a:p>
             <a:pPr>
               <a:spcAft>
-                <a:spcPts val="200"/>
+                <a:spcPts val="600"/>
               </a:spcAft>
-              <a:defRPr sz="2000">
-                <a:solidFill>
-                  <a:srgbClr val="111111"/>
-                </a:solidFill>
-              </a:defRPr>
-            </a:pPr>
-            <a:r>
-              <a:rPr sz="2000" i="0"/>
+              <a:defRPr sz="1900">
+                <a:solidFill>
+                  <a:srgbClr val="111827"/>
+                </a:solidFill>
+              </a:defRPr>
+            </a:pPr>
+            <a:r>
+              <a:rPr sz="1900" i="0">
+                <a:solidFill>
+                  <a:srgbClr val="111827"/>
+                </a:solidFill>
+              </a:rPr>
               <a:t>Distributional graphics (e.g., quantile dot plots, ensemble plots) vs. direct visual encodings.</a:t>
             </a:r>
           </a:p>
           <a:p>
             <a:pPr>
               <a:spcAft>
-                <a:spcPts val="200"/>
+                <a:spcPts val="600"/>
               </a:spcAft>
-              <a:defRPr sz="2000">
-                <a:solidFill>
-                  <a:srgbClr val="111111"/>
-                </a:solidFill>
-              </a:defRPr>
-            </a:pPr>
-            <a:r>
-              <a:rPr sz="2000" i="0"/>
+              <a:defRPr sz="1900">
+                <a:solidFill>
+                  <a:srgbClr val="111827"/>
+                </a:solidFill>
+              </a:defRPr>
+            </a:pPr>
+            <a:r>
+              <a:rPr sz="1900" i="0">
+                <a:solidFill>
+                  <a:srgbClr val="111827"/>
+                </a:solidFill>
+              </a:rPr>
               <a:t>For high-density spatio-temporal data: prefer density-aware encodings (opacity, blur, gradients) to reduce clutter.</a:t>
             </a:r>
           </a:p>
           <a:p>
             <a:pPr>
               <a:spcAft>
-                <a:spcPts val="200"/>
+                <a:spcPts val="600"/>
               </a:spcAft>
-              <a:defRPr sz="2000">
-                <a:solidFill>
-                  <a:srgbClr val="111111"/>
-                </a:solidFill>
-              </a:defRPr>
-            </a:pPr>
-            <a:r>
-              <a:rPr sz="2000" i="0"/>
+              <a:defRPr sz="1900">
+                <a:solidFill>
+                  <a:srgbClr val="111827"/>
+                </a:solidFill>
+              </a:defRPr>
+            </a:pPr>
+            <a:r>
+              <a:rPr sz="1900" i="0">
+                <a:solidFill>
+                  <a:srgbClr val="111827"/>
+                </a:solidFill>
+              </a:rPr>
               <a:t>MacEachren et al. (2012): visual semiotics—blur, transparency, fuzziness, and size effectively communicate uncertainty.</a:t>
+            </a:r>
+          </a:p>
+        </p:txBody>
+      </p:sp>
+      <p:sp>
+        <p:nvSpPr>
+          <p:cNvPr id="8" name="Rectangle 7"/>
+          <p:cNvSpPr/>
+          <p:nvPr/>
+        </p:nvSpPr>
+        <p:spPr>
+          <a:xfrm>
+            <a:off x="0" y="6537960"/>
+            <a:ext cx="12191695" cy="18288"/>
+          </a:xfrm>
+          <a:prstGeom prst="rect">
+            <a:avLst/>
+          </a:prstGeom>
+          <a:solidFill>
+            <a:srgbClr val="E5E7EB"/>
+          </a:solidFill>
+          <a:ln>
+            <a:noFill/>
+          </a:ln>
+        </p:spPr>
+        <p:style>
+          <a:lnRef idx="1">
+            <a:schemeClr val="accent1"/>
+          </a:lnRef>
+          <a:fillRef idx="3">
+            <a:schemeClr val="accent1"/>
+          </a:fillRef>
+          <a:effectRef idx="2">
+            <a:schemeClr val="accent1"/>
+          </a:effectRef>
+          <a:fontRef idx="minor">
+            <a:schemeClr val="lt1"/>
+          </a:fontRef>
+        </p:style>
+        <p:txBody>
+          <a:bodyPr rtlCol="0" anchor="ctr"/>
+          <a:lstStyle/>
+          <a:p>
+            <a:pPr algn="ctr"/>
+          </a:p>
+        </p:txBody>
+      </p:sp>
+      <p:sp>
+        <p:nvSpPr>
+          <p:cNvPr id="9" name="TextBox 8"/>
+          <p:cNvSpPr txBox="1"/>
+          <p:nvPr/>
+        </p:nvSpPr>
+        <p:spPr>
+          <a:xfrm>
+            <a:off x="685800" y="6583680"/>
+            <a:ext cx="7315200" cy="228600"/>
+          </a:xfrm>
+          <a:prstGeom prst="rect">
+            <a:avLst/>
+          </a:prstGeom>
+          <a:noFill/>
+        </p:spPr>
+        <p:txBody>
+          <a:bodyPr wrap="none">
+            <a:spAutoFit/>
+          </a:bodyPr>
+          <a:lstStyle/>
+          <a:p>
+            <a:pPr>
+              <a:defRPr sz="1000">
+                <a:solidFill>
+                  <a:srgbClr val="6B7280"/>
+                </a:solidFill>
+              </a:defRPr>
+            </a:pPr>
+            <a:r>
+              <a:t>Project #543 — Visualizing Spatio-Temporal Uncertainty</a:t>
+            </a:r>
+          </a:p>
+        </p:txBody>
+      </p:sp>
+      <p:sp>
+        <p:nvSpPr>
+          <p:cNvPr id="10" name="TextBox 9"/>
+          <p:cNvSpPr txBox="1"/>
+          <p:nvPr/>
+        </p:nvSpPr>
+        <p:spPr>
+          <a:xfrm>
+            <a:off x="9494215" y="6583680"/>
+            <a:ext cx="2011680" cy="228600"/>
+          </a:xfrm>
+          <a:prstGeom prst="rect">
+            <a:avLst/>
+          </a:prstGeom>
+          <a:noFill/>
+        </p:spPr>
+        <p:txBody>
+          <a:bodyPr wrap="none">
+            <a:spAutoFit/>
+          </a:bodyPr>
+          <a:lstStyle/>
+          <a:p>
+            <a:pPr algn="r">
+              <a:defRPr sz="1000">
+                <a:solidFill>
+                  <a:srgbClr val="6B7280"/>
+                </a:solidFill>
+              </a:defRPr>
+            </a:pPr>
+            <a:r>
+              <a:t>3/19</a:t>
             </a:r>
           </a:p>
         </p:txBody>
@@ -4596,6 +8572,14 @@
 <file path=ppt/slides/slide4.xml><?xml version="1.0" encoding="utf-8"?>
 <p:sld xmlns:a="http://schemas.openxmlformats.org/drawingml/2006/main" xmlns:p="http://schemas.openxmlformats.org/presentationml/2006/main" xmlns:r="http://schemas.openxmlformats.org/officeDocument/2006/relationships">
   <p:cSld>
+    <p:bg>
+      <p:bgPr>
+        <a:solidFill>
+          <a:srgbClr val="F7F8FA"/>
+        </a:solidFill>
+        <a:effectLst/>
+      </p:bgPr>
+    </p:bg>
     <p:spTree>
       <p:nvGrpSpPr>
         <p:cNvPr id="1" name=""/>
@@ -4605,28 +8589,208 @@
       <p:grpSpPr/>
       <p:sp>
         <p:nvSpPr>
-          <p:cNvPr id="2" name="Title 1"/>
-          <p:cNvSpPr>
-            <a:spLocks noGrp="1"/>
-          </p:cNvSpPr>
-          <p:nvPr>
-            <p:ph type="title"/>
-          </p:nvPr>
-        </p:nvSpPr>
-        <p:spPr/>
-        <p:txBody>
-          <a:bodyPr/>
-          <a:lstStyle/>
-          <a:p>
+          <p:cNvPr id="2" name="Rectangle 1"/>
+          <p:cNvSpPr/>
+          <p:nvPr/>
+        </p:nvSpPr>
+        <p:spPr>
+          <a:xfrm>
+            <a:off x="0" y="0"/>
+            <a:ext cx="12191695" cy="658368"/>
+          </a:xfrm>
+          <a:prstGeom prst="rect">
+            <a:avLst/>
+          </a:prstGeom>
+          <a:solidFill>
+            <a:srgbClr val="0B1F3B"/>
+          </a:solidFill>
+          <a:ln>
+            <a:noFill/>
+          </a:ln>
+        </p:spPr>
+        <p:style>
+          <a:lnRef idx="1">
+            <a:schemeClr val="accent1"/>
+          </a:lnRef>
+          <a:fillRef idx="3">
+            <a:schemeClr val="accent1"/>
+          </a:fillRef>
+          <a:effectRef idx="2">
+            <a:schemeClr val="accent1"/>
+          </a:effectRef>
+          <a:fontRef idx="minor">
+            <a:schemeClr val="lt1"/>
+          </a:fontRef>
+        </p:style>
+        <p:txBody>
+          <a:bodyPr rtlCol="0" anchor="ctr"/>
+          <a:lstStyle/>
+          <a:p>
+            <a:pPr algn="ctr"/>
+          </a:p>
+        </p:txBody>
+      </p:sp>
+      <p:sp>
+        <p:nvSpPr>
+          <p:cNvPr id="3" name="Rectangle 2"/>
+          <p:cNvSpPr/>
+          <p:nvPr/>
+        </p:nvSpPr>
+        <p:spPr>
+          <a:xfrm>
+            <a:off x="0" y="603504"/>
+            <a:ext cx="12191695" cy="54864"/>
+          </a:xfrm>
+          <a:prstGeom prst="rect">
+            <a:avLst/>
+          </a:prstGeom>
+          <a:solidFill>
+            <a:srgbClr val="1AA6B7"/>
+          </a:solidFill>
+          <a:ln>
+            <a:noFill/>
+          </a:ln>
+        </p:spPr>
+        <p:style>
+          <a:lnRef idx="1">
+            <a:schemeClr val="accent1"/>
+          </a:lnRef>
+          <a:fillRef idx="3">
+            <a:schemeClr val="accent1"/>
+          </a:fillRef>
+          <a:effectRef idx="2">
+            <a:schemeClr val="accent1"/>
+          </a:effectRef>
+          <a:fontRef idx="minor">
+            <a:schemeClr val="lt1"/>
+          </a:fontRef>
+        </p:style>
+        <p:txBody>
+          <a:bodyPr rtlCol="0" anchor="ctr"/>
+          <a:lstStyle/>
+          <a:p>
+            <a:pPr algn="ctr"/>
+          </a:p>
+        </p:txBody>
+      </p:sp>
+      <p:sp>
+        <p:nvSpPr>
+          <p:cNvPr id="4" name="TextBox 3"/>
+          <p:cNvSpPr txBox="1"/>
+          <p:nvPr/>
+        </p:nvSpPr>
+        <p:spPr>
+          <a:xfrm>
+            <a:off x="685800" y="128016"/>
+            <a:ext cx="10820095" cy="457200"/>
+          </a:xfrm>
+          <a:prstGeom prst="rect">
+            <a:avLst/>
+          </a:prstGeom>
+          <a:noFill/>
+        </p:spPr>
+        <p:txBody>
+          <a:bodyPr wrap="none">
+            <a:spAutoFit/>
+          </a:bodyPr>
+          <a:lstStyle/>
+          <a:p>
+            <a:pPr>
+              <a:defRPr sz="2200" b="1">
+                <a:solidFill>
+                  <a:srgbClr val="FFFFFF"/>
+                </a:solidFill>
+              </a:defRPr>
+            </a:pPr>
             <a:r>
               <a:t>Related Works — Design Space (Padilla et al., 2022)</a:t>
             </a:r>
+          </a:p>
+        </p:txBody>
+      </p:sp>
+      <p:sp>
+        <p:nvSpPr>
+          <p:cNvPr id="5" name="TextBox 4"/>
+          <p:cNvSpPr txBox="1"/>
+          <p:nvPr/>
+        </p:nvSpPr>
+        <p:spPr>
+          <a:xfrm>
+            <a:off x="685800" y="420624"/>
+            <a:ext cx="10820095" cy="274320"/>
+          </a:xfrm>
+          <a:prstGeom prst="rect">
+            <a:avLst/>
+          </a:prstGeom>
+          <a:noFill/>
+        </p:spPr>
+        <p:txBody>
+          <a:bodyPr wrap="none">
+            <a:spAutoFit/>
+          </a:bodyPr>
+          <a:lstStyle/>
+          <a:p>
+            <a:pPr>
+              <a:defRPr sz="1200">
+                <a:solidFill>
+                  <a:srgbClr val="1AA6B7"/>
+                </a:solidFill>
+              </a:defRPr>
+            </a:pPr>
+            <a:r>
+              <a:t>Literature</a:t>
+            </a:r>
+          </a:p>
+        </p:txBody>
+      </p:sp>
+      <p:sp>
+        <p:nvSpPr>
+          <p:cNvPr id="6" name="Rounded Rectangle 5"/>
+          <p:cNvSpPr/>
+          <p:nvPr/>
+        </p:nvSpPr>
+        <p:spPr>
+          <a:xfrm>
+            <a:off x="685800" y="978408"/>
+            <a:ext cx="10820095" cy="5056632"/>
+          </a:xfrm>
+          <a:prstGeom prst="roundRect">
+            <a:avLst/>
+          </a:prstGeom>
+          <a:solidFill>
+            <a:srgbClr val="FFFFFF"/>
+          </a:solidFill>
+          <a:ln>
+            <a:solidFill>
+              <a:srgbClr val="E5E7EB"/>
+            </a:solidFill>
+          </a:ln>
+        </p:spPr>
+        <p:style>
+          <a:lnRef idx="1">
+            <a:schemeClr val="accent1"/>
+          </a:lnRef>
+          <a:fillRef idx="3">
+            <a:schemeClr val="accent1"/>
+          </a:fillRef>
+          <a:effectRef idx="2">
+            <a:schemeClr val="accent1"/>
+          </a:effectRef>
+          <a:fontRef idx="minor">
+            <a:schemeClr val="lt1"/>
+          </a:fontRef>
+        </p:style>
+        <p:txBody>
+          <a:bodyPr rtlCol="0" anchor="ctr"/>
+          <a:lstStyle/>
+          <a:p>
+            <a:pPr algn="ctr"/>
           </a:p>
         </p:txBody>
       </p:sp>
       <p:pic>
         <p:nvPicPr>
-          <p:cNvPr id="3" name="Picture 2" descr="padilla1.png"/>
+          <p:cNvPr id="7" name="Picture 6" descr="padilla1.png"/>
           <p:cNvPicPr>
             <a:picLocks noChangeAspect="1"/>
           </p:cNvPicPr>
@@ -4640,8 +8804,8 @@
         </p:blipFill>
         <p:spPr>
           <a:xfrm>
-            <a:off x="685800" y="1417320"/>
-            <a:ext cx="10972800" cy="5120640"/>
+            <a:off x="758952" y="1051560"/>
+            <a:ext cx="10673791" cy="4910328"/>
           </a:xfrm>
           <a:prstGeom prst="rect">
             <a:avLst/>
@@ -4650,14 +8814,14 @@
       </p:pic>
       <p:sp>
         <p:nvSpPr>
-          <p:cNvPr id="4" name="TextBox 3"/>
+          <p:cNvPr id="8" name="TextBox 7"/>
           <p:cNvSpPr txBox="1"/>
           <p:nvPr/>
         </p:nvSpPr>
         <p:spPr>
           <a:xfrm>
-            <a:off x="685800" y="6583680"/>
-            <a:ext cx="10972800" cy="365760"/>
+            <a:off x="685800" y="6108192"/>
+            <a:ext cx="10820095" cy="384048"/>
           </a:xfrm>
           <a:prstGeom prst="rect">
             <a:avLst/>
@@ -4671,14 +8835,127 @@
           <a:lstStyle/>
           <a:p>
             <a:pPr algn="ctr">
-              <a:defRPr sz="1400">
-                <a:solidFill>
-                  <a:srgbClr val="444444"/>
+              <a:defRPr sz="1200">
+                <a:solidFill>
+                  <a:srgbClr val="6B7280"/>
                 </a:solidFill>
               </a:defRPr>
             </a:pPr>
             <a:r>
               <a:t>Uncertainty visualization techniques and encodings (overview figure).</a:t>
+            </a:r>
+          </a:p>
+        </p:txBody>
+      </p:sp>
+      <p:sp>
+        <p:nvSpPr>
+          <p:cNvPr id="9" name="Rectangle 8"/>
+          <p:cNvSpPr/>
+          <p:nvPr/>
+        </p:nvSpPr>
+        <p:spPr>
+          <a:xfrm>
+            <a:off x="0" y="6537960"/>
+            <a:ext cx="12191695" cy="18288"/>
+          </a:xfrm>
+          <a:prstGeom prst="rect">
+            <a:avLst/>
+          </a:prstGeom>
+          <a:solidFill>
+            <a:srgbClr val="E5E7EB"/>
+          </a:solidFill>
+          <a:ln>
+            <a:noFill/>
+          </a:ln>
+        </p:spPr>
+        <p:style>
+          <a:lnRef idx="1">
+            <a:schemeClr val="accent1"/>
+          </a:lnRef>
+          <a:fillRef idx="3">
+            <a:schemeClr val="accent1"/>
+          </a:fillRef>
+          <a:effectRef idx="2">
+            <a:schemeClr val="accent1"/>
+          </a:effectRef>
+          <a:fontRef idx="minor">
+            <a:schemeClr val="lt1"/>
+          </a:fontRef>
+        </p:style>
+        <p:txBody>
+          <a:bodyPr rtlCol="0" anchor="ctr"/>
+          <a:lstStyle/>
+          <a:p>
+            <a:pPr algn="ctr"/>
+          </a:p>
+        </p:txBody>
+      </p:sp>
+      <p:sp>
+        <p:nvSpPr>
+          <p:cNvPr id="10" name="TextBox 9"/>
+          <p:cNvSpPr txBox="1"/>
+          <p:nvPr/>
+        </p:nvSpPr>
+        <p:spPr>
+          <a:xfrm>
+            <a:off x="685800" y="6583680"/>
+            <a:ext cx="7315200" cy="228600"/>
+          </a:xfrm>
+          <a:prstGeom prst="rect">
+            <a:avLst/>
+          </a:prstGeom>
+          <a:noFill/>
+        </p:spPr>
+        <p:txBody>
+          <a:bodyPr wrap="none">
+            <a:spAutoFit/>
+          </a:bodyPr>
+          <a:lstStyle/>
+          <a:p>
+            <a:pPr>
+              <a:defRPr sz="1000">
+                <a:solidFill>
+                  <a:srgbClr val="6B7280"/>
+                </a:solidFill>
+              </a:defRPr>
+            </a:pPr>
+            <a:r>
+              <a:t>Project #543 — Visualizing Spatio-Temporal Uncertainty</a:t>
+            </a:r>
+          </a:p>
+        </p:txBody>
+      </p:sp>
+      <p:sp>
+        <p:nvSpPr>
+          <p:cNvPr id="11" name="TextBox 10"/>
+          <p:cNvSpPr txBox="1"/>
+          <p:nvPr/>
+        </p:nvSpPr>
+        <p:spPr>
+          <a:xfrm>
+            <a:off x="9494215" y="6583680"/>
+            <a:ext cx="2011680" cy="228600"/>
+          </a:xfrm>
+          <a:prstGeom prst="rect">
+            <a:avLst/>
+          </a:prstGeom>
+          <a:noFill/>
+        </p:spPr>
+        <p:txBody>
+          <a:bodyPr wrap="none">
+            <a:spAutoFit/>
+          </a:bodyPr>
+          <a:lstStyle/>
+          <a:p>
+            <a:pPr algn="r">
+              <a:defRPr sz="1000">
+                <a:solidFill>
+                  <a:srgbClr val="6B7280"/>
+                </a:solidFill>
+              </a:defRPr>
+            </a:pPr>
+            <a:r>
+              <a:t>4/19</a:t>
             </a:r>
           </a:p>
         </p:txBody>
@@ -4694,6 +8971,14 @@
 <file path=ppt/slides/slide5.xml><?xml version="1.0" encoding="utf-8"?>
 <p:sld xmlns:a="http://schemas.openxmlformats.org/drawingml/2006/main" xmlns:p="http://schemas.openxmlformats.org/presentationml/2006/main" xmlns:r="http://schemas.openxmlformats.org/officeDocument/2006/relationships">
   <p:cSld>
+    <p:bg>
+      <p:bgPr>
+        <a:solidFill>
+          <a:srgbClr val="F7F8FA"/>
+        </a:solidFill>
+        <a:effectLst/>
+      </p:bgPr>
+    </p:bg>
     <p:spTree>
       <p:nvGrpSpPr>
         <p:cNvPr id="1" name=""/>
@@ -4703,19 +8988,119 @@
       <p:grpSpPr/>
       <p:sp>
         <p:nvSpPr>
-          <p:cNvPr id="2" name="Title 1"/>
-          <p:cNvSpPr>
-            <a:spLocks noGrp="1"/>
-          </p:cNvSpPr>
-          <p:nvPr>
-            <p:ph type="title"/>
-          </p:nvPr>
-        </p:nvSpPr>
-        <p:spPr/>
-        <p:txBody>
-          <a:bodyPr/>
-          <a:lstStyle/>
-          <a:p>
+          <p:cNvPr id="2" name="Rectangle 1"/>
+          <p:cNvSpPr/>
+          <p:nvPr/>
+        </p:nvSpPr>
+        <p:spPr>
+          <a:xfrm>
+            <a:off x="0" y="0"/>
+            <a:ext cx="12191695" cy="658368"/>
+          </a:xfrm>
+          <a:prstGeom prst="rect">
+            <a:avLst/>
+          </a:prstGeom>
+          <a:solidFill>
+            <a:srgbClr val="0B1F3B"/>
+          </a:solidFill>
+          <a:ln>
+            <a:noFill/>
+          </a:ln>
+        </p:spPr>
+        <p:style>
+          <a:lnRef idx="1">
+            <a:schemeClr val="accent1"/>
+          </a:lnRef>
+          <a:fillRef idx="3">
+            <a:schemeClr val="accent1"/>
+          </a:fillRef>
+          <a:effectRef idx="2">
+            <a:schemeClr val="accent1"/>
+          </a:effectRef>
+          <a:fontRef idx="minor">
+            <a:schemeClr val="lt1"/>
+          </a:fontRef>
+        </p:style>
+        <p:txBody>
+          <a:bodyPr rtlCol="0" anchor="ctr"/>
+          <a:lstStyle/>
+          <a:p>
+            <a:pPr algn="ctr"/>
+          </a:p>
+        </p:txBody>
+      </p:sp>
+      <p:sp>
+        <p:nvSpPr>
+          <p:cNvPr id="3" name="Rectangle 2"/>
+          <p:cNvSpPr/>
+          <p:nvPr/>
+        </p:nvSpPr>
+        <p:spPr>
+          <a:xfrm>
+            <a:off x="0" y="603504"/>
+            <a:ext cx="12191695" cy="54864"/>
+          </a:xfrm>
+          <a:prstGeom prst="rect">
+            <a:avLst/>
+          </a:prstGeom>
+          <a:solidFill>
+            <a:srgbClr val="1AA6B7"/>
+          </a:solidFill>
+          <a:ln>
+            <a:noFill/>
+          </a:ln>
+        </p:spPr>
+        <p:style>
+          <a:lnRef idx="1">
+            <a:schemeClr val="accent1"/>
+          </a:lnRef>
+          <a:fillRef idx="3">
+            <a:schemeClr val="accent1"/>
+          </a:fillRef>
+          <a:effectRef idx="2">
+            <a:schemeClr val="accent1"/>
+          </a:effectRef>
+          <a:fontRef idx="minor">
+            <a:schemeClr val="lt1"/>
+          </a:fontRef>
+        </p:style>
+        <p:txBody>
+          <a:bodyPr rtlCol="0" anchor="ctr"/>
+          <a:lstStyle/>
+          <a:p>
+            <a:pPr algn="ctr"/>
+          </a:p>
+        </p:txBody>
+      </p:sp>
+      <p:sp>
+        <p:nvSpPr>
+          <p:cNvPr id="4" name="TextBox 3"/>
+          <p:cNvSpPr txBox="1"/>
+          <p:nvPr/>
+        </p:nvSpPr>
+        <p:spPr>
+          <a:xfrm>
+            <a:off x="685800" y="128016"/>
+            <a:ext cx="10820095" cy="457200"/>
+          </a:xfrm>
+          <a:prstGeom prst="rect">
+            <a:avLst/>
+          </a:prstGeom>
+          <a:noFill/>
+        </p:spPr>
+        <p:txBody>
+          <a:bodyPr wrap="none">
+            <a:spAutoFit/>
+          </a:bodyPr>
+          <a:lstStyle/>
+          <a:p>
+            <a:pPr>
+              <a:defRPr sz="2200" b="1">
+                <a:solidFill>
+                  <a:srgbClr val="FFFFFF"/>
+                </a:solidFill>
+              </a:defRPr>
+            </a:pPr>
             <a:r>
               <a:t>Related Works — Spatial Uncertainty &amp; Decision-Oriented Views</a:t>
             </a:r>
@@ -4724,96 +9109,316 @@
       </p:sp>
       <p:sp>
         <p:nvSpPr>
-          <p:cNvPr id="3" name="Content Placeholder 2"/>
-          <p:cNvSpPr>
-            <a:spLocks noGrp="1"/>
-          </p:cNvSpPr>
-          <p:nvPr>
-            <p:ph idx="1"/>
-          </p:nvPr>
-        </p:nvSpPr>
-        <p:spPr/>
-        <p:txBody>
-          <a:bodyPr wrap="square"/>
+          <p:cNvPr id="5" name="TextBox 4"/>
+          <p:cNvSpPr txBox="1"/>
+          <p:nvPr/>
+        </p:nvSpPr>
+        <p:spPr>
+          <a:xfrm>
+            <a:off x="685800" y="420624"/>
+            <a:ext cx="10820095" cy="274320"/>
+          </a:xfrm>
+          <a:prstGeom prst="rect">
+            <a:avLst/>
+          </a:prstGeom>
+          <a:noFill/>
+        </p:spPr>
+        <p:txBody>
+          <a:bodyPr wrap="none">
+            <a:spAutoFit/>
+          </a:bodyPr>
+          <a:lstStyle/>
+          <a:p>
+            <a:pPr>
+              <a:defRPr sz="1200">
+                <a:solidFill>
+                  <a:srgbClr val="1AA6B7"/>
+                </a:solidFill>
+              </a:defRPr>
+            </a:pPr>
+            <a:r>
+              <a:t>Literature</a:t>
+            </a:r>
+          </a:p>
+        </p:txBody>
+      </p:sp>
+      <p:sp>
+        <p:nvSpPr>
+          <p:cNvPr id="6" name="Rounded Rectangle 5"/>
+          <p:cNvSpPr/>
+          <p:nvPr/>
+        </p:nvSpPr>
+        <p:spPr>
+          <a:xfrm>
+            <a:off x="685800" y="978408"/>
+            <a:ext cx="10820095" cy="5376672"/>
+          </a:xfrm>
+          <a:prstGeom prst="roundRect">
+            <a:avLst/>
+          </a:prstGeom>
+          <a:solidFill>
+            <a:srgbClr val="FFFFFF"/>
+          </a:solidFill>
+          <a:ln>
+            <a:solidFill>
+              <a:srgbClr val="E5E7EB"/>
+            </a:solidFill>
+          </a:ln>
+        </p:spPr>
+        <p:style>
+          <a:lnRef idx="1">
+            <a:schemeClr val="accent1"/>
+          </a:lnRef>
+          <a:fillRef idx="3">
+            <a:schemeClr val="accent1"/>
+          </a:fillRef>
+          <a:effectRef idx="2">
+            <a:schemeClr val="accent1"/>
+          </a:effectRef>
+          <a:fontRef idx="minor">
+            <a:schemeClr val="lt1"/>
+          </a:fontRef>
+        </p:style>
+        <p:txBody>
+          <a:bodyPr rtlCol="0" anchor="ctr"/>
+          <a:lstStyle/>
+          <a:p>
+            <a:pPr algn="ctr"/>
+          </a:p>
+        </p:txBody>
+      </p:sp>
+      <p:sp>
+        <p:nvSpPr>
+          <p:cNvPr id="7" name="TextBox 6"/>
+          <p:cNvSpPr txBox="1"/>
+          <p:nvPr/>
+        </p:nvSpPr>
+        <p:spPr>
+          <a:xfrm>
+            <a:off x="1005840" y="1207008"/>
+            <a:ext cx="10180015" cy="4919472"/>
+          </a:xfrm>
+          <a:prstGeom prst="rect">
+            <a:avLst/>
+          </a:prstGeom>
+          <a:noFill/>
+        </p:spPr>
+        <p:txBody>
+          <a:bodyPr wrap="square">
+            <a:spAutoFit/>
+          </a:bodyPr>
           <a:lstStyle/>
           <a:p>
             <a:pPr>
               <a:spcAft>
-                <a:spcPts val="200"/>
+                <a:spcPts val="600"/>
               </a:spcAft>
-              <a:defRPr sz="2000">
-                <a:solidFill>
-                  <a:srgbClr val="111111"/>
-                </a:solidFill>
-              </a:defRPr>
-            </a:pPr>
-            <a:r>
-              <a:rPr sz="2000" i="0"/>
+              <a:defRPr sz="1900">
+                <a:solidFill>
+                  <a:srgbClr val="111827"/>
+                </a:solidFill>
+              </a:defRPr>
+            </a:pPr>
+            <a:r>
+              <a:rPr sz="1900" i="0">
+                <a:solidFill>
+                  <a:srgbClr val="111827"/>
+                </a:solidFill>
+              </a:rPr>
               <a:t>McKenzie et al. (spatial uncertainty examples): uncertainty in map/mobile interfaces.</a:t>
             </a:r>
           </a:p>
           <a:p>
             <a:pPr>
               <a:spcAft>
-                <a:spcPts val="200"/>
+                <a:spcPts val="600"/>
               </a:spcAft>
-              <a:defRPr sz="2000">
-                <a:solidFill>
-                  <a:srgbClr val="111111"/>
-                </a:solidFill>
-              </a:defRPr>
-            </a:pPr>
-            <a:r>
-              <a:rPr sz="2000" i="0"/>
+              <a:defRPr sz="1900">
+                <a:solidFill>
+                  <a:srgbClr val="111827"/>
+                </a:solidFill>
+              </a:defRPr>
+            </a:pPr>
+            <a:r>
+              <a:rPr sz="1900" i="0">
+                <a:solidFill>
+                  <a:srgbClr val="111827"/>
+                </a:solidFill>
+              </a:rPr>
               <a:t>Common approach: positional uncertainty regions (e.g., circles), enriched with contextual cues.</a:t>
             </a:r>
           </a:p>
           <a:p>
             <a:pPr>
               <a:spcAft>
-                <a:spcPts val="200"/>
+                <a:spcPts val="600"/>
               </a:spcAft>
-              <a:defRPr sz="2000">
-                <a:solidFill>
-                  <a:srgbClr val="111111"/>
-                </a:solidFill>
-              </a:defRPr>
-            </a:pPr>
-            <a:r>
-              <a:rPr sz="2000" i="0"/>
+              <a:defRPr sz="1900">
+                <a:solidFill>
+                  <a:srgbClr val="111827"/>
+                </a:solidFill>
+              </a:defRPr>
+            </a:pPr>
+            <a:r>
+              <a:rPr sz="1900" i="0">
+                <a:solidFill>
+                  <a:srgbClr val="111827"/>
+                </a:solidFill>
+              </a:rPr>
               <a:t>Risk: hard boundaries can imply false certainty; continuous uncertainty should avoid rigid borders.</a:t>
             </a:r>
           </a:p>
           <a:p>
             <a:pPr>
               <a:spcAft>
-                <a:spcPts val="200"/>
+                <a:spcPts val="600"/>
               </a:spcAft>
-              <a:defRPr sz="2000">
-                <a:solidFill>
-                  <a:srgbClr val="111111"/>
-                </a:solidFill>
-              </a:defRPr>
-            </a:pPr>
-            <a:r>
-              <a:rPr sz="2000" i="0"/>
+              <a:defRPr sz="1900">
+                <a:solidFill>
+                  <a:srgbClr val="111827"/>
+                </a:solidFill>
+              </a:defRPr>
+            </a:pPr>
+            <a:r>
+              <a:rPr sz="1900" i="0">
+                <a:solidFill>
+                  <a:srgbClr val="111827"/>
+                </a:solidFill>
+              </a:rPr>
               <a:t>Liu et al. (2016): representative sampling / ensemble visualization for multiple possible outcomes.</a:t>
             </a:r>
           </a:p>
           <a:p>
             <a:pPr>
               <a:spcAft>
-                <a:spcPts val="200"/>
+                <a:spcPts val="600"/>
               </a:spcAft>
-              <a:defRPr sz="2000">
-                <a:solidFill>
-                  <a:srgbClr val="111111"/>
-                </a:solidFill>
-              </a:defRPr>
-            </a:pPr>
-            <a:r>
-              <a:rPr sz="2000" i="0"/>
+              <a:defRPr sz="1900">
+                <a:solidFill>
+                  <a:srgbClr val="111827"/>
+                </a:solidFill>
+              </a:defRPr>
+            </a:pPr>
+            <a:r>
+              <a:rPr sz="1900" i="0">
+                <a:solidFill>
+                  <a:srgbClr val="111827"/>
+                </a:solidFill>
+              </a:rPr>
               <a:t>Implication: uncertainty views must balance clarity, density, and user interpretation.</a:t>
+            </a:r>
+          </a:p>
+        </p:txBody>
+      </p:sp>
+      <p:sp>
+        <p:nvSpPr>
+          <p:cNvPr id="8" name="Rectangle 7"/>
+          <p:cNvSpPr/>
+          <p:nvPr/>
+        </p:nvSpPr>
+        <p:spPr>
+          <a:xfrm>
+            <a:off x="0" y="6537960"/>
+            <a:ext cx="12191695" cy="18288"/>
+          </a:xfrm>
+          <a:prstGeom prst="rect">
+            <a:avLst/>
+          </a:prstGeom>
+          <a:solidFill>
+            <a:srgbClr val="E5E7EB"/>
+          </a:solidFill>
+          <a:ln>
+            <a:noFill/>
+          </a:ln>
+        </p:spPr>
+        <p:style>
+          <a:lnRef idx="1">
+            <a:schemeClr val="accent1"/>
+          </a:lnRef>
+          <a:fillRef idx="3">
+            <a:schemeClr val="accent1"/>
+          </a:fillRef>
+          <a:effectRef idx="2">
+            <a:schemeClr val="accent1"/>
+          </a:effectRef>
+          <a:fontRef idx="minor">
+            <a:schemeClr val="lt1"/>
+          </a:fontRef>
+        </p:style>
+        <p:txBody>
+          <a:bodyPr rtlCol="0" anchor="ctr"/>
+          <a:lstStyle/>
+          <a:p>
+            <a:pPr algn="ctr"/>
+          </a:p>
+        </p:txBody>
+      </p:sp>
+      <p:sp>
+        <p:nvSpPr>
+          <p:cNvPr id="9" name="TextBox 8"/>
+          <p:cNvSpPr txBox="1"/>
+          <p:nvPr/>
+        </p:nvSpPr>
+        <p:spPr>
+          <a:xfrm>
+            <a:off x="685800" y="6583680"/>
+            <a:ext cx="7315200" cy="228600"/>
+          </a:xfrm>
+          <a:prstGeom prst="rect">
+            <a:avLst/>
+          </a:prstGeom>
+          <a:noFill/>
+        </p:spPr>
+        <p:txBody>
+          <a:bodyPr wrap="none">
+            <a:spAutoFit/>
+          </a:bodyPr>
+          <a:lstStyle/>
+          <a:p>
+            <a:pPr>
+              <a:defRPr sz="1000">
+                <a:solidFill>
+                  <a:srgbClr val="6B7280"/>
+                </a:solidFill>
+              </a:defRPr>
+            </a:pPr>
+            <a:r>
+              <a:t>Project #543 — Visualizing Spatio-Temporal Uncertainty</a:t>
+            </a:r>
+          </a:p>
+        </p:txBody>
+      </p:sp>
+      <p:sp>
+        <p:nvSpPr>
+          <p:cNvPr id="10" name="TextBox 9"/>
+          <p:cNvSpPr txBox="1"/>
+          <p:nvPr/>
+        </p:nvSpPr>
+        <p:spPr>
+          <a:xfrm>
+            <a:off x="9494215" y="6583680"/>
+            <a:ext cx="2011680" cy="228600"/>
+          </a:xfrm>
+          <a:prstGeom prst="rect">
+            <a:avLst/>
+          </a:prstGeom>
+          <a:noFill/>
+        </p:spPr>
+        <p:txBody>
+          <a:bodyPr wrap="none">
+            <a:spAutoFit/>
+          </a:bodyPr>
+          <a:lstStyle/>
+          <a:p>
+            <a:pPr algn="r">
+              <a:defRPr sz="1000">
+                <a:solidFill>
+                  <a:srgbClr val="6B7280"/>
+                </a:solidFill>
+              </a:defRPr>
+            </a:pPr>
+            <a:r>
+              <a:t>5/19</a:t>
             </a:r>
           </a:p>
         </p:txBody>
@@ -4829,6 +9434,14 @@
 <file path=ppt/slides/slide6.xml><?xml version="1.0" encoding="utf-8"?>
 <p:sld xmlns:a="http://schemas.openxmlformats.org/drawingml/2006/main" xmlns:p="http://schemas.openxmlformats.org/presentationml/2006/main" xmlns:r="http://schemas.openxmlformats.org/officeDocument/2006/relationships">
   <p:cSld>
+    <p:bg>
+      <p:bgPr>
+        <a:solidFill>
+          <a:srgbClr val="F7F8FA"/>
+        </a:solidFill>
+        <a:effectLst/>
+      </p:bgPr>
+    </p:bg>
     <p:spTree>
       <p:nvGrpSpPr>
         <p:cNvPr id="1" name=""/>
@@ -4838,28 +9451,208 @@
       <p:grpSpPr/>
       <p:sp>
         <p:nvSpPr>
-          <p:cNvPr id="2" name="Title 1"/>
-          <p:cNvSpPr>
-            <a:spLocks noGrp="1"/>
-          </p:cNvSpPr>
-          <p:nvPr>
-            <p:ph type="title"/>
-          </p:nvPr>
-        </p:nvSpPr>
-        <p:spPr/>
-        <p:txBody>
-          <a:bodyPr/>
-          <a:lstStyle/>
-          <a:p>
+          <p:cNvPr id="2" name="Rectangle 1"/>
+          <p:cNvSpPr/>
+          <p:nvPr/>
+        </p:nvSpPr>
+        <p:spPr>
+          <a:xfrm>
+            <a:off x="0" y="0"/>
+            <a:ext cx="12191695" cy="658368"/>
+          </a:xfrm>
+          <a:prstGeom prst="rect">
+            <a:avLst/>
+          </a:prstGeom>
+          <a:solidFill>
+            <a:srgbClr val="0B1F3B"/>
+          </a:solidFill>
+          <a:ln>
+            <a:noFill/>
+          </a:ln>
+        </p:spPr>
+        <p:style>
+          <a:lnRef idx="1">
+            <a:schemeClr val="accent1"/>
+          </a:lnRef>
+          <a:fillRef idx="3">
+            <a:schemeClr val="accent1"/>
+          </a:fillRef>
+          <a:effectRef idx="2">
+            <a:schemeClr val="accent1"/>
+          </a:effectRef>
+          <a:fontRef idx="minor">
+            <a:schemeClr val="lt1"/>
+          </a:fontRef>
+        </p:style>
+        <p:txBody>
+          <a:bodyPr rtlCol="0" anchor="ctr"/>
+          <a:lstStyle/>
+          <a:p>
+            <a:pPr algn="ctr"/>
+          </a:p>
+        </p:txBody>
+      </p:sp>
+      <p:sp>
+        <p:nvSpPr>
+          <p:cNvPr id="3" name="Rectangle 2"/>
+          <p:cNvSpPr/>
+          <p:nvPr/>
+        </p:nvSpPr>
+        <p:spPr>
+          <a:xfrm>
+            <a:off x="0" y="603504"/>
+            <a:ext cx="12191695" cy="54864"/>
+          </a:xfrm>
+          <a:prstGeom prst="rect">
+            <a:avLst/>
+          </a:prstGeom>
+          <a:solidFill>
+            <a:srgbClr val="1AA6B7"/>
+          </a:solidFill>
+          <a:ln>
+            <a:noFill/>
+          </a:ln>
+        </p:spPr>
+        <p:style>
+          <a:lnRef idx="1">
+            <a:schemeClr val="accent1"/>
+          </a:lnRef>
+          <a:fillRef idx="3">
+            <a:schemeClr val="accent1"/>
+          </a:fillRef>
+          <a:effectRef idx="2">
+            <a:schemeClr val="accent1"/>
+          </a:effectRef>
+          <a:fontRef idx="minor">
+            <a:schemeClr val="lt1"/>
+          </a:fontRef>
+        </p:style>
+        <p:txBody>
+          <a:bodyPr rtlCol="0" anchor="ctr"/>
+          <a:lstStyle/>
+          <a:p>
+            <a:pPr algn="ctr"/>
+          </a:p>
+        </p:txBody>
+      </p:sp>
+      <p:sp>
+        <p:nvSpPr>
+          <p:cNvPr id="4" name="TextBox 3"/>
+          <p:cNvSpPr txBox="1"/>
+          <p:nvPr/>
+        </p:nvSpPr>
+        <p:spPr>
+          <a:xfrm>
+            <a:off x="685800" y="128016"/>
+            <a:ext cx="10820095" cy="457200"/>
+          </a:xfrm>
+          <a:prstGeom prst="rect">
+            <a:avLst/>
+          </a:prstGeom>
+          <a:noFill/>
+        </p:spPr>
+        <p:txBody>
+          <a:bodyPr wrap="none">
+            <a:spAutoFit/>
+          </a:bodyPr>
+          <a:lstStyle/>
+          <a:p>
+            <a:pPr>
+              <a:defRPr sz="2200" b="1">
+                <a:solidFill>
+                  <a:srgbClr val="FFFFFF"/>
+                </a:solidFill>
+              </a:defRPr>
+            </a:pPr>
             <a:r>
               <a:t>Related Works — Spatial Uncertainty Example</a:t>
             </a:r>
+          </a:p>
+        </p:txBody>
+      </p:sp>
+      <p:sp>
+        <p:nvSpPr>
+          <p:cNvPr id="5" name="TextBox 4"/>
+          <p:cNvSpPr txBox="1"/>
+          <p:nvPr/>
+        </p:nvSpPr>
+        <p:spPr>
+          <a:xfrm>
+            <a:off x="685800" y="420624"/>
+            <a:ext cx="10820095" cy="274320"/>
+          </a:xfrm>
+          <a:prstGeom prst="rect">
+            <a:avLst/>
+          </a:prstGeom>
+          <a:noFill/>
+        </p:spPr>
+        <p:txBody>
+          <a:bodyPr wrap="none">
+            <a:spAutoFit/>
+          </a:bodyPr>
+          <a:lstStyle/>
+          <a:p>
+            <a:pPr>
+              <a:defRPr sz="1200">
+                <a:solidFill>
+                  <a:srgbClr val="1AA6B7"/>
+                </a:solidFill>
+              </a:defRPr>
+            </a:pPr>
+            <a:r>
+              <a:t>Literature</a:t>
+            </a:r>
+          </a:p>
+        </p:txBody>
+      </p:sp>
+      <p:sp>
+        <p:nvSpPr>
+          <p:cNvPr id="6" name="Rounded Rectangle 5"/>
+          <p:cNvSpPr/>
+          <p:nvPr/>
+        </p:nvSpPr>
+        <p:spPr>
+          <a:xfrm>
+            <a:off x="685800" y="978408"/>
+            <a:ext cx="10820095" cy="5056632"/>
+          </a:xfrm>
+          <a:prstGeom prst="roundRect">
+            <a:avLst/>
+          </a:prstGeom>
+          <a:solidFill>
+            <a:srgbClr val="FFFFFF"/>
+          </a:solidFill>
+          <a:ln>
+            <a:solidFill>
+              <a:srgbClr val="E5E7EB"/>
+            </a:solidFill>
+          </a:ln>
+        </p:spPr>
+        <p:style>
+          <a:lnRef idx="1">
+            <a:schemeClr val="accent1"/>
+          </a:lnRef>
+          <a:fillRef idx="3">
+            <a:schemeClr val="accent1"/>
+          </a:fillRef>
+          <a:effectRef idx="2">
+            <a:schemeClr val="accent1"/>
+          </a:effectRef>
+          <a:fontRef idx="minor">
+            <a:schemeClr val="lt1"/>
+          </a:fontRef>
+        </p:style>
+        <p:txBody>
+          <a:bodyPr rtlCol="0" anchor="ctr"/>
+          <a:lstStyle/>
+          <a:p>
+            <a:pPr algn="ctr"/>
           </a:p>
         </p:txBody>
       </p:sp>
       <p:pic>
         <p:nvPicPr>
-          <p:cNvPr id="3" name="Picture 2" descr="from-report1.png"/>
+          <p:cNvPr id="7" name="Picture 6" descr="from-report1.png"/>
           <p:cNvPicPr>
             <a:picLocks noChangeAspect="1"/>
           </p:cNvPicPr>
@@ -4873,8 +9666,8 @@
         </p:blipFill>
         <p:spPr>
           <a:xfrm>
-            <a:off x="685800" y="1417320"/>
-            <a:ext cx="10972800" cy="5120640"/>
+            <a:off x="758952" y="1051560"/>
+            <a:ext cx="10673791" cy="4910328"/>
           </a:xfrm>
           <a:prstGeom prst="rect">
             <a:avLst/>
@@ -4883,14 +9676,14 @@
       </p:pic>
       <p:sp>
         <p:nvSpPr>
-          <p:cNvPr id="4" name="TextBox 3"/>
+          <p:cNvPr id="8" name="TextBox 7"/>
           <p:cNvSpPr txBox="1"/>
           <p:nvPr/>
         </p:nvSpPr>
         <p:spPr>
           <a:xfrm>
-            <a:off x="685800" y="6583680"/>
-            <a:ext cx="10972800" cy="365760"/>
+            <a:off x="685800" y="6108192"/>
+            <a:ext cx="10820095" cy="384048"/>
           </a:xfrm>
           <a:prstGeom prst="rect">
             <a:avLst/>
@@ -4904,14 +9697,127 @@
           <a:lstStyle/>
           <a:p>
             <a:pPr algn="ctr">
-              <a:defRPr sz="1400">
-                <a:solidFill>
-                  <a:srgbClr val="444444"/>
+              <a:defRPr sz="1200">
+                <a:solidFill>
+                  <a:srgbClr val="6B7280"/>
                 </a:solidFill>
               </a:defRPr>
             </a:pPr>
             <a:r>
               <a:t>Example of spatial uncertainty depiction for decision-making contexts.</a:t>
+            </a:r>
+          </a:p>
+        </p:txBody>
+      </p:sp>
+      <p:sp>
+        <p:nvSpPr>
+          <p:cNvPr id="9" name="Rectangle 8"/>
+          <p:cNvSpPr/>
+          <p:nvPr/>
+        </p:nvSpPr>
+        <p:spPr>
+          <a:xfrm>
+            <a:off x="0" y="6537960"/>
+            <a:ext cx="12191695" cy="18288"/>
+          </a:xfrm>
+          <a:prstGeom prst="rect">
+            <a:avLst/>
+          </a:prstGeom>
+          <a:solidFill>
+            <a:srgbClr val="E5E7EB"/>
+          </a:solidFill>
+          <a:ln>
+            <a:noFill/>
+          </a:ln>
+        </p:spPr>
+        <p:style>
+          <a:lnRef idx="1">
+            <a:schemeClr val="accent1"/>
+          </a:lnRef>
+          <a:fillRef idx="3">
+            <a:schemeClr val="accent1"/>
+          </a:fillRef>
+          <a:effectRef idx="2">
+            <a:schemeClr val="accent1"/>
+          </a:effectRef>
+          <a:fontRef idx="minor">
+            <a:schemeClr val="lt1"/>
+          </a:fontRef>
+        </p:style>
+        <p:txBody>
+          <a:bodyPr rtlCol="0" anchor="ctr"/>
+          <a:lstStyle/>
+          <a:p>
+            <a:pPr algn="ctr"/>
+          </a:p>
+        </p:txBody>
+      </p:sp>
+      <p:sp>
+        <p:nvSpPr>
+          <p:cNvPr id="10" name="TextBox 9"/>
+          <p:cNvSpPr txBox="1"/>
+          <p:nvPr/>
+        </p:nvSpPr>
+        <p:spPr>
+          <a:xfrm>
+            <a:off x="685800" y="6583680"/>
+            <a:ext cx="7315200" cy="228600"/>
+          </a:xfrm>
+          <a:prstGeom prst="rect">
+            <a:avLst/>
+          </a:prstGeom>
+          <a:noFill/>
+        </p:spPr>
+        <p:txBody>
+          <a:bodyPr wrap="none">
+            <a:spAutoFit/>
+          </a:bodyPr>
+          <a:lstStyle/>
+          <a:p>
+            <a:pPr>
+              <a:defRPr sz="1000">
+                <a:solidFill>
+                  <a:srgbClr val="6B7280"/>
+                </a:solidFill>
+              </a:defRPr>
+            </a:pPr>
+            <a:r>
+              <a:t>Project #543 — Visualizing Spatio-Temporal Uncertainty</a:t>
+            </a:r>
+          </a:p>
+        </p:txBody>
+      </p:sp>
+      <p:sp>
+        <p:nvSpPr>
+          <p:cNvPr id="11" name="TextBox 10"/>
+          <p:cNvSpPr txBox="1"/>
+          <p:nvPr/>
+        </p:nvSpPr>
+        <p:spPr>
+          <a:xfrm>
+            <a:off x="9494215" y="6583680"/>
+            <a:ext cx="2011680" cy="228600"/>
+          </a:xfrm>
+          <a:prstGeom prst="rect">
+            <a:avLst/>
+          </a:prstGeom>
+          <a:noFill/>
+        </p:spPr>
+        <p:txBody>
+          <a:bodyPr wrap="none">
+            <a:spAutoFit/>
+          </a:bodyPr>
+          <a:lstStyle/>
+          <a:p>
+            <a:pPr algn="r">
+              <a:defRPr sz="1000">
+                <a:solidFill>
+                  <a:srgbClr val="6B7280"/>
+                </a:solidFill>
+              </a:defRPr>
+            </a:pPr>
+            <a:r>
+              <a:t>6/19</a:t>
             </a:r>
           </a:p>
         </p:txBody>
@@ -4927,6 +9833,14 @@
 <file path=ppt/slides/slide7.xml><?xml version="1.0" encoding="utf-8"?>
 <p:sld xmlns:a="http://schemas.openxmlformats.org/drawingml/2006/main" xmlns:p="http://schemas.openxmlformats.org/presentationml/2006/main" xmlns:r="http://schemas.openxmlformats.org/officeDocument/2006/relationships">
   <p:cSld>
+    <p:bg>
+      <p:bgPr>
+        <a:solidFill>
+          <a:srgbClr val="F7F8FA"/>
+        </a:solidFill>
+        <a:effectLst/>
+      </p:bgPr>
+    </p:bg>
     <p:spTree>
       <p:nvGrpSpPr>
         <p:cNvPr id="1" name=""/>
@@ -4936,35 +9850,100 @@
       <p:grpSpPr/>
       <p:sp>
         <p:nvSpPr>
-          <p:cNvPr id="2" name="Title 1"/>
-          <p:cNvSpPr>
-            <a:spLocks noGrp="1"/>
-          </p:cNvSpPr>
-          <p:nvPr>
-            <p:ph type="title"/>
-          </p:nvPr>
-        </p:nvSpPr>
-        <p:spPr/>
-        <p:txBody>
-          <a:bodyPr/>
-          <a:lstStyle/>
-          <a:p>
-            <a:r>
-              <a:t>System Overview</a:t>
-            </a:r>
-          </a:p>
-        </p:txBody>
-      </p:sp>
-      <p:sp>
-        <p:nvSpPr>
-          <p:cNvPr id="3" name="TextBox 2"/>
+          <p:cNvPr id="2" name="Rectangle 1"/>
+          <p:cNvSpPr/>
+          <p:nvPr/>
+        </p:nvSpPr>
+        <p:spPr>
+          <a:xfrm>
+            <a:off x="0" y="0"/>
+            <a:ext cx="12191695" cy="658368"/>
+          </a:xfrm>
+          <a:prstGeom prst="rect">
+            <a:avLst/>
+          </a:prstGeom>
+          <a:solidFill>
+            <a:srgbClr val="0B1F3B"/>
+          </a:solidFill>
+          <a:ln>
+            <a:noFill/>
+          </a:ln>
+        </p:spPr>
+        <p:style>
+          <a:lnRef idx="1">
+            <a:schemeClr val="accent1"/>
+          </a:lnRef>
+          <a:fillRef idx="3">
+            <a:schemeClr val="accent1"/>
+          </a:fillRef>
+          <a:effectRef idx="2">
+            <a:schemeClr val="accent1"/>
+          </a:effectRef>
+          <a:fontRef idx="minor">
+            <a:schemeClr val="lt1"/>
+          </a:fontRef>
+        </p:style>
+        <p:txBody>
+          <a:bodyPr rtlCol="0" anchor="ctr"/>
+          <a:lstStyle/>
+          <a:p>
+            <a:pPr algn="ctr"/>
+          </a:p>
+        </p:txBody>
+      </p:sp>
+      <p:sp>
+        <p:nvSpPr>
+          <p:cNvPr id="3" name="Rectangle 2"/>
+          <p:cNvSpPr/>
+          <p:nvPr/>
+        </p:nvSpPr>
+        <p:spPr>
+          <a:xfrm>
+            <a:off x="0" y="603504"/>
+            <a:ext cx="12191695" cy="54864"/>
+          </a:xfrm>
+          <a:prstGeom prst="rect">
+            <a:avLst/>
+          </a:prstGeom>
+          <a:solidFill>
+            <a:srgbClr val="1AA6B7"/>
+          </a:solidFill>
+          <a:ln>
+            <a:noFill/>
+          </a:ln>
+        </p:spPr>
+        <p:style>
+          <a:lnRef idx="1">
+            <a:schemeClr val="accent1"/>
+          </a:lnRef>
+          <a:fillRef idx="3">
+            <a:schemeClr val="accent1"/>
+          </a:fillRef>
+          <a:effectRef idx="2">
+            <a:schemeClr val="accent1"/>
+          </a:effectRef>
+          <a:fontRef idx="minor">
+            <a:schemeClr val="lt1"/>
+          </a:fontRef>
+        </p:style>
+        <p:txBody>
+          <a:bodyPr rtlCol="0" anchor="ctr"/>
+          <a:lstStyle/>
+          <a:p>
+            <a:pPr algn="ctr"/>
+          </a:p>
+        </p:txBody>
+      </p:sp>
+      <p:sp>
+        <p:nvSpPr>
+          <p:cNvPr id="4" name="TextBox 3"/>
           <p:cNvSpPr txBox="1"/>
           <p:nvPr/>
         </p:nvSpPr>
         <p:spPr>
           <a:xfrm>
-            <a:off x="640080" y="1051560"/>
-            <a:ext cx="11064240" cy="502920"/>
+            <a:off x="685800" y="128016"/>
+            <a:ext cx="10820095" cy="457200"/>
           </a:xfrm>
           <a:prstGeom prst="rect">
             <a:avLst/>
@@ -4977,10 +9956,80 @@
           </a:bodyPr>
           <a:lstStyle/>
           <a:p>
+            <a:pPr>
+              <a:defRPr sz="2200" b="1">
+                <a:solidFill>
+                  <a:srgbClr val="FFFFFF"/>
+                </a:solidFill>
+              </a:defRPr>
+            </a:pPr>
+            <a:r>
+              <a:t>System Overview</a:t>
+            </a:r>
+          </a:p>
+        </p:txBody>
+      </p:sp>
+      <p:sp>
+        <p:nvSpPr>
+          <p:cNvPr id="5" name="TextBox 4"/>
+          <p:cNvSpPr txBox="1"/>
+          <p:nvPr/>
+        </p:nvSpPr>
+        <p:spPr>
+          <a:xfrm>
+            <a:off x="685800" y="420624"/>
+            <a:ext cx="10820095" cy="274320"/>
+          </a:xfrm>
+          <a:prstGeom prst="rect">
+            <a:avLst/>
+          </a:prstGeom>
+          <a:noFill/>
+        </p:spPr>
+        <p:txBody>
+          <a:bodyPr wrap="none">
+            <a:spAutoFit/>
+          </a:bodyPr>
+          <a:lstStyle/>
+          <a:p>
+            <a:pPr>
+              <a:defRPr sz="1200">
+                <a:solidFill>
+                  <a:srgbClr val="1AA6B7"/>
+                </a:solidFill>
+              </a:defRPr>
+            </a:pPr>
+            <a:r>
+              <a:t>Pipeline + prototype views</a:t>
+            </a:r>
+          </a:p>
+        </p:txBody>
+      </p:sp>
+      <p:sp>
+        <p:nvSpPr>
+          <p:cNvPr id="6" name="TextBox 5"/>
+          <p:cNvSpPr txBox="1"/>
+          <p:nvPr/>
+        </p:nvSpPr>
+        <p:spPr>
+          <a:xfrm>
+            <a:off x="685800" y="822960"/>
+            <a:ext cx="10820095" cy="502920"/>
+          </a:xfrm>
+          <a:prstGeom prst="rect">
+            <a:avLst/>
+          </a:prstGeom>
+          <a:noFill/>
+        </p:spPr>
+        <p:txBody>
+          <a:bodyPr wrap="none">
+            <a:spAutoFit/>
+          </a:bodyPr>
+          <a:lstStyle/>
+          <a:p>
             <a:pPr algn="ctr">
-              <a:defRPr sz="1600" b="1">
-                <a:solidFill>
-                  <a:srgbClr val="222222"/>
+              <a:defRPr sz="1400" b="1">
+                <a:solidFill>
+                  <a:srgbClr val="111827"/>
                 </a:solidFill>
               </a:defRPr>
             </a:pPr>
@@ -4992,14 +10041,14 @@
       </p:sp>
       <p:sp>
         <p:nvSpPr>
-          <p:cNvPr id="4" name="TextBox 3"/>
+          <p:cNvPr id="7" name="TextBox 6"/>
           <p:cNvSpPr txBox="1"/>
           <p:nvPr/>
         </p:nvSpPr>
         <p:spPr>
           <a:xfrm>
-            <a:off x="914400" y="1554480"/>
-            <a:ext cx="10515600" cy="1005840"/>
+            <a:off x="685800" y="1371600"/>
+            <a:ext cx="10820095" cy="1051560"/>
           </a:xfrm>
           <a:prstGeom prst="rect">
             <a:avLst/>
@@ -5013,9 +10062,9 @@
           <a:lstStyle/>
           <a:p>
             <a:pPr>
-              <a:defRPr sz="1400">
-                <a:solidFill>
-                  <a:srgbClr val="333333"/>
+              <a:defRPr sz="1200">
+                <a:solidFill>
+                  <a:srgbClr val="6B7280"/>
                 </a:solidFill>
               </a:defRPr>
             </a:pPr>
@@ -5025,9 +10074,9 @@
           </a:p>
           <a:p>
             <a:pPr>
-              <a:defRPr sz="1400">
-                <a:solidFill>
-                  <a:srgbClr val="333333"/>
+              <a:defRPr sz="1200">
+                <a:solidFill>
+                  <a:srgbClr val="6B7280"/>
                 </a:solidFill>
               </a:defRPr>
             </a:pPr>
@@ -5037,9 +10086,9 @@
           </a:p>
           <a:p>
             <a:pPr>
-              <a:defRPr sz="1400">
-                <a:solidFill>
-                  <a:srgbClr val="333333"/>
+              <a:defRPr sz="1200">
+                <a:solidFill>
+                  <a:srgbClr val="6B7280"/>
                 </a:solidFill>
               </a:defRPr>
             </a:pPr>
@@ -5049,9 +10098,9 @@
           </a:p>
           <a:p>
             <a:pPr>
-              <a:defRPr sz="1400">
-                <a:solidFill>
-                  <a:srgbClr val="333333"/>
+              <a:defRPr sz="1200">
+                <a:solidFill>
+                  <a:srgbClr val="6B7280"/>
                 </a:solidFill>
               </a:defRPr>
             </a:pPr>
@@ -5061,9 +10110,9 @@
           </a:p>
           <a:p>
             <a:pPr>
-              <a:defRPr sz="1400">
-                <a:solidFill>
-                  <a:srgbClr val="333333"/>
+              <a:defRPr sz="1200">
+                <a:solidFill>
+                  <a:srgbClr val="6B7280"/>
                 </a:solidFill>
               </a:defRPr>
             </a:pPr>
@@ -5073,21 +10122,66 @@
           </a:p>
           <a:p>
             <a:pPr>
-              <a:defRPr sz="1400">
-                <a:solidFill>
-                  <a:srgbClr val="333333"/>
+              <a:defRPr sz="1200">
+                <a:solidFill>
+                  <a:srgbClr val="6B7280"/>
                 </a:solidFill>
               </a:defRPr>
             </a:pPr>
             <a:r>
               <a:t>Decision Support: identify reliable and uncertain regions</a:t>
             </a:r>
+          </a:p>
+        </p:txBody>
+      </p:sp>
+      <p:sp>
+        <p:nvSpPr>
+          <p:cNvPr id="8" name="Rounded Rectangle 7"/>
+          <p:cNvSpPr/>
+          <p:nvPr/>
+        </p:nvSpPr>
+        <p:spPr>
+          <a:xfrm>
+            <a:off x="685800" y="2624328"/>
+            <a:ext cx="5282031" cy="3227832"/>
+          </a:xfrm>
+          <a:prstGeom prst="roundRect">
+            <a:avLst/>
+          </a:prstGeom>
+          <a:solidFill>
+            <a:srgbClr val="FFFFFF"/>
+          </a:solidFill>
+          <a:ln>
+            <a:solidFill>
+              <a:srgbClr val="E5E7EB"/>
+            </a:solidFill>
+          </a:ln>
+        </p:spPr>
+        <p:style>
+          <a:lnRef idx="1">
+            <a:schemeClr val="accent1"/>
+          </a:lnRef>
+          <a:fillRef idx="3">
+            <a:schemeClr val="accent1"/>
+          </a:fillRef>
+          <a:effectRef idx="2">
+            <a:schemeClr val="accent1"/>
+          </a:effectRef>
+          <a:fontRef idx="minor">
+            <a:schemeClr val="lt1"/>
+          </a:fontRef>
+        </p:style>
+        <p:txBody>
+          <a:bodyPr rtlCol="0" anchor="ctr"/>
+          <a:lstStyle/>
+          <a:p>
+            <a:pPr algn="ctr"/>
           </a:p>
         </p:txBody>
       </p:sp>
       <p:pic>
         <p:nvPicPr>
-          <p:cNvPr id="5" name="Picture 4" descr="dense1.png"/>
+          <p:cNvPr id="9" name="Picture 8" descr="dense1.png"/>
           <p:cNvPicPr>
             <a:picLocks noChangeAspect="1"/>
           </p:cNvPicPr>
@@ -5101,8 +10195,8 @@
         </p:blipFill>
         <p:spPr>
           <a:xfrm>
-            <a:off x="685800" y="2743200"/>
-            <a:ext cx="5349240" cy="3291840"/>
+            <a:off x="758952" y="2697480"/>
+            <a:ext cx="5135727" cy="3081528"/>
           </a:xfrm>
           <a:prstGeom prst="rect">
             <a:avLst/>
@@ -5111,14 +10205,14 @@
       </p:pic>
       <p:sp>
         <p:nvSpPr>
-          <p:cNvPr id="6" name="TextBox 5"/>
+          <p:cNvPr id="10" name="TextBox 9"/>
           <p:cNvSpPr txBox="1"/>
           <p:nvPr/>
         </p:nvSpPr>
         <p:spPr>
           <a:xfrm>
-            <a:off x="685800" y="6080760"/>
-            <a:ext cx="5349240" cy="365760"/>
+            <a:off x="685800" y="5925312"/>
+            <a:ext cx="5282031" cy="384048"/>
           </a:xfrm>
           <a:prstGeom prst="rect">
             <a:avLst/>
@@ -5132,21 +10226,66 @@
           <a:lstStyle/>
           <a:p>
             <a:pPr algn="ctr">
-              <a:defRPr sz="1400">
-                <a:solidFill>
-                  <a:srgbClr val="444444"/>
+              <a:defRPr sz="1200">
+                <a:solidFill>
+                  <a:srgbClr val="6B7280"/>
                 </a:solidFill>
               </a:defRPr>
             </a:pPr>
             <a:r>
               <a:t>Dense raw point data (high density, overplotting risk).</a:t>
             </a:r>
+          </a:p>
+        </p:txBody>
+      </p:sp>
+      <p:sp>
+        <p:nvSpPr>
+          <p:cNvPr id="11" name="Rounded Rectangle 10"/>
+          <p:cNvSpPr/>
+          <p:nvPr/>
+        </p:nvSpPr>
+        <p:spPr>
+          <a:xfrm>
+            <a:off x="6223863" y="2624328"/>
+            <a:ext cx="5282031" cy="3227832"/>
+          </a:xfrm>
+          <a:prstGeom prst="roundRect">
+            <a:avLst/>
+          </a:prstGeom>
+          <a:solidFill>
+            <a:srgbClr val="FFFFFF"/>
+          </a:solidFill>
+          <a:ln>
+            <a:solidFill>
+              <a:srgbClr val="E5E7EB"/>
+            </a:solidFill>
+          </a:ln>
+        </p:spPr>
+        <p:style>
+          <a:lnRef idx="1">
+            <a:schemeClr val="accent1"/>
+          </a:lnRef>
+          <a:fillRef idx="3">
+            <a:schemeClr val="accent1"/>
+          </a:fillRef>
+          <a:effectRef idx="2">
+            <a:schemeClr val="accent1"/>
+          </a:effectRef>
+          <a:fontRef idx="minor">
+            <a:schemeClr val="lt1"/>
+          </a:fontRef>
+        </p:style>
+        <p:txBody>
+          <a:bodyPr rtlCol="0" anchor="ctr"/>
+          <a:lstStyle/>
+          <a:p>
+            <a:pPr algn="ctr"/>
           </a:p>
         </p:txBody>
       </p:sp>
       <p:pic>
         <p:nvPicPr>
-          <p:cNvPr id="7" name="Picture 6" descr="heatmap1.png"/>
+          <p:cNvPr id="12" name="Picture 11" descr="heatmap1.png"/>
           <p:cNvPicPr>
             <a:picLocks noChangeAspect="1"/>
           </p:cNvPicPr>
@@ -5160,8 +10299,8 @@
         </p:blipFill>
         <p:spPr>
           <a:xfrm>
-            <a:off x="6309360" y="2743200"/>
-            <a:ext cx="5349240" cy="3291840"/>
+            <a:off x="6297015" y="2697480"/>
+            <a:ext cx="5135727" cy="3081528"/>
           </a:xfrm>
           <a:prstGeom prst="rect">
             <a:avLst/>
@@ -5170,14 +10309,14 @@
       </p:pic>
       <p:sp>
         <p:nvSpPr>
-          <p:cNvPr id="8" name="TextBox 7"/>
+          <p:cNvPr id="13" name="TextBox 12"/>
           <p:cNvSpPr txBox="1"/>
           <p:nvPr/>
         </p:nvSpPr>
         <p:spPr>
           <a:xfrm>
-            <a:off x="6309360" y="6080760"/>
-            <a:ext cx="5349240" cy="365760"/>
+            <a:off x="6223863" y="5925312"/>
+            <a:ext cx="5282031" cy="384048"/>
           </a:xfrm>
           <a:prstGeom prst="rect">
             <a:avLst/>
@@ -5191,14 +10330,127 @@
           <a:lstStyle/>
           <a:p>
             <a:pPr algn="ctr">
-              <a:defRPr sz="1400">
-                <a:solidFill>
-                  <a:srgbClr val="444444"/>
+              <a:defRPr sz="1200">
+                <a:solidFill>
+                  <a:srgbClr val="6B7280"/>
                 </a:solidFill>
               </a:defRPr>
             </a:pPr>
             <a:r>
               <a:t>Uncertainty-aware aggregated view (density/heatmap encoding).</a:t>
+            </a:r>
+          </a:p>
+        </p:txBody>
+      </p:sp>
+      <p:sp>
+        <p:nvSpPr>
+          <p:cNvPr id="14" name="Rectangle 13"/>
+          <p:cNvSpPr/>
+          <p:nvPr/>
+        </p:nvSpPr>
+        <p:spPr>
+          <a:xfrm>
+            <a:off x="0" y="6537960"/>
+            <a:ext cx="12191695" cy="18288"/>
+          </a:xfrm>
+          <a:prstGeom prst="rect">
+            <a:avLst/>
+          </a:prstGeom>
+          <a:solidFill>
+            <a:srgbClr val="E5E7EB"/>
+          </a:solidFill>
+          <a:ln>
+            <a:noFill/>
+          </a:ln>
+        </p:spPr>
+        <p:style>
+          <a:lnRef idx="1">
+            <a:schemeClr val="accent1"/>
+          </a:lnRef>
+          <a:fillRef idx="3">
+            <a:schemeClr val="accent1"/>
+          </a:fillRef>
+          <a:effectRef idx="2">
+            <a:schemeClr val="accent1"/>
+          </a:effectRef>
+          <a:fontRef idx="minor">
+            <a:schemeClr val="lt1"/>
+          </a:fontRef>
+        </p:style>
+        <p:txBody>
+          <a:bodyPr rtlCol="0" anchor="ctr"/>
+          <a:lstStyle/>
+          <a:p>
+            <a:pPr algn="ctr"/>
+          </a:p>
+        </p:txBody>
+      </p:sp>
+      <p:sp>
+        <p:nvSpPr>
+          <p:cNvPr id="15" name="TextBox 14"/>
+          <p:cNvSpPr txBox="1"/>
+          <p:nvPr/>
+        </p:nvSpPr>
+        <p:spPr>
+          <a:xfrm>
+            <a:off x="685800" y="6583680"/>
+            <a:ext cx="7315200" cy="228600"/>
+          </a:xfrm>
+          <a:prstGeom prst="rect">
+            <a:avLst/>
+          </a:prstGeom>
+          <a:noFill/>
+        </p:spPr>
+        <p:txBody>
+          <a:bodyPr wrap="none">
+            <a:spAutoFit/>
+          </a:bodyPr>
+          <a:lstStyle/>
+          <a:p>
+            <a:pPr>
+              <a:defRPr sz="1000">
+                <a:solidFill>
+                  <a:srgbClr val="6B7280"/>
+                </a:solidFill>
+              </a:defRPr>
+            </a:pPr>
+            <a:r>
+              <a:t>Project #543 — Visualizing Spatio-Temporal Uncertainty</a:t>
+            </a:r>
+          </a:p>
+        </p:txBody>
+      </p:sp>
+      <p:sp>
+        <p:nvSpPr>
+          <p:cNvPr id="16" name="TextBox 15"/>
+          <p:cNvSpPr txBox="1"/>
+          <p:nvPr/>
+        </p:nvSpPr>
+        <p:spPr>
+          <a:xfrm>
+            <a:off x="9494215" y="6583680"/>
+            <a:ext cx="2011680" cy="228600"/>
+          </a:xfrm>
+          <a:prstGeom prst="rect">
+            <a:avLst/>
+          </a:prstGeom>
+          <a:noFill/>
+        </p:spPr>
+        <p:txBody>
+          <a:bodyPr wrap="none">
+            <a:spAutoFit/>
+          </a:bodyPr>
+          <a:lstStyle/>
+          <a:p>
+            <a:pPr algn="r">
+              <a:defRPr sz="1000">
+                <a:solidFill>
+                  <a:srgbClr val="6B7280"/>
+                </a:solidFill>
+              </a:defRPr>
+            </a:pPr>
+            <a:r>
+              <a:t>7/19</a:t>
             </a:r>
           </a:p>
         </p:txBody>
@@ -5214,6 +10466,14 @@
 <file path=ppt/slides/slide8.xml><?xml version="1.0" encoding="utf-8"?>
 <p:sld xmlns:a="http://schemas.openxmlformats.org/drawingml/2006/main" xmlns:p="http://schemas.openxmlformats.org/presentationml/2006/main" xmlns:r="http://schemas.openxmlformats.org/officeDocument/2006/relationships">
   <p:cSld>
+    <p:bg>
+      <p:bgPr>
+        <a:solidFill>
+          <a:srgbClr val="F7F8FA"/>
+        </a:solidFill>
+        <a:effectLst/>
+      </p:bgPr>
+    </p:bg>
     <p:spTree>
       <p:nvGrpSpPr>
         <p:cNvPr id="1" name=""/>
@@ -5223,28 +10483,208 @@
       <p:grpSpPr/>
       <p:sp>
         <p:nvSpPr>
-          <p:cNvPr id="2" name="Title 1"/>
-          <p:cNvSpPr>
-            <a:spLocks noGrp="1"/>
-          </p:cNvSpPr>
-          <p:nvPr>
-            <p:ph type="title"/>
-          </p:nvPr>
-        </p:nvSpPr>
-        <p:spPr/>
-        <p:txBody>
-          <a:bodyPr/>
-          <a:lstStyle/>
-          <a:p>
+          <p:cNvPr id="2" name="Rectangle 1"/>
+          <p:cNvSpPr/>
+          <p:nvPr/>
+        </p:nvSpPr>
+        <p:spPr>
+          <a:xfrm>
+            <a:off x="0" y="0"/>
+            <a:ext cx="12191695" cy="658368"/>
+          </a:xfrm>
+          <a:prstGeom prst="rect">
+            <a:avLst/>
+          </a:prstGeom>
+          <a:solidFill>
+            <a:srgbClr val="0B1F3B"/>
+          </a:solidFill>
+          <a:ln>
+            <a:noFill/>
+          </a:ln>
+        </p:spPr>
+        <p:style>
+          <a:lnRef idx="1">
+            <a:schemeClr val="accent1"/>
+          </a:lnRef>
+          <a:fillRef idx="3">
+            <a:schemeClr val="accent1"/>
+          </a:fillRef>
+          <a:effectRef idx="2">
+            <a:schemeClr val="accent1"/>
+          </a:effectRef>
+          <a:fontRef idx="minor">
+            <a:schemeClr val="lt1"/>
+          </a:fontRef>
+        </p:style>
+        <p:txBody>
+          <a:bodyPr rtlCol="0" anchor="ctr"/>
+          <a:lstStyle/>
+          <a:p>
+            <a:pPr algn="ctr"/>
+          </a:p>
+        </p:txBody>
+      </p:sp>
+      <p:sp>
+        <p:nvSpPr>
+          <p:cNvPr id="3" name="Rectangle 2"/>
+          <p:cNvSpPr/>
+          <p:nvPr/>
+        </p:nvSpPr>
+        <p:spPr>
+          <a:xfrm>
+            <a:off x="0" y="603504"/>
+            <a:ext cx="12191695" cy="54864"/>
+          </a:xfrm>
+          <a:prstGeom prst="rect">
+            <a:avLst/>
+          </a:prstGeom>
+          <a:solidFill>
+            <a:srgbClr val="1AA6B7"/>
+          </a:solidFill>
+          <a:ln>
+            <a:noFill/>
+          </a:ln>
+        </p:spPr>
+        <p:style>
+          <a:lnRef idx="1">
+            <a:schemeClr val="accent1"/>
+          </a:lnRef>
+          <a:fillRef idx="3">
+            <a:schemeClr val="accent1"/>
+          </a:fillRef>
+          <a:effectRef idx="2">
+            <a:schemeClr val="accent1"/>
+          </a:effectRef>
+          <a:fontRef idx="minor">
+            <a:schemeClr val="lt1"/>
+          </a:fontRef>
+        </p:style>
+        <p:txBody>
+          <a:bodyPr rtlCol="0" anchor="ctr"/>
+          <a:lstStyle/>
+          <a:p>
+            <a:pPr algn="ctr"/>
+          </a:p>
+        </p:txBody>
+      </p:sp>
+      <p:sp>
+        <p:nvSpPr>
+          <p:cNvPr id="4" name="TextBox 3"/>
+          <p:cNvSpPr txBox="1"/>
+          <p:nvPr/>
+        </p:nvSpPr>
+        <p:spPr>
+          <a:xfrm>
+            <a:off x="685800" y="128016"/>
+            <a:ext cx="10820095" cy="457200"/>
+          </a:xfrm>
+          <a:prstGeom prst="rect">
+            <a:avLst/>
+          </a:prstGeom>
+          <a:noFill/>
+        </p:spPr>
+        <p:txBody>
+          <a:bodyPr wrap="none">
+            <a:spAutoFit/>
+          </a:bodyPr>
+          <a:lstStyle/>
+          <a:p>
+            <a:pPr>
+              <a:defRPr sz="2200" b="1">
+                <a:solidFill>
+                  <a:srgbClr val="FFFFFF"/>
+                </a:solidFill>
+              </a:defRPr>
+            </a:pPr>
             <a:r>
               <a:t>Data Flow Diagram — Data Insertion</a:t>
             </a:r>
+          </a:p>
+        </p:txBody>
+      </p:sp>
+      <p:sp>
+        <p:nvSpPr>
+          <p:cNvPr id="5" name="TextBox 4"/>
+          <p:cNvSpPr txBox="1"/>
+          <p:nvPr/>
+        </p:nvSpPr>
+        <p:spPr>
+          <a:xfrm>
+            <a:off x="685800" y="420624"/>
+            <a:ext cx="10820095" cy="274320"/>
+          </a:xfrm>
+          <a:prstGeom prst="rect">
+            <a:avLst/>
+          </a:prstGeom>
+          <a:noFill/>
+        </p:spPr>
+        <p:txBody>
+          <a:bodyPr wrap="none">
+            <a:spAutoFit/>
+          </a:bodyPr>
+          <a:lstStyle/>
+          <a:p>
+            <a:pPr>
+              <a:defRPr sz="1200">
+                <a:solidFill>
+                  <a:srgbClr val="1AA6B7"/>
+                </a:solidFill>
+              </a:defRPr>
+            </a:pPr>
+            <a:r>
+              <a:t>Architecture</a:t>
+            </a:r>
+          </a:p>
+        </p:txBody>
+      </p:sp>
+      <p:sp>
+        <p:nvSpPr>
+          <p:cNvPr id="6" name="Rounded Rectangle 5"/>
+          <p:cNvSpPr/>
+          <p:nvPr/>
+        </p:nvSpPr>
+        <p:spPr>
+          <a:xfrm>
+            <a:off x="685800" y="978408"/>
+            <a:ext cx="10820095" cy="5056632"/>
+          </a:xfrm>
+          <a:prstGeom prst="roundRect">
+            <a:avLst/>
+          </a:prstGeom>
+          <a:solidFill>
+            <a:srgbClr val="FFFFFF"/>
+          </a:solidFill>
+          <a:ln>
+            <a:solidFill>
+              <a:srgbClr val="E5E7EB"/>
+            </a:solidFill>
+          </a:ln>
+        </p:spPr>
+        <p:style>
+          <a:lnRef idx="1">
+            <a:schemeClr val="accent1"/>
+          </a:lnRef>
+          <a:fillRef idx="3">
+            <a:schemeClr val="accent1"/>
+          </a:fillRef>
+          <a:effectRef idx="2">
+            <a:schemeClr val="accent1"/>
+          </a:effectRef>
+          <a:fontRef idx="minor">
+            <a:schemeClr val="lt1"/>
+          </a:fontRef>
+        </p:style>
+        <p:txBody>
+          <a:bodyPr rtlCol="0" anchor="ctr"/>
+          <a:lstStyle/>
+          <a:p>
+            <a:pPr algn="ctr"/>
           </a:p>
         </p:txBody>
       </p:sp>
       <p:pic>
         <p:nvPicPr>
-          <p:cNvPr id="3" name="Picture 2" descr="data-workflow1.png"/>
+          <p:cNvPr id="7" name="Picture 6" descr="data-workflow1.png"/>
           <p:cNvPicPr>
             <a:picLocks noChangeAspect="1"/>
           </p:cNvPicPr>
@@ -5258,8 +10698,8 @@
         </p:blipFill>
         <p:spPr>
           <a:xfrm>
-            <a:off x="685800" y="1417320"/>
-            <a:ext cx="10972800" cy="5120640"/>
+            <a:off x="758952" y="1051560"/>
+            <a:ext cx="10673791" cy="4910328"/>
           </a:xfrm>
           <a:prstGeom prst="rect">
             <a:avLst/>
@@ -5268,14 +10708,14 @@
       </p:pic>
       <p:sp>
         <p:nvSpPr>
-          <p:cNvPr id="4" name="TextBox 3"/>
+          <p:cNvPr id="8" name="TextBox 7"/>
           <p:cNvSpPr txBox="1"/>
           <p:nvPr/>
         </p:nvSpPr>
         <p:spPr>
           <a:xfrm>
-            <a:off x="685800" y="6583680"/>
-            <a:ext cx="10972800" cy="365760"/>
+            <a:off x="685800" y="6108192"/>
+            <a:ext cx="10820095" cy="384048"/>
           </a:xfrm>
           <a:prstGeom prst="rect">
             <a:avLst/>
@@ -5289,14 +10729,127 @@
           <a:lstStyle/>
           <a:p>
             <a:pPr algn="ctr">
-              <a:defRPr sz="1400">
-                <a:solidFill>
-                  <a:srgbClr val="444444"/>
+              <a:defRPr sz="1200">
+                <a:solidFill>
+                  <a:srgbClr val="6B7280"/>
                 </a:solidFill>
               </a:defRPr>
             </a:pPr>
             <a:r>
               <a:t>End-to-end ingestion flow: raw logs → parsing → storage/indexing.</a:t>
+            </a:r>
+          </a:p>
+        </p:txBody>
+      </p:sp>
+      <p:sp>
+        <p:nvSpPr>
+          <p:cNvPr id="9" name="Rectangle 8"/>
+          <p:cNvSpPr/>
+          <p:nvPr/>
+        </p:nvSpPr>
+        <p:spPr>
+          <a:xfrm>
+            <a:off x="0" y="6537960"/>
+            <a:ext cx="12191695" cy="18288"/>
+          </a:xfrm>
+          <a:prstGeom prst="rect">
+            <a:avLst/>
+          </a:prstGeom>
+          <a:solidFill>
+            <a:srgbClr val="E5E7EB"/>
+          </a:solidFill>
+          <a:ln>
+            <a:noFill/>
+          </a:ln>
+        </p:spPr>
+        <p:style>
+          <a:lnRef idx="1">
+            <a:schemeClr val="accent1"/>
+          </a:lnRef>
+          <a:fillRef idx="3">
+            <a:schemeClr val="accent1"/>
+          </a:fillRef>
+          <a:effectRef idx="2">
+            <a:schemeClr val="accent1"/>
+          </a:effectRef>
+          <a:fontRef idx="minor">
+            <a:schemeClr val="lt1"/>
+          </a:fontRef>
+        </p:style>
+        <p:txBody>
+          <a:bodyPr rtlCol="0" anchor="ctr"/>
+          <a:lstStyle/>
+          <a:p>
+            <a:pPr algn="ctr"/>
+          </a:p>
+        </p:txBody>
+      </p:sp>
+      <p:sp>
+        <p:nvSpPr>
+          <p:cNvPr id="10" name="TextBox 9"/>
+          <p:cNvSpPr txBox="1"/>
+          <p:nvPr/>
+        </p:nvSpPr>
+        <p:spPr>
+          <a:xfrm>
+            <a:off x="685800" y="6583680"/>
+            <a:ext cx="7315200" cy="228600"/>
+          </a:xfrm>
+          <a:prstGeom prst="rect">
+            <a:avLst/>
+          </a:prstGeom>
+          <a:noFill/>
+        </p:spPr>
+        <p:txBody>
+          <a:bodyPr wrap="none">
+            <a:spAutoFit/>
+          </a:bodyPr>
+          <a:lstStyle/>
+          <a:p>
+            <a:pPr>
+              <a:defRPr sz="1000">
+                <a:solidFill>
+                  <a:srgbClr val="6B7280"/>
+                </a:solidFill>
+              </a:defRPr>
+            </a:pPr>
+            <a:r>
+              <a:t>Project #543 — Visualizing Spatio-Temporal Uncertainty</a:t>
+            </a:r>
+          </a:p>
+        </p:txBody>
+      </p:sp>
+      <p:sp>
+        <p:nvSpPr>
+          <p:cNvPr id="11" name="TextBox 10"/>
+          <p:cNvSpPr txBox="1"/>
+          <p:nvPr/>
+        </p:nvSpPr>
+        <p:spPr>
+          <a:xfrm>
+            <a:off x="9494215" y="6583680"/>
+            <a:ext cx="2011680" cy="228600"/>
+          </a:xfrm>
+          <a:prstGeom prst="rect">
+            <a:avLst/>
+          </a:prstGeom>
+          <a:noFill/>
+        </p:spPr>
+        <p:txBody>
+          <a:bodyPr wrap="none">
+            <a:spAutoFit/>
+          </a:bodyPr>
+          <a:lstStyle/>
+          <a:p>
+            <a:pPr algn="r">
+              <a:defRPr sz="1000">
+                <a:solidFill>
+                  <a:srgbClr val="6B7280"/>
+                </a:solidFill>
+              </a:defRPr>
+            </a:pPr>
+            <a:r>
+              <a:t>8/19</a:t>
             </a:r>
           </a:p>
         </p:txBody>
@@ -5312,6 +10865,14 @@
 <file path=ppt/slides/slide9.xml><?xml version="1.0" encoding="utf-8"?>
 <p:sld xmlns:a="http://schemas.openxmlformats.org/drawingml/2006/main" xmlns:p="http://schemas.openxmlformats.org/presentationml/2006/main" xmlns:r="http://schemas.openxmlformats.org/officeDocument/2006/relationships">
   <p:cSld>
+    <p:bg>
+      <p:bgPr>
+        <a:solidFill>
+          <a:srgbClr val="F7F8FA"/>
+        </a:solidFill>
+        <a:effectLst/>
+      </p:bgPr>
+    </p:bg>
     <p:spTree>
       <p:nvGrpSpPr>
         <p:cNvPr id="1" name=""/>
@@ -5321,28 +10882,208 @@
       <p:grpSpPr/>
       <p:sp>
         <p:nvSpPr>
-          <p:cNvPr id="2" name="Title 1"/>
-          <p:cNvSpPr>
-            <a:spLocks noGrp="1"/>
-          </p:cNvSpPr>
-          <p:nvPr>
-            <p:ph type="title"/>
-          </p:nvPr>
-        </p:nvSpPr>
-        <p:spPr/>
-        <p:txBody>
-          <a:bodyPr/>
-          <a:lstStyle/>
-          <a:p>
+          <p:cNvPr id="2" name="Rectangle 1"/>
+          <p:cNvSpPr/>
+          <p:nvPr/>
+        </p:nvSpPr>
+        <p:spPr>
+          <a:xfrm>
+            <a:off x="0" y="0"/>
+            <a:ext cx="12191695" cy="658368"/>
+          </a:xfrm>
+          <a:prstGeom prst="rect">
+            <a:avLst/>
+          </a:prstGeom>
+          <a:solidFill>
+            <a:srgbClr val="0B1F3B"/>
+          </a:solidFill>
+          <a:ln>
+            <a:noFill/>
+          </a:ln>
+        </p:spPr>
+        <p:style>
+          <a:lnRef idx="1">
+            <a:schemeClr val="accent1"/>
+          </a:lnRef>
+          <a:fillRef idx="3">
+            <a:schemeClr val="accent1"/>
+          </a:fillRef>
+          <a:effectRef idx="2">
+            <a:schemeClr val="accent1"/>
+          </a:effectRef>
+          <a:fontRef idx="minor">
+            <a:schemeClr val="lt1"/>
+          </a:fontRef>
+        </p:style>
+        <p:txBody>
+          <a:bodyPr rtlCol="0" anchor="ctr"/>
+          <a:lstStyle/>
+          <a:p>
+            <a:pPr algn="ctr"/>
+          </a:p>
+        </p:txBody>
+      </p:sp>
+      <p:sp>
+        <p:nvSpPr>
+          <p:cNvPr id="3" name="Rectangle 2"/>
+          <p:cNvSpPr/>
+          <p:nvPr/>
+        </p:nvSpPr>
+        <p:spPr>
+          <a:xfrm>
+            <a:off x="0" y="603504"/>
+            <a:ext cx="12191695" cy="54864"/>
+          </a:xfrm>
+          <a:prstGeom prst="rect">
+            <a:avLst/>
+          </a:prstGeom>
+          <a:solidFill>
+            <a:srgbClr val="1AA6B7"/>
+          </a:solidFill>
+          <a:ln>
+            <a:noFill/>
+          </a:ln>
+        </p:spPr>
+        <p:style>
+          <a:lnRef idx="1">
+            <a:schemeClr val="accent1"/>
+          </a:lnRef>
+          <a:fillRef idx="3">
+            <a:schemeClr val="accent1"/>
+          </a:fillRef>
+          <a:effectRef idx="2">
+            <a:schemeClr val="accent1"/>
+          </a:effectRef>
+          <a:fontRef idx="minor">
+            <a:schemeClr val="lt1"/>
+          </a:fontRef>
+        </p:style>
+        <p:txBody>
+          <a:bodyPr rtlCol="0" anchor="ctr"/>
+          <a:lstStyle/>
+          <a:p>
+            <a:pPr algn="ctr"/>
+          </a:p>
+        </p:txBody>
+      </p:sp>
+      <p:sp>
+        <p:nvSpPr>
+          <p:cNvPr id="4" name="TextBox 3"/>
+          <p:cNvSpPr txBox="1"/>
+          <p:nvPr/>
+        </p:nvSpPr>
+        <p:spPr>
+          <a:xfrm>
+            <a:off x="685800" y="128016"/>
+            <a:ext cx="10820095" cy="457200"/>
+          </a:xfrm>
+          <a:prstGeom prst="rect">
+            <a:avLst/>
+          </a:prstGeom>
+          <a:noFill/>
+        </p:spPr>
+        <p:txBody>
+          <a:bodyPr wrap="none">
+            <a:spAutoFit/>
+          </a:bodyPr>
+          <a:lstStyle/>
+          <a:p>
+            <a:pPr>
+              <a:defRPr sz="2200" b="1">
+                <a:solidFill>
+                  <a:srgbClr val="FFFFFF"/>
+                </a:solidFill>
+              </a:defRPr>
+            </a:pPr>
             <a:r>
               <a:t>Data Flow Diagram — Operations / Interaction Workflow</a:t>
             </a:r>
+          </a:p>
+        </p:txBody>
+      </p:sp>
+      <p:sp>
+        <p:nvSpPr>
+          <p:cNvPr id="5" name="TextBox 4"/>
+          <p:cNvSpPr txBox="1"/>
+          <p:nvPr/>
+        </p:nvSpPr>
+        <p:spPr>
+          <a:xfrm>
+            <a:off x="685800" y="420624"/>
+            <a:ext cx="10820095" cy="274320"/>
+          </a:xfrm>
+          <a:prstGeom prst="rect">
+            <a:avLst/>
+          </a:prstGeom>
+          <a:noFill/>
+        </p:spPr>
+        <p:txBody>
+          <a:bodyPr wrap="none">
+            <a:spAutoFit/>
+          </a:bodyPr>
+          <a:lstStyle/>
+          <a:p>
+            <a:pPr>
+              <a:defRPr sz="1200">
+                <a:solidFill>
+                  <a:srgbClr val="1AA6B7"/>
+                </a:solidFill>
+              </a:defRPr>
+            </a:pPr>
+            <a:r>
+              <a:t>Architecture</a:t>
+            </a:r>
+          </a:p>
+        </p:txBody>
+      </p:sp>
+      <p:sp>
+        <p:nvSpPr>
+          <p:cNvPr id="6" name="Rounded Rectangle 5"/>
+          <p:cNvSpPr/>
+          <p:nvPr/>
+        </p:nvSpPr>
+        <p:spPr>
+          <a:xfrm>
+            <a:off x="685800" y="978408"/>
+            <a:ext cx="10820095" cy="5056632"/>
+          </a:xfrm>
+          <a:prstGeom prst="roundRect">
+            <a:avLst/>
+          </a:prstGeom>
+          <a:solidFill>
+            <a:srgbClr val="FFFFFF"/>
+          </a:solidFill>
+          <a:ln>
+            <a:solidFill>
+              <a:srgbClr val="E5E7EB"/>
+            </a:solidFill>
+          </a:ln>
+        </p:spPr>
+        <p:style>
+          <a:lnRef idx="1">
+            <a:schemeClr val="accent1"/>
+          </a:lnRef>
+          <a:fillRef idx="3">
+            <a:schemeClr val="accent1"/>
+          </a:fillRef>
+          <a:effectRef idx="2">
+            <a:schemeClr val="accent1"/>
+          </a:effectRef>
+          <a:fontRef idx="minor">
+            <a:schemeClr val="lt1"/>
+          </a:fontRef>
+        </p:style>
+        <p:txBody>
+          <a:bodyPr rtlCol="0" anchor="ctr"/>
+          <a:lstStyle/>
+          <a:p>
+            <a:pPr algn="ctr"/>
           </a:p>
         </p:txBody>
       </p:sp>
       <p:pic>
         <p:nvPicPr>
-          <p:cNvPr id="3" name="Picture 2" descr="operation-workflow.png"/>
+          <p:cNvPr id="7" name="Picture 6" descr="operation-workflow.png"/>
           <p:cNvPicPr>
             <a:picLocks noChangeAspect="1"/>
           </p:cNvPicPr>
@@ -5356,8 +11097,8 @@
         </p:blipFill>
         <p:spPr>
           <a:xfrm>
-            <a:off x="685800" y="1417320"/>
-            <a:ext cx="10972800" cy="5120640"/>
+            <a:off x="758952" y="1051560"/>
+            <a:ext cx="10673791" cy="4910328"/>
           </a:xfrm>
           <a:prstGeom prst="rect">
             <a:avLst/>
@@ -5366,14 +11107,14 @@
       </p:pic>
       <p:sp>
         <p:nvSpPr>
-          <p:cNvPr id="4" name="TextBox 3"/>
+          <p:cNvPr id="8" name="TextBox 7"/>
           <p:cNvSpPr txBox="1"/>
           <p:nvPr/>
         </p:nvSpPr>
         <p:spPr>
           <a:xfrm>
-            <a:off x="685800" y="6583680"/>
-            <a:ext cx="10972800" cy="365760"/>
+            <a:off x="685800" y="6108192"/>
+            <a:ext cx="10820095" cy="384048"/>
           </a:xfrm>
           <a:prstGeom prst="rect">
             <a:avLst/>
@@ -5387,14 +11128,127 @@
           <a:lstStyle/>
           <a:p>
             <a:pPr algn="ctr">
-              <a:defRPr sz="1400">
-                <a:solidFill>
-                  <a:srgbClr val="444444"/>
+              <a:defRPr sz="1200">
+                <a:solidFill>
+                  <a:srgbClr val="6B7280"/>
                 </a:solidFill>
               </a:defRPr>
             </a:pPr>
             <a:r>
               <a:t>User operations: filtering, mode selection, comparison, and visual updates.</a:t>
+            </a:r>
+          </a:p>
+        </p:txBody>
+      </p:sp>
+      <p:sp>
+        <p:nvSpPr>
+          <p:cNvPr id="9" name="Rectangle 8"/>
+          <p:cNvSpPr/>
+          <p:nvPr/>
+        </p:nvSpPr>
+        <p:spPr>
+          <a:xfrm>
+            <a:off x="0" y="6537960"/>
+            <a:ext cx="12191695" cy="18288"/>
+          </a:xfrm>
+          <a:prstGeom prst="rect">
+            <a:avLst/>
+          </a:prstGeom>
+          <a:solidFill>
+            <a:srgbClr val="E5E7EB"/>
+          </a:solidFill>
+          <a:ln>
+            <a:noFill/>
+          </a:ln>
+        </p:spPr>
+        <p:style>
+          <a:lnRef idx="1">
+            <a:schemeClr val="accent1"/>
+          </a:lnRef>
+          <a:fillRef idx="3">
+            <a:schemeClr val="accent1"/>
+          </a:fillRef>
+          <a:effectRef idx="2">
+            <a:schemeClr val="accent1"/>
+          </a:effectRef>
+          <a:fontRef idx="minor">
+            <a:schemeClr val="lt1"/>
+          </a:fontRef>
+        </p:style>
+        <p:txBody>
+          <a:bodyPr rtlCol="0" anchor="ctr"/>
+          <a:lstStyle/>
+          <a:p>
+            <a:pPr algn="ctr"/>
+          </a:p>
+        </p:txBody>
+      </p:sp>
+      <p:sp>
+        <p:nvSpPr>
+          <p:cNvPr id="10" name="TextBox 9"/>
+          <p:cNvSpPr txBox="1"/>
+          <p:nvPr/>
+        </p:nvSpPr>
+        <p:spPr>
+          <a:xfrm>
+            <a:off x="685800" y="6583680"/>
+            <a:ext cx="7315200" cy="228600"/>
+          </a:xfrm>
+          <a:prstGeom prst="rect">
+            <a:avLst/>
+          </a:prstGeom>
+          <a:noFill/>
+        </p:spPr>
+        <p:txBody>
+          <a:bodyPr wrap="none">
+            <a:spAutoFit/>
+          </a:bodyPr>
+          <a:lstStyle/>
+          <a:p>
+            <a:pPr>
+              <a:defRPr sz="1000">
+                <a:solidFill>
+                  <a:srgbClr val="6B7280"/>
+                </a:solidFill>
+              </a:defRPr>
+            </a:pPr>
+            <a:r>
+              <a:t>Project #543 — Visualizing Spatio-Temporal Uncertainty</a:t>
+            </a:r>
+          </a:p>
+        </p:txBody>
+      </p:sp>
+      <p:sp>
+        <p:nvSpPr>
+          <p:cNvPr id="11" name="TextBox 10"/>
+          <p:cNvSpPr txBox="1"/>
+          <p:nvPr/>
+        </p:nvSpPr>
+        <p:spPr>
+          <a:xfrm>
+            <a:off x="9494215" y="6583680"/>
+            <a:ext cx="2011680" cy="228600"/>
+          </a:xfrm>
+          <a:prstGeom prst="rect">
+            <a:avLst/>
+          </a:prstGeom>
+          <a:noFill/>
+        </p:spPr>
+        <p:txBody>
+          <a:bodyPr wrap="none">
+            <a:spAutoFit/>
+          </a:bodyPr>
+          <a:lstStyle/>
+          <a:p>
+            <a:pPr algn="r">
+              <a:defRPr sz="1000">
+                <a:solidFill>
+                  <a:srgbClr val="6B7280"/>
+                </a:solidFill>
+              </a:defRPr>
+            </a:pPr>
+            <a:r>
+              <a:t>9/19</a:t>
             </a:r>
           </a:p>
         </p:txBody>
